--- a/CorpFin/2. Corporate Finance and Present Values.pptx
+++ b/CorpFin/2. Corporate Finance and Present Values.pptx
@@ -238,7 +238,7 @@
           <a:p>
             <a:fld id="{7E62B2E0-41D4-4BD0-8F27-233CF851A423}" type="datetimeFigureOut">
               <a:rPr lang="en-US" smtClean="0"/>
-              <a:t>1/12/2026</a:t>
+              <a:t>2/21/2026</a:t>
             </a:fld>
             <a:endParaRPr lang="en-US" dirty="0"/>
           </a:p>
@@ -5065,7 +5065,7 @@
           <a:p>
             <a:fld id="{BC9AB8A9-18BE-4EDF-90DD-E48A588FE9E1}" type="datetime1">
               <a:rPr lang="en-US" smtClean="0"/>
-              <a:t>1/12/2026</a:t>
+              <a:t>2/21/2026</a:t>
             </a:fld>
             <a:endParaRPr lang="en-US" dirty="0"/>
           </a:p>
@@ -5327,7 +5327,7 @@
           <a:p>
             <a:fld id="{31C11933-86B0-441A-B639-BD29FDFEFE70}" type="datetime1">
               <a:rPr lang="en-US" smtClean="0"/>
-              <a:t>1/12/2026</a:t>
+              <a:t>2/21/2026</a:t>
             </a:fld>
             <a:endParaRPr lang="en-US" dirty="0"/>
           </a:p>
@@ -5562,7 +5562,7 @@
           <a:p>
             <a:fld id="{74662F02-AFBF-41E7-AC4B-D00C212D7A74}" type="datetime1">
               <a:rPr lang="en-US" smtClean="0"/>
-              <a:t>1/12/2026</a:t>
+              <a:t>2/21/2026</a:t>
             </a:fld>
             <a:endParaRPr lang="en-US" dirty="0"/>
           </a:p>
@@ -9152,7 +9152,7 @@
           <a:p>
             <a:fld id="{5F466308-2A9A-43A3-8189-DAED754C8691}" type="datetime1">
               <a:rPr lang="en-US" smtClean="0"/>
-              <a:t>1/12/2026</a:t>
+              <a:t>2/21/2026</a:t>
             </a:fld>
             <a:endParaRPr lang="en-US" dirty="0"/>
           </a:p>
@@ -9809,7 +9809,7 @@
           <a:p>
             <a:fld id="{FC51178D-1D9D-49FF-BA4D-77D5F3F2ABE7}" type="datetime1">
               <a:rPr lang="en-US" smtClean="0"/>
-              <a:t>1/12/2026</a:t>
+              <a:t>2/21/2026</a:t>
             </a:fld>
             <a:endParaRPr lang="en-US" dirty="0"/>
           </a:p>
@@ -10111,7 +10111,7 @@
           <a:p>
             <a:fld id="{84A73D5F-7352-4D75-84BB-BEEE96694360}" type="datetime1">
               <a:rPr lang="en-US" smtClean="0"/>
-              <a:t>1/12/2026</a:t>
+              <a:t>2/21/2026</a:t>
             </a:fld>
             <a:endParaRPr lang="en-US" dirty="0"/>
           </a:p>
@@ -10533,7 +10533,7 @@
           <a:p>
             <a:fld id="{73AEC2FA-EF00-4A47-8C60-11D9B66273AB}" type="datetime1">
               <a:rPr lang="en-US" smtClean="0"/>
-              <a:t>1/12/2026</a:t>
+              <a:t>2/21/2026</a:t>
             </a:fld>
             <a:endParaRPr lang="en-US" dirty="0"/>
           </a:p>
@@ -10695,7 +10695,7 @@
           <a:p>
             <a:fld id="{69C03762-E4E4-41FB-87AC-4875A8A25370}" type="datetime1">
               <a:rPr lang="en-US" smtClean="0"/>
-              <a:t>1/12/2026</a:t>
+              <a:t>2/21/2026</a:t>
             </a:fld>
             <a:endParaRPr lang="en-US" dirty="0"/>
           </a:p>
@@ -10790,7 +10790,7 @@
           <a:p>
             <a:fld id="{663153EE-997E-48D6-BC05-B28D307B015C}" type="datetime1">
               <a:rPr lang="en-US" smtClean="0"/>
-              <a:t>1/12/2026</a:t>
+              <a:t>2/21/2026</a:t>
             </a:fld>
             <a:endParaRPr lang="en-US" dirty="0"/>
           </a:p>
@@ -11168,7 +11168,7 @@
           <a:p>
             <a:fld id="{E67CB83A-8CDA-4EB5-9F88-80628B7C644C}" type="datetime1">
               <a:rPr lang="en-US" smtClean="0"/>
-              <a:t>1/12/2026</a:t>
+              <a:t>2/21/2026</a:t>
             </a:fld>
             <a:endParaRPr lang="en-US" dirty="0"/>
           </a:p>
@@ -11456,7 +11456,7 @@
           <a:p>
             <a:fld id="{22FEB533-51F5-4A09-A69B-BDA5FA92A366}" type="datetime1">
               <a:rPr lang="en-US" smtClean="0"/>
-              <a:t>1/12/2026</a:t>
+              <a:t>2/21/2026</a:t>
             </a:fld>
             <a:endParaRPr lang="en-US" dirty="0"/>
           </a:p>
@@ -11667,7 +11667,7 @@
           <a:p>
             <a:fld id="{64819377-49A4-4FAF-9376-1B9935A96765}" type="datetime1">
               <a:rPr lang="en-US" smtClean="0"/>
-              <a:t>1/12/2026</a:t>
+              <a:t>2/21/2026</a:t>
             </a:fld>
             <a:endParaRPr lang="en-US" dirty="0"/>
           </a:p>
@@ -14659,8 +14659,8 @@
           </a:p>
         </p:txBody>
       </p:sp>
-      <mc:AlternateContent xmlns:mc="http://schemas.openxmlformats.org/markup-compatibility/2006">
-        <mc:Choice xmlns:a14="http://schemas.microsoft.com/office/drawing/2010/main" Requires="a14">
+      <mc:AlternateContent xmlns:mc="http://schemas.openxmlformats.org/markup-compatibility/2006" xmlns:a14="http://schemas.microsoft.com/office/drawing/2010/main">
+        <mc:Choice Requires="a14">
           <p:sp>
             <p:nvSpPr>
               <p:cNvPr id="10" name="Content Placeholder 2">
@@ -14725,7 +14725,7 @@
             </p:txBody>
           </p:sp>
         </mc:Choice>
-        <mc:Fallback>
+        <mc:Fallback xmlns="">
           <p:sp>
             <p:nvSpPr>
               <p:cNvPr id="10" name="Content Placeholder 2">
@@ -18250,8 +18250,8 @@
           </a:p>
         </p:txBody>
       </p:sp>
-      <mc:AlternateContent xmlns:mc="http://schemas.openxmlformats.org/markup-compatibility/2006">
-        <mc:Choice xmlns:a14="http://schemas.microsoft.com/office/drawing/2010/main" Requires="a14">
+      <mc:AlternateContent xmlns:mc="http://schemas.openxmlformats.org/markup-compatibility/2006" xmlns:a14="http://schemas.microsoft.com/office/drawing/2010/main">
+        <mc:Choice Requires="a14">
           <p:sp>
             <p:nvSpPr>
               <p:cNvPr id="10" name="Content Placeholder 2">
@@ -18354,7 +18354,7 @@
             </p:txBody>
           </p:sp>
         </mc:Choice>
-        <mc:Fallback>
+        <mc:Fallback xmlns="">
           <p:sp>
             <p:nvSpPr>
               <p:cNvPr id="10" name="Content Placeholder 2">
@@ -18810,8 +18810,8 @@
           </a:p>
         </p:txBody>
       </p:sp>
-      <mc:AlternateContent xmlns:mc="http://schemas.openxmlformats.org/markup-compatibility/2006">
-        <mc:Choice xmlns:a14="http://schemas.microsoft.com/office/drawing/2010/main" Requires="a14">
+      <mc:AlternateContent xmlns:mc="http://schemas.openxmlformats.org/markup-compatibility/2006" xmlns:a14="http://schemas.microsoft.com/office/drawing/2010/main">
+        <mc:Choice Requires="a14">
           <p:sp>
             <p:nvSpPr>
               <p:cNvPr id="10" name="Content Placeholder 2">
@@ -18934,7 +18934,7 @@
             </p:txBody>
           </p:sp>
         </mc:Choice>
-        <mc:Fallback>
+        <mc:Fallback xmlns="">
           <p:sp>
             <p:nvSpPr>
               <p:cNvPr id="10" name="Content Placeholder 2">
@@ -19376,8 +19376,8 @@
           </a:p>
         </p:txBody>
       </p:sp>
-      <mc:AlternateContent xmlns:mc="http://schemas.openxmlformats.org/markup-compatibility/2006">
-        <mc:Choice xmlns:a14="http://schemas.microsoft.com/office/drawing/2010/main" Requires="a14">
+      <mc:AlternateContent xmlns:mc="http://schemas.openxmlformats.org/markup-compatibility/2006" xmlns:a14="http://schemas.microsoft.com/office/drawing/2010/main">
+        <mc:Choice Requires="a14">
           <p:sp>
             <p:nvSpPr>
               <p:cNvPr id="10" name="Content Placeholder 2">
@@ -19500,7 +19500,7 @@
             </p:txBody>
           </p:sp>
         </mc:Choice>
-        <mc:Fallback>
+        <mc:Fallback xmlns="">
           <p:sp>
             <p:nvSpPr>
               <p:cNvPr id="10" name="Content Placeholder 2">
@@ -21472,8 +21472,8 @@
           </a:graphicData>
         </a:graphic>
       </p:graphicFrame>
-      <mc:AlternateContent xmlns:mc="http://schemas.openxmlformats.org/markup-compatibility/2006">
-        <mc:Choice xmlns:a14="http://schemas.microsoft.com/office/drawing/2010/main" Requires="a14">
+      <mc:AlternateContent xmlns:mc="http://schemas.openxmlformats.org/markup-compatibility/2006" xmlns:a14="http://schemas.microsoft.com/office/drawing/2010/main">
+        <mc:Choice Requires="a14">
           <p:sp>
             <p:nvSpPr>
               <p:cNvPr id="3" name="Content Placeholder 2">
@@ -21737,7 +21737,7 @@
             </p:txBody>
           </p:sp>
         </mc:Choice>
-        <mc:Fallback>
+        <mc:Fallback xmlns="">
           <p:sp>
             <p:nvSpPr>
               <p:cNvPr id="3" name="Content Placeholder 2">
@@ -22567,8 +22567,8 @@
           </a:graphicData>
         </a:graphic>
       </p:graphicFrame>
-      <mc:AlternateContent xmlns:mc="http://schemas.openxmlformats.org/markup-compatibility/2006">
-        <mc:Choice xmlns:a14="http://schemas.microsoft.com/office/drawing/2010/main" Requires="a14">
+      <mc:AlternateContent xmlns:mc="http://schemas.openxmlformats.org/markup-compatibility/2006" xmlns:a14="http://schemas.microsoft.com/office/drawing/2010/main">
+        <mc:Choice Requires="a14">
           <p:sp>
             <p:nvSpPr>
               <p:cNvPr id="9" name="Content Placeholder 2">
@@ -22832,7 +22832,7 @@
             </p:txBody>
           </p:sp>
         </mc:Choice>
-        <mc:Fallback>
+        <mc:Fallback xmlns="">
           <p:sp>
             <p:nvSpPr>
               <p:cNvPr id="9" name="Content Placeholder 2">
@@ -23529,8 +23529,8 @@
           </a:p>
         </p:txBody>
       </p:sp>
-      <mc:AlternateContent xmlns:mc="http://schemas.openxmlformats.org/markup-compatibility/2006">
-        <mc:Choice xmlns:a14="http://schemas.microsoft.com/office/drawing/2010/main" Requires="a14">
+      <mc:AlternateContent xmlns:mc="http://schemas.openxmlformats.org/markup-compatibility/2006" xmlns:a14="http://schemas.microsoft.com/office/drawing/2010/main">
+        <mc:Choice Requires="a14">
           <p:sp>
             <p:nvSpPr>
               <p:cNvPr id="10" name="Content Placeholder 2">
@@ -23623,7 +23623,7 @@
             </p:txBody>
           </p:sp>
         </mc:Choice>
-        <mc:Fallback>
+        <mc:Fallback xmlns="">
           <p:sp>
             <p:nvSpPr>
               <p:cNvPr id="10" name="Content Placeholder 2">
@@ -24681,7 +24681,7 @@
             </a:r>
             <a:r>
               <a:rPr lang="en-US" sz="1800" dirty="0"/>
-              <a:t>: Physical assets such as oil fields, factories, and machines (things you can touch)</a:t>
+              <a:t>: Physical assets such as oil fields, factories, and machines (things you can touch).</a:t>
             </a:r>
           </a:p>
           <a:p>
@@ -24692,8 +24692,13 @@
             </a:r>
             <a:r>
               <a:rPr lang="en-US" sz="1800" dirty="0"/>
-              <a:t>: No physical substance, such as patents, brands, and corporate culture. </a:t>
-            </a:r>
+              <a:t>: No physical substance, such as patents, brands, and corporate culture</a:t>
+            </a:r>
+            <a:r>
+              <a:rPr lang="en-US" sz="1800"/>
+              <a:t>. </a:t>
+            </a:r>
+            <a:endParaRPr lang="en-US" sz="1800" dirty="0"/>
           </a:p>
           <a:p>
             <a:r>
@@ -24990,8 +24995,8 @@
           </a:p>
         </p:txBody>
       </p:sp>
-      <mc:AlternateContent xmlns:mc="http://schemas.openxmlformats.org/markup-compatibility/2006">
-        <mc:Choice xmlns:a14="http://schemas.microsoft.com/office/drawing/2010/main" Requires="a14">
+      <mc:AlternateContent xmlns:mc="http://schemas.openxmlformats.org/markup-compatibility/2006" xmlns:a14="http://schemas.microsoft.com/office/drawing/2010/main">
+        <mc:Choice Requires="a14">
           <p:sp>
             <p:nvSpPr>
               <p:cNvPr id="10" name="Content Placeholder 2">
@@ -25099,7 +25104,7 @@
             </p:txBody>
           </p:sp>
         </mc:Choice>
-        <mc:Fallback>
+        <mc:Fallback xmlns="">
           <p:sp>
             <p:nvSpPr>
               <p:cNvPr id="10" name="Content Placeholder 2">
@@ -25212,8 +25217,8 @@
           </a:graphicData>
         </a:graphic>
       </p:graphicFrame>
-      <mc:AlternateContent xmlns:mc="http://schemas.openxmlformats.org/markup-compatibility/2006">
-        <mc:Choice xmlns:a14="http://schemas.microsoft.com/office/drawing/2010/main" Requires="a14">
+      <mc:AlternateContent xmlns:mc="http://schemas.openxmlformats.org/markup-compatibility/2006" xmlns:a14="http://schemas.microsoft.com/office/drawing/2010/main">
+        <mc:Choice Requires="a14">
           <p:sp>
             <p:nvSpPr>
               <p:cNvPr id="5" name="Content Placeholder 2">
@@ -25530,7 +25535,7 @@
             </p:txBody>
           </p:sp>
         </mc:Choice>
-        <mc:Fallback>
+        <mc:Fallback xmlns="">
           <p:sp>
             <p:nvSpPr>
               <p:cNvPr id="5" name="Content Placeholder 2">

--- a/CorpFin/2. Corporate Finance and Present Values.pptx
+++ b/CorpFin/2. Corporate Finance and Present Values.pptx
@@ -6,7 +6,7 @@
     <p:sldMasterId id="2147483842" r:id="rId2"/>
   </p:sldMasterIdLst>
   <p:notesMasterIdLst>
-    <p:notesMasterId r:id="rId44"/>
+    <p:notesMasterId r:id="rId47"/>
   </p:notesMasterIdLst>
   <p:sldIdLst>
     <p:sldId id="256" r:id="rId3"/>
@@ -15,41 +15,44 @@
     <p:sldId id="377" r:id="rId6"/>
     <p:sldId id="379" r:id="rId7"/>
     <p:sldId id="1613" r:id="rId8"/>
-    <p:sldId id="1614" r:id="rId9"/>
-    <p:sldId id="1615" r:id="rId10"/>
-    <p:sldId id="1616" r:id="rId11"/>
-    <p:sldId id="1617" r:id="rId12"/>
-    <p:sldId id="1618" r:id="rId13"/>
-    <p:sldId id="1619" r:id="rId14"/>
-    <p:sldId id="1620" r:id="rId15"/>
-    <p:sldId id="1621" r:id="rId16"/>
-    <p:sldId id="1644" r:id="rId17"/>
-    <p:sldId id="1645" r:id="rId18"/>
-    <p:sldId id="1646" r:id="rId19"/>
-    <p:sldId id="1647" r:id="rId20"/>
-    <p:sldId id="1648" r:id="rId21"/>
-    <p:sldId id="1649" r:id="rId22"/>
-    <p:sldId id="1650" r:id="rId23"/>
-    <p:sldId id="1651" r:id="rId24"/>
-    <p:sldId id="1652" r:id="rId25"/>
-    <p:sldId id="1653" r:id="rId26"/>
-    <p:sldId id="1654" r:id="rId27"/>
-    <p:sldId id="1655" r:id="rId28"/>
-    <p:sldId id="1656" r:id="rId29"/>
-    <p:sldId id="1657" r:id="rId30"/>
-    <p:sldId id="1658" r:id="rId31"/>
-    <p:sldId id="1659" r:id="rId32"/>
-    <p:sldId id="1660" r:id="rId33"/>
-    <p:sldId id="1663" r:id="rId34"/>
-    <p:sldId id="1661" r:id="rId35"/>
-    <p:sldId id="1662" r:id="rId36"/>
-    <p:sldId id="1664" r:id="rId37"/>
-    <p:sldId id="1665" r:id="rId38"/>
-    <p:sldId id="1666" r:id="rId39"/>
-    <p:sldId id="1667" r:id="rId40"/>
-    <p:sldId id="1668" r:id="rId41"/>
-    <p:sldId id="1669" r:id="rId42"/>
-    <p:sldId id="337" r:id="rId43"/>
+    <p:sldId id="1670" r:id="rId9"/>
+    <p:sldId id="1671" r:id="rId10"/>
+    <p:sldId id="1614" r:id="rId11"/>
+    <p:sldId id="1672" r:id="rId12"/>
+    <p:sldId id="1615" r:id="rId13"/>
+    <p:sldId id="1616" r:id="rId14"/>
+    <p:sldId id="1617" r:id="rId15"/>
+    <p:sldId id="1618" r:id="rId16"/>
+    <p:sldId id="1619" r:id="rId17"/>
+    <p:sldId id="1620" r:id="rId18"/>
+    <p:sldId id="1621" r:id="rId19"/>
+    <p:sldId id="1644" r:id="rId20"/>
+    <p:sldId id="1645" r:id="rId21"/>
+    <p:sldId id="1646" r:id="rId22"/>
+    <p:sldId id="1647" r:id="rId23"/>
+    <p:sldId id="1648" r:id="rId24"/>
+    <p:sldId id="1649" r:id="rId25"/>
+    <p:sldId id="1650" r:id="rId26"/>
+    <p:sldId id="1651" r:id="rId27"/>
+    <p:sldId id="1652" r:id="rId28"/>
+    <p:sldId id="1653" r:id="rId29"/>
+    <p:sldId id="1654" r:id="rId30"/>
+    <p:sldId id="1655" r:id="rId31"/>
+    <p:sldId id="1656" r:id="rId32"/>
+    <p:sldId id="1657" r:id="rId33"/>
+    <p:sldId id="1658" r:id="rId34"/>
+    <p:sldId id="1659" r:id="rId35"/>
+    <p:sldId id="1660" r:id="rId36"/>
+    <p:sldId id="1663" r:id="rId37"/>
+    <p:sldId id="1661" r:id="rId38"/>
+    <p:sldId id="1662" r:id="rId39"/>
+    <p:sldId id="1664" r:id="rId40"/>
+    <p:sldId id="1665" r:id="rId41"/>
+    <p:sldId id="1666" r:id="rId42"/>
+    <p:sldId id="1667" r:id="rId43"/>
+    <p:sldId id="1668" r:id="rId44"/>
+    <p:sldId id="1669" r:id="rId45"/>
+    <p:sldId id="337" r:id="rId46"/>
   </p:sldIdLst>
   <p:sldSz cx="12192000" cy="6858000"/>
   <p:notesSz cx="6858000" cy="9144000"/>
@@ -238,7 +241,7 @@
           <a:p>
             <a:fld id="{7E62B2E0-41D4-4BD0-8F27-233CF851A423}" type="datetimeFigureOut">
               <a:rPr lang="en-US" smtClean="0"/>
-              <a:t>2/21/2026</a:t>
+              <a:t>8/11/2026</a:t>
             </a:fld>
             <a:endParaRPr lang="en-US" dirty="0"/>
           </a:p>
@@ -597,6 +600,330 @@
         <p:cNvPr id="1" name="">
           <a:extLst>
             <a:ext uri="{FF2B5EF4-FFF2-40B4-BE49-F238E27FC236}">
+              <a16:creationId xmlns:a16="http://schemas.microsoft.com/office/drawing/2014/main" id="{83248BEA-6DDA-AFFC-27C7-788CBCBD40C3}"/>
+            </a:ext>
+          </a:extLst>
+        </p:cNvPr>
+        <p:cNvGrpSpPr/>
+        <p:nvPr/>
+      </p:nvGrpSpPr>
+      <p:grpSpPr>
+        <a:xfrm>
+          <a:off x="0" y="0"/>
+          <a:ext cx="0" cy="0"/>
+          <a:chOff x="0" y="0"/>
+          <a:chExt cx="0" cy="0"/>
+        </a:xfrm>
+      </p:grpSpPr>
+      <p:sp>
+        <p:nvSpPr>
+          <p:cNvPr id="2" name="Slide Image Placeholder 1">
+            <a:extLst>
+              <a:ext uri="{FF2B5EF4-FFF2-40B4-BE49-F238E27FC236}">
+                <a16:creationId xmlns:a16="http://schemas.microsoft.com/office/drawing/2014/main" id="{9D6D5591-D822-A9E6-9874-91C1783656F1}"/>
+              </a:ext>
+            </a:extLst>
+          </p:cNvPr>
+          <p:cNvSpPr>
+            <a:spLocks noGrp="1" noRot="1" noChangeAspect="1"/>
+          </p:cNvSpPr>
+          <p:nvPr>
+            <p:ph type="sldImg"/>
+          </p:nvPr>
+        </p:nvSpPr>
+        <p:spPr/>
+      </p:sp>
+      <p:sp>
+        <p:nvSpPr>
+          <p:cNvPr id="3" name="Notes Placeholder 2">
+            <a:extLst>
+              <a:ext uri="{FF2B5EF4-FFF2-40B4-BE49-F238E27FC236}">
+                <a16:creationId xmlns:a16="http://schemas.microsoft.com/office/drawing/2014/main" id="{8CB5611D-FA1E-0469-AE50-7BFFA6086629}"/>
+              </a:ext>
+            </a:extLst>
+          </p:cNvPr>
+          <p:cNvSpPr>
+            <a:spLocks noGrp="1"/>
+          </p:cNvSpPr>
+          <p:nvPr>
+            <p:ph type="body" idx="1"/>
+          </p:nvPr>
+        </p:nvSpPr>
+        <p:spPr/>
+        <p:txBody>
+          <a:bodyPr/>
+          <a:lstStyle/>
+          <a:p>
+            <a:endParaRPr lang="en-US" dirty="0"/>
+          </a:p>
+        </p:txBody>
+      </p:sp>
+      <p:sp>
+        <p:nvSpPr>
+          <p:cNvPr id="4" name="Slide Number Placeholder 3">
+            <a:extLst>
+              <a:ext uri="{FF2B5EF4-FFF2-40B4-BE49-F238E27FC236}">
+                <a16:creationId xmlns:a16="http://schemas.microsoft.com/office/drawing/2014/main" id="{B2D663B8-0F8A-0D57-7385-67F9D84F953B}"/>
+              </a:ext>
+            </a:extLst>
+          </p:cNvPr>
+          <p:cNvSpPr>
+            <a:spLocks noGrp="1"/>
+          </p:cNvSpPr>
+          <p:nvPr>
+            <p:ph type="sldNum" sz="quarter" idx="5"/>
+          </p:nvPr>
+        </p:nvSpPr>
+        <p:spPr/>
+        <p:txBody>
+          <a:bodyPr/>
+          <a:lstStyle/>
+          <a:p>
+            <a:fld id="{C5CB39C3-7704-43B7-896D-E2F268455EEA}" type="slidenum">
+              <a:rPr lang="en-US" smtClean="0"/>
+              <a:t>10</a:t>
+            </a:fld>
+            <a:endParaRPr lang="en-US" dirty="0"/>
+          </a:p>
+        </p:txBody>
+      </p:sp>
+    </p:spTree>
+    <p:extLst>
+      <p:ext uri="{BB962C8B-B14F-4D97-AF65-F5344CB8AC3E}">
+        <p14:creationId xmlns:p14="http://schemas.microsoft.com/office/powerpoint/2010/main" val="4154800805"/>
+      </p:ext>
+    </p:extLst>
+  </p:cSld>
+  <p:clrMapOvr>
+    <a:masterClrMapping/>
+  </p:clrMapOvr>
+</p:notes>
+</file>
+
+<file path=ppt/notesSlides/notesSlide11.xml><?xml version="1.0" encoding="utf-8"?>
+<p:notes xmlns:a="http://schemas.openxmlformats.org/drawingml/2006/main" xmlns:r="http://schemas.openxmlformats.org/officeDocument/2006/relationships" xmlns:p="http://schemas.openxmlformats.org/presentationml/2006/main">
+  <p:cSld>
+    <p:spTree>
+      <p:nvGrpSpPr>
+        <p:cNvPr id="1" name="">
+          <a:extLst>
+            <a:ext uri="{FF2B5EF4-FFF2-40B4-BE49-F238E27FC236}">
+              <a16:creationId xmlns:a16="http://schemas.microsoft.com/office/drawing/2014/main" id="{C96BABB0-316D-22C5-57A4-3C6C4455CDDB}"/>
+            </a:ext>
+          </a:extLst>
+        </p:cNvPr>
+        <p:cNvGrpSpPr/>
+        <p:nvPr/>
+      </p:nvGrpSpPr>
+      <p:grpSpPr>
+        <a:xfrm>
+          <a:off x="0" y="0"/>
+          <a:ext cx="0" cy="0"/>
+          <a:chOff x="0" y="0"/>
+          <a:chExt cx="0" cy="0"/>
+        </a:xfrm>
+      </p:grpSpPr>
+      <p:sp>
+        <p:nvSpPr>
+          <p:cNvPr id="2" name="Slide Image Placeholder 1">
+            <a:extLst>
+              <a:ext uri="{FF2B5EF4-FFF2-40B4-BE49-F238E27FC236}">
+                <a16:creationId xmlns:a16="http://schemas.microsoft.com/office/drawing/2014/main" id="{6214CCC8-D2D2-C5B7-997F-477D5A11D75E}"/>
+              </a:ext>
+            </a:extLst>
+          </p:cNvPr>
+          <p:cNvSpPr>
+            <a:spLocks noGrp="1" noRot="1" noChangeAspect="1"/>
+          </p:cNvSpPr>
+          <p:nvPr>
+            <p:ph type="sldImg"/>
+          </p:nvPr>
+        </p:nvSpPr>
+        <p:spPr/>
+      </p:sp>
+      <p:sp>
+        <p:nvSpPr>
+          <p:cNvPr id="3" name="Notes Placeholder 2">
+            <a:extLst>
+              <a:ext uri="{FF2B5EF4-FFF2-40B4-BE49-F238E27FC236}">
+                <a16:creationId xmlns:a16="http://schemas.microsoft.com/office/drawing/2014/main" id="{B8694E96-A44E-2419-5C6F-1159F303669A}"/>
+              </a:ext>
+            </a:extLst>
+          </p:cNvPr>
+          <p:cNvSpPr>
+            <a:spLocks noGrp="1"/>
+          </p:cNvSpPr>
+          <p:nvPr>
+            <p:ph type="body" idx="1"/>
+          </p:nvPr>
+        </p:nvSpPr>
+        <p:spPr/>
+        <p:txBody>
+          <a:bodyPr/>
+          <a:lstStyle/>
+          <a:p>
+            <a:endParaRPr lang="en-US" dirty="0"/>
+          </a:p>
+        </p:txBody>
+      </p:sp>
+      <p:sp>
+        <p:nvSpPr>
+          <p:cNvPr id="4" name="Slide Number Placeholder 3">
+            <a:extLst>
+              <a:ext uri="{FF2B5EF4-FFF2-40B4-BE49-F238E27FC236}">
+                <a16:creationId xmlns:a16="http://schemas.microsoft.com/office/drawing/2014/main" id="{1FC81F0A-0965-93D5-3FE7-6FE72E0AE534}"/>
+              </a:ext>
+            </a:extLst>
+          </p:cNvPr>
+          <p:cNvSpPr>
+            <a:spLocks noGrp="1"/>
+          </p:cNvSpPr>
+          <p:nvPr>
+            <p:ph type="sldNum" sz="quarter" idx="5"/>
+          </p:nvPr>
+        </p:nvSpPr>
+        <p:spPr/>
+        <p:txBody>
+          <a:bodyPr/>
+          <a:lstStyle/>
+          <a:p>
+            <a:fld id="{C5CB39C3-7704-43B7-896D-E2F268455EEA}" type="slidenum">
+              <a:rPr lang="en-US" smtClean="0"/>
+              <a:t>11</a:t>
+            </a:fld>
+            <a:endParaRPr lang="en-US" dirty="0"/>
+          </a:p>
+        </p:txBody>
+      </p:sp>
+    </p:spTree>
+    <p:extLst>
+      <p:ext uri="{BB962C8B-B14F-4D97-AF65-F5344CB8AC3E}">
+        <p14:creationId xmlns:p14="http://schemas.microsoft.com/office/powerpoint/2010/main" val="2244613857"/>
+      </p:ext>
+    </p:extLst>
+  </p:cSld>
+  <p:clrMapOvr>
+    <a:masterClrMapping/>
+  </p:clrMapOvr>
+</p:notes>
+</file>
+
+<file path=ppt/notesSlides/notesSlide12.xml><?xml version="1.0" encoding="utf-8"?>
+<p:notes xmlns:a="http://schemas.openxmlformats.org/drawingml/2006/main" xmlns:r="http://schemas.openxmlformats.org/officeDocument/2006/relationships" xmlns:p="http://schemas.openxmlformats.org/presentationml/2006/main">
+  <p:cSld>
+    <p:spTree>
+      <p:nvGrpSpPr>
+        <p:cNvPr id="1" name="">
+          <a:extLst>
+            <a:ext uri="{FF2B5EF4-FFF2-40B4-BE49-F238E27FC236}">
+              <a16:creationId xmlns:a16="http://schemas.microsoft.com/office/drawing/2014/main" id="{002CF418-1071-7BDA-F9CC-380E11CC8AA7}"/>
+            </a:ext>
+          </a:extLst>
+        </p:cNvPr>
+        <p:cNvGrpSpPr/>
+        <p:nvPr/>
+      </p:nvGrpSpPr>
+      <p:grpSpPr>
+        <a:xfrm>
+          <a:off x="0" y="0"/>
+          <a:ext cx="0" cy="0"/>
+          <a:chOff x="0" y="0"/>
+          <a:chExt cx="0" cy="0"/>
+        </a:xfrm>
+      </p:grpSpPr>
+      <p:sp>
+        <p:nvSpPr>
+          <p:cNvPr id="2" name="Slide Image Placeholder 1">
+            <a:extLst>
+              <a:ext uri="{FF2B5EF4-FFF2-40B4-BE49-F238E27FC236}">
+                <a16:creationId xmlns:a16="http://schemas.microsoft.com/office/drawing/2014/main" id="{57FA8CE4-FE7E-D5A3-BF75-6C6323C83D50}"/>
+              </a:ext>
+            </a:extLst>
+          </p:cNvPr>
+          <p:cNvSpPr>
+            <a:spLocks noGrp="1" noRot="1" noChangeAspect="1"/>
+          </p:cNvSpPr>
+          <p:nvPr>
+            <p:ph type="sldImg"/>
+          </p:nvPr>
+        </p:nvSpPr>
+        <p:spPr/>
+      </p:sp>
+      <p:sp>
+        <p:nvSpPr>
+          <p:cNvPr id="3" name="Notes Placeholder 2">
+            <a:extLst>
+              <a:ext uri="{FF2B5EF4-FFF2-40B4-BE49-F238E27FC236}">
+                <a16:creationId xmlns:a16="http://schemas.microsoft.com/office/drawing/2014/main" id="{6B8C5174-0EF6-D364-90D2-02FB22980887}"/>
+              </a:ext>
+            </a:extLst>
+          </p:cNvPr>
+          <p:cNvSpPr>
+            <a:spLocks noGrp="1"/>
+          </p:cNvSpPr>
+          <p:nvPr>
+            <p:ph type="body" idx="1"/>
+          </p:nvPr>
+        </p:nvSpPr>
+        <p:spPr/>
+        <p:txBody>
+          <a:bodyPr/>
+          <a:lstStyle/>
+          <a:p>
+            <a:endParaRPr lang="en-US" dirty="0"/>
+          </a:p>
+        </p:txBody>
+      </p:sp>
+      <p:sp>
+        <p:nvSpPr>
+          <p:cNvPr id="4" name="Slide Number Placeholder 3">
+            <a:extLst>
+              <a:ext uri="{FF2B5EF4-FFF2-40B4-BE49-F238E27FC236}">
+                <a16:creationId xmlns:a16="http://schemas.microsoft.com/office/drawing/2014/main" id="{10CDE50F-F617-A64F-495E-BCD59A26F226}"/>
+              </a:ext>
+            </a:extLst>
+          </p:cNvPr>
+          <p:cNvSpPr>
+            <a:spLocks noGrp="1"/>
+          </p:cNvSpPr>
+          <p:nvPr>
+            <p:ph type="sldNum" sz="quarter" idx="5"/>
+          </p:nvPr>
+        </p:nvSpPr>
+        <p:spPr/>
+        <p:txBody>
+          <a:bodyPr/>
+          <a:lstStyle/>
+          <a:p>
+            <a:fld id="{C5CB39C3-7704-43B7-896D-E2F268455EEA}" type="slidenum">
+              <a:rPr lang="en-US" smtClean="0"/>
+              <a:t>12</a:t>
+            </a:fld>
+            <a:endParaRPr lang="en-US" dirty="0"/>
+          </a:p>
+        </p:txBody>
+      </p:sp>
+    </p:spTree>
+    <p:extLst>
+      <p:ext uri="{BB962C8B-B14F-4D97-AF65-F5344CB8AC3E}">
+        <p14:creationId xmlns:p14="http://schemas.microsoft.com/office/powerpoint/2010/main" val="2066363862"/>
+      </p:ext>
+    </p:extLst>
+  </p:cSld>
+  <p:clrMapOvr>
+    <a:masterClrMapping/>
+  </p:clrMapOvr>
+</p:notes>
+</file>
+
+<file path=ppt/notesSlides/notesSlide13.xml><?xml version="1.0" encoding="utf-8"?>
+<p:notes xmlns:a="http://schemas.openxmlformats.org/drawingml/2006/main" xmlns:r="http://schemas.openxmlformats.org/officeDocument/2006/relationships" xmlns:p="http://schemas.openxmlformats.org/presentationml/2006/main">
+  <p:cSld>
+    <p:spTree>
+      <p:nvGrpSpPr>
+        <p:cNvPr id="1" name="">
+          <a:extLst>
+            <a:ext uri="{FF2B5EF4-FFF2-40B4-BE49-F238E27FC236}">
               <a16:creationId xmlns:a16="http://schemas.microsoft.com/office/drawing/2014/main" id="{8CCCD439-9F27-C4F5-52EF-A42F55E75840}"/>
             </a:ext>
           </a:extLst>
@@ -678,7 +1005,7 @@
           <a:p>
             <a:fld id="{C5CB39C3-7704-43B7-896D-E2F268455EEA}" type="slidenum">
               <a:rPr lang="en-US" smtClean="0"/>
-              <a:t>10</a:t>
+              <a:t>13</a:t>
             </a:fld>
             <a:endParaRPr lang="en-US" dirty="0"/>
           </a:p>
@@ -697,7 +1024,7 @@
 </p:notes>
 </file>
 
-<file path=ppt/notesSlides/notesSlide11.xml><?xml version="1.0" encoding="utf-8"?>
+<file path=ppt/notesSlides/notesSlide14.xml><?xml version="1.0" encoding="utf-8"?>
 <p:notes xmlns:a="http://schemas.openxmlformats.org/drawingml/2006/main" xmlns:r="http://schemas.openxmlformats.org/officeDocument/2006/relationships" xmlns:p="http://schemas.openxmlformats.org/presentationml/2006/main">
   <p:cSld>
     <p:spTree>
@@ -786,7 +1113,7 @@
           <a:p>
             <a:fld id="{C5CB39C3-7704-43B7-896D-E2F268455EEA}" type="slidenum">
               <a:rPr lang="en-US" smtClean="0"/>
-              <a:t>11</a:t>
+              <a:t>14</a:t>
             </a:fld>
             <a:endParaRPr lang="en-US" dirty="0"/>
           </a:p>
@@ -805,7 +1132,7 @@
 </p:notes>
 </file>
 
-<file path=ppt/notesSlides/notesSlide12.xml><?xml version="1.0" encoding="utf-8"?>
+<file path=ppt/notesSlides/notesSlide15.xml><?xml version="1.0" encoding="utf-8"?>
 <p:notes xmlns:a="http://schemas.openxmlformats.org/drawingml/2006/main" xmlns:r="http://schemas.openxmlformats.org/officeDocument/2006/relationships" xmlns:p="http://schemas.openxmlformats.org/presentationml/2006/main">
   <p:cSld>
     <p:spTree>
@@ -894,7 +1221,7 @@
           <a:p>
             <a:fld id="{C5CB39C3-7704-43B7-896D-E2F268455EEA}" type="slidenum">
               <a:rPr lang="en-US" smtClean="0"/>
-              <a:t>12</a:t>
+              <a:t>15</a:t>
             </a:fld>
             <a:endParaRPr lang="en-US" dirty="0"/>
           </a:p>
@@ -913,7 +1240,7 @@
 </p:notes>
 </file>
 
-<file path=ppt/notesSlides/notesSlide13.xml><?xml version="1.0" encoding="utf-8"?>
+<file path=ppt/notesSlides/notesSlide16.xml><?xml version="1.0" encoding="utf-8"?>
 <p:notes xmlns:a="http://schemas.openxmlformats.org/drawingml/2006/main" xmlns:r="http://schemas.openxmlformats.org/officeDocument/2006/relationships" xmlns:p="http://schemas.openxmlformats.org/presentationml/2006/main">
   <p:cSld>
     <p:spTree>
@@ -1002,7 +1329,7 @@
           <a:p>
             <a:fld id="{C5CB39C3-7704-43B7-896D-E2F268455EEA}" type="slidenum">
               <a:rPr lang="en-US" smtClean="0"/>
-              <a:t>13</a:t>
+              <a:t>16</a:t>
             </a:fld>
             <a:endParaRPr lang="en-US" dirty="0"/>
           </a:p>
@@ -1021,7 +1348,7 @@
 </p:notes>
 </file>
 
-<file path=ppt/notesSlides/notesSlide14.xml><?xml version="1.0" encoding="utf-8"?>
+<file path=ppt/notesSlides/notesSlide17.xml><?xml version="1.0" encoding="utf-8"?>
 <p:notes xmlns:a="http://schemas.openxmlformats.org/drawingml/2006/main" xmlns:r="http://schemas.openxmlformats.org/officeDocument/2006/relationships" xmlns:p="http://schemas.openxmlformats.org/presentationml/2006/main">
   <p:cSld>
     <p:spTree>
@@ -1110,7 +1437,7 @@
           <a:p>
             <a:fld id="{C5CB39C3-7704-43B7-896D-E2F268455EEA}" type="slidenum">
               <a:rPr lang="en-US" smtClean="0"/>
-              <a:t>14</a:t>
+              <a:t>17</a:t>
             </a:fld>
             <a:endParaRPr lang="en-US" dirty="0"/>
           </a:p>
@@ -1129,7 +1456,7 @@
 </p:notes>
 </file>
 
-<file path=ppt/notesSlides/notesSlide15.xml><?xml version="1.0" encoding="utf-8"?>
+<file path=ppt/notesSlides/notesSlide18.xml><?xml version="1.0" encoding="utf-8"?>
 <p:notes xmlns:a="http://schemas.openxmlformats.org/drawingml/2006/main" xmlns:r="http://schemas.openxmlformats.org/officeDocument/2006/relationships" xmlns:p="http://schemas.openxmlformats.org/presentationml/2006/main">
   <p:cSld>
     <p:spTree>
@@ -1218,7 +1545,7 @@
           <a:p>
             <a:fld id="{C5CB39C3-7704-43B7-896D-E2F268455EEA}" type="slidenum">
               <a:rPr lang="en-US" smtClean="0"/>
-              <a:t>15</a:t>
+              <a:t>18</a:t>
             </a:fld>
             <a:endParaRPr lang="en-US" dirty="0"/>
           </a:p>
@@ -1237,7 +1564,7 @@
 </p:notes>
 </file>
 
-<file path=ppt/notesSlides/notesSlide16.xml><?xml version="1.0" encoding="utf-8"?>
+<file path=ppt/notesSlides/notesSlide19.xml><?xml version="1.0" encoding="utf-8"?>
 <p:notes xmlns:a="http://schemas.openxmlformats.org/drawingml/2006/main" xmlns:r="http://schemas.openxmlformats.org/officeDocument/2006/relationships" xmlns:p="http://schemas.openxmlformats.org/presentationml/2006/main">
   <p:cSld>
     <p:spTree>
@@ -1326,7 +1653,7 @@
           <a:p>
             <a:fld id="{C5CB39C3-7704-43B7-896D-E2F268455EEA}" type="slidenum">
               <a:rPr lang="en-US" smtClean="0"/>
-              <a:t>16</a:t>
+              <a:t>19</a:t>
             </a:fld>
             <a:endParaRPr lang="en-US" dirty="0"/>
           </a:p>
@@ -1336,330 +1663,6 @@
     <p:extLst>
       <p:ext uri="{BB962C8B-B14F-4D97-AF65-F5344CB8AC3E}">
         <p14:creationId xmlns:p14="http://schemas.microsoft.com/office/powerpoint/2010/main" val="1010363588"/>
-      </p:ext>
-    </p:extLst>
-  </p:cSld>
-  <p:clrMapOvr>
-    <a:masterClrMapping/>
-  </p:clrMapOvr>
-</p:notes>
-</file>
-
-<file path=ppt/notesSlides/notesSlide17.xml><?xml version="1.0" encoding="utf-8"?>
-<p:notes xmlns:a="http://schemas.openxmlformats.org/drawingml/2006/main" xmlns:r="http://schemas.openxmlformats.org/officeDocument/2006/relationships" xmlns:p="http://schemas.openxmlformats.org/presentationml/2006/main">
-  <p:cSld>
-    <p:spTree>
-      <p:nvGrpSpPr>
-        <p:cNvPr id="1" name="">
-          <a:extLst>
-            <a:ext uri="{FF2B5EF4-FFF2-40B4-BE49-F238E27FC236}">
-              <a16:creationId xmlns:a16="http://schemas.microsoft.com/office/drawing/2014/main" id="{5430B0B8-DF23-5139-C2D5-6EAAB3804389}"/>
-            </a:ext>
-          </a:extLst>
-        </p:cNvPr>
-        <p:cNvGrpSpPr/>
-        <p:nvPr/>
-      </p:nvGrpSpPr>
-      <p:grpSpPr>
-        <a:xfrm>
-          <a:off x="0" y="0"/>
-          <a:ext cx="0" cy="0"/>
-          <a:chOff x="0" y="0"/>
-          <a:chExt cx="0" cy="0"/>
-        </a:xfrm>
-      </p:grpSpPr>
-      <p:sp>
-        <p:nvSpPr>
-          <p:cNvPr id="2" name="Slide Image Placeholder 1">
-            <a:extLst>
-              <a:ext uri="{FF2B5EF4-FFF2-40B4-BE49-F238E27FC236}">
-                <a16:creationId xmlns:a16="http://schemas.microsoft.com/office/drawing/2014/main" id="{0A140BA7-4D4D-579F-C334-C39066F530F4}"/>
-              </a:ext>
-            </a:extLst>
-          </p:cNvPr>
-          <p:cNvSpPr>
-            <a:spLocks noGrp="1" noRot="1" noChangeAspect="1"/>
-          </p:cNvSpPr>
-          <p:nvPr>
-            <p:ph type="sldImg"/>
-          </p:nvPr>
-        </p:nvSpPr>
-        <p:spPr/>
-      </p:sp>
-      <p:sp>
-        <p:nvSpPr>
-          <p:cNvPr id="3" name="Notes Placeholder 2">
-            <a:extLst>
-              <a:ext uri="{FF2B5EF4-FFF2-40B4-BE49-F238E27FC236}">
-                <a16:creationId xmlns:a16="http://schemas.microsoft.com/office/drawing/2014/main" id="{56D1009E-DE37-3882-BAF2-B21F5B9771C1}"/>
-              </a:ext>
-            </a:extLst>
-          </p:cNvPr>
-          <p:cNvSpPr>
-            <a:spLocks noGrp="1"/>
-          </p:cNvSpPr>
-          <p:nvPr>
-            <p:ph type="body" idx="1"/>
-          </p:nvPr>
-        </p:nvSpPr>
-        <p:spPr/>
-        <p:txBody>
-          <a:bodyPr/>
-          <a:lstStyle/>
-          <a:p>
-            <a:endParaRPr lang="en-US" dirty="0"/>
-          </a:p>
-        </p:txBody>
-      </p:sp>
-      <p:sp>
-        <p:nvSpPr>
-          <p:cNvPr id="4" name="Slide Number Placeholder 3">
-            <a:extLst>
-              <a:ext uri="{FF2B5EF4-FFF2-40B4-BE49-F238E27FC236}">
-                <a16:creationId xmlns:a16="http://schemas.microsoft.com/office/drawing/2014/main" id="{EBF0FDC9-04DE-925A-CDF3-3FF6978EFA5C}"/>
-              </a:ext>
-            </a:extLst>
-          </p:cNvPr>
-          <p:cNvSpPr>
-            <a:spLocks noGrp="1"/>
-          </p:cNvSpPr>
-          <p:nvPr>
-            <p:ph type="sldNum" sz="quarter" idx="5"/>
-          </p:nvPr>
-        </p:nvSpPr>
-        <p:spPr/>
-        <p:txBody>
-          <a:bodyPr/>
-          <a:lstStyle/>
-          <a:p>
-            <a:fld id="{C5CB39C3-7704-43B7-896D-E2F268455EEA}" type="slidenum">
-              <a:rPr lang="en-US" smtClean="0"/>
-              <a:t>17</a:t>
-            </a:fld>
-            <a:endParaRPr lang="en-US" dirty="0"/>
-          </a:p>
-        </p:txBody>
-      </p:sp>
-    </p:spTree>
-    <p:extLst>
-      <p:ext uri="{BB962C8B-B14F-4D97-AF65-F5344CB8AC3E}">
-        <p14:creationId xmlns:p14="http://schemas.microsoft.com/office/powerpoint/2010/main" val="335984800"/>
-      </p:ext>
-    </p:extLst>
-  </p:cSld>
-  <p:clrMapOvr>
-    <a:masterClrMapping/>
-  </p:clrMapOvr>
-</p:notes>
-</file>
-
-<file path=ppt/notesSlides/notesSlide18.xml><?xml version="1.0" encoding="utf-8"?>
-<p:notes xmlns:a="http://schemas.openxmlformats.org/drawingml/2006/main" xmlns:r="http://schemas.openxmlformats.org/officeDocument/2006/relationships" xmlns:p="http://schemas.openxmlformats.org/presentationml/2006/main">
-  <p:cSld>
-    <p:spTree>
-      <p:nvGrpSpPr>
-        <p:cNvPr id="1" name="">
-          <a:extLst>
-            <a:ext uri="{FF2B5EF4-FFF2-40B4-BE49-F238E27FC236}">
-              <a16:creationId xmlns:a16="http://schemas.microsoft.com/office/drawing/2014/main" id="{37C6999A-32F0-7186-8A41-7AB699B94F76}"/>
-            </a:ext>
-          </a:extLst>
-        </p:cNvPr>
-        <p:cNvGrpSpPr/>
-        <p:nvPr/>
-      </p:nvGrpSpPr>
-      <p:grpSpPr>
-        <a:xfrm>
-          <a:off x="0" y="0"/>
-          <a:ext cx="0" cy="0"/>
-          <a:chOff x="0" y="0"/>
-          <a:chExt cx="0" cy="0"/>
-        </a:xfrm>
-      </p:grpSpPr>
-      <p:sp>
-        <p:nvSpPr>
-          <p:cNvPr id="2" name="Slide Image Placeholder 1">
-            <a:extLst>
-              <a:ext uri="{FF2B5EF4-FFF2-40B4-BE49-F238E27FC236}">
-                <a16:creationId xmlns:a16="http://schemas.microsoft.com/office/drawing/2014/main" id="{A60AEF89-53CC-3607-A5DD-701C9D3AA639}"/>
-              </a:ext>
-            </a:extLst>
-          </p:cNvPr>
-          <p:cNvSpPr>
-            <a:spLocks noGrp="1" noRot="1" noChangeAspect="1"/>
-          </p:cNvSpPr>
-          <p:nvPr>
-            <p:ph type="sldImg"/>
-          </p:nvPr>
-        </p:nvSpPr>
-        <p:spPr/>
-      </p:sp>
-      <p:sp>
-        <p:nvSpPr>
-          <p:cNvPr id="3" name="Notes Placeholder 2">
-            <a:extLst>
-              <a:ext uri="{FF2B5EF4-FFF2-40B4-BE49-F238E27FC236}">
-                <a16:creationId xmlns:a16="http://schemas.microsoft.com/office/drawing/2014/main" id="{9D72D208-0F4B-3419-6AAC-2359E1327DBB}"/>
-              </a:ext>
-            </a:extLst>
-          </p:cNvPr>
-          <p:cNvSpPr>
-            <a:spLocks noGrp="1"/>
-          </p:cNvSpPr>
-          <p:nvPr>
-            <p:ph type="body" idx="1"/>
-          </p:nvPr>
-        </p:nvSpPr>
-        <p:spPr/>
-        <p:txBody>
-          <a:bodyPr/>
-          <a:lstStyle/>
-          <a:p>
-            <a:endParaRPr lang="en-US" dirty="0"/>
-          </a:p>
-        </p:txBody>
-      </p:sp>
-      <p:sp>
-        <p:nvSpPr>
-          <p:cNvPr id="4" name="Slide Number Placeholder 3">
-            <a:extLst>
-              <a:ext uri="{FF2B5EF4-FFF2-40B4-BE49-F238E27FC236}">
-                <a16:creationId xmlns:a16="http://schemas.microsoft.com/office/drawing/2014/main" id="{59FEA5D3-6859-DD33-F7AF-7CB134EDF18C}"/>
-              </a:ext>
-            </a:extLst>
-          </p:cNvPr>
-          <p:cNvSpPr>
-            <a:spLocks noGrp="1"/>
-          </p:cNvSpPr>
-          <p:nvPr>
-            <p:ph type="sldNum" sz="quarter" idx="5"/>
-          </p:nvPr>
-        </p:nvSpPr>
-        <p:spPr/>
-        <p:txBody>
-          <a:bodyPr/>
-          <a:lstStyle/>
-          <a:p>
-            <a:fld id="{C5CB39C3-7704-43B7-896D-E2F268455EEA}" type="slidenum">
-              <a:rPr lang="en-US" smtClean="0"/>
-              <a:t>18</a:t>
-            </a:fld>
-            <a:endParaRPr lang="en-US" dirty="0"/>
-          </a:p>
-        </p:txBody>
-      </p:sp>
-    </p:spTree>
-    <p:extLst>
-      <p:ext uri="{BB962C8B-B14F-4D97-AF65-F5344CB8AC3E}">
-        <p14:creationId xmlns:p14="http://schemas.microsoft.com/office/powerpoint/2010/main" val="2640056350"/>
-      </p:ext>
-    </p:extLst>
-  </p:cSld>
-  <p:clrMapOvr>
-    <a:masterClrMapping/>
-  </p:clrMapOvr>
-</p:notes>
-</file>
-
-<file path=ppt/notesSlides/notesSlide19.xml><?xml version="1.0" encoding="utf-8"?>
-<p:notes xmlns:a="http://schemas.openxmlformats.org/drawingml/2006/main" xmlns:r="http://schemas.openxmlformats.org/officeDocument/2006/relationships" xmlns:p="http://schemas.openxmlformats.org/presentationml/2006/main">
-  <p:cSld>
-    <p:spTree>
-      <p:nvGrpSpPr>
-        <p:cNvPr id="1" name="">
-          <a:extLst>
-            <a:ext uri="{FF2B5EF4-FFF2-40B4-BE49-F238E27FC236}">
-              <a16:creationId xmlns:a16="http://schemas.microsoft.com/office/drawing/2014/main" id="{7A35DC42-4DC3-523E-3F0B-5C71E3F7537E}"/>
-            </a:ext>
-          </a:extLst>
-        </p:cNvPr>
-        <p:cNvGrpSpPr/>
-        <p:nvPr/>
-      </p:nvGrpSpPr>
-      <p:grpSpPr>
-        <a:xfrm>
-          <a:off x="0" y="0"/>
-          <a:ext cx="0" cy="0"/>
-          <a:chOff x="0" y="0"/>
-          <a:chExt cx="0" cy="0"/>
-        </a:xfrm>
-      </p:grpSpPr>
-      <p:sp>
-        <p:nvSpPr>
-          <p:cNvPr id="2" name="Slide Image Placeholder 1">
-            <a:extLst>
-              <a:ext uri="{FF2B5EF4-FFF2-40B4-BE49-F238E27FC236}">
-                <a16:creationId xmlns:a16="http://schemas.microsoft.com/office/drawing/2014/main" id="{E8E73F56-0CB5-414D-E1C0-09852F7018FD}"/>
-              </a:ext>
-            </a:extLst>
-          </p:cNvPr>
-          <p:cNvSpPr>
-            <a:spLocks noGrp="1" noRot="1" noChangeAspect="1"/>
-          </p:cNvSpPr>
-          <p:nvPr>
-            <p:ph type="sldImg"/>
-          </p:nvPr>
-        </p:nvSpPr>
-        <p:spPr/>
-      </p:sp>
-      <p:sp>
-        <p:nvSpPr>
-          <p:cNvPr id="3" name="Notes Placeholder 2">
-            <a:extLst>
-              <a:ext uri="{FF2B5EF4-FFF2-40B4-BE49-F238E27FC236}">
-                <a16:creationId xmlns:a16="http://schemas.microsoft.com/office/drawing/2014/main" id="{F7BDA5F4-D445-A041-CBAC-38BE959F2505}"/>
-              </a:ext>
-            </a:extLst>
-          </p:cNvPr>
-          <p:cNvSpPr>
-            <a:spLocks noGrp="1"/>
-          </p:cNvSpPr>
-          <p:nvPr>
-            <p:ph type="body" idx="1"/>
-          </p:nvPr>
-        </p:nvSpPr>
-        <p:spPr/>
-        <p:txBody>
-          <a:bodyPr/>
-          <a:lstStyle/>
-          <a:p>
-            <a:endParaRPr lang="en-US" dirty="0"/>
-          </a:p>
-        </p:txBody>
-      </p:sp>
-      <p:sp>
-        <p:nvSpPr>
-          <p:cNvPr id="4" name="Slide Number Placeholder 3">
-            <a:extLst>
-              <a:ext uri="{FF2B5EF4-FFF2-40B4-BE49-F238E27FC236}">
-                <a16:creationId xmlns:a16="http://schemas.microsoft.com/office/drawing/2014/main" id="{0762B35B-1285-6B2A-6EB5-4B53BD599973}"/>
-              </a:ext>
-            </a:extLst>
-          </p:cNvPr>
-          <p:cNvSpPr>
-            <a:spLocks noGrp="1"/>
-          </p:cNvSpPr>
-          <p:nvPr>
-            <p:ph type="sldNum" sz="quarter" idx="5"/>
-          </p:nvPr>
-        </p:nvSpPr>
-        <p:spPr/>
-        <p:txBody>
-          <a:bodyPr/>
-          <a:lstStyle/>
-          <a:p>
-            <a:fld id="{C5CB39C3-7704-43B7-896D-E2F268455EEA}" type="slidenum">
-              <a:rPr lang="en-US" smtClean="0"/>
-              <a:t>19</a:t>
-            </a:fld>
-            <a:endParaRPr lang="en-US" dirty="0"/>
-          </a:p>
-        </p:txBody>
-      </p:sp>
-    </p:spTree>
-    <p:extLst>
-      <p:ext uri="{BB962C8B-B14F-4D97-AF65-F5344CB8AC3E}">
-        <p14:creationId xmlns:p14="http://schemas.microsoft.com/office/powerpoint/2010/main" val="2333701433"/>
       </p:ext>
     </p:extLst>
   </p:cSld>
@@ -1761,6 +1764,330 @@
         <p:cNvPr id="1" name="">
           <a:extLst>
             <a:ext uri="{FF2B5EF4-FFF2-40B4-BE49-F238E27FC236}">
+              <a16:creationId xmlns:a16="http://schemas.microsoft.com/office/drawing/2014/main" id="{5430B0B8-DF23-5139-C2D5-6EAAB3804389}"/>
+            </a:ext>
+          </a:extLst>
+        </p:cNvPr>
+        <p:cNvGrpSpPr/>
+        <p:nvPr/>
+      </p:nvGrpSpPr>
+      <p:grpSpPr>
+        <a:xfrm>
+          <a:off x="0" y="0"/>
+          <a:ext cx="0" cy="0"/>
+          <a:chOff x="0" y="0"/>
+          <a:chExt cx="0" cy="0"/>
+        </a:xfrm>
+      </p:grpSpPr>
+      <p:sp>
+        <p:nvSpPr>
+          <p:cNvPr id="2" name="Slide Image Placeholder 1">
+            <a:extLst>
+              <a:ext uri="{FF2B5EF4-FFF2-40B4-BE49-F238E27FC236}">
+                <a16:creationId xmlns:a16="http://schemas.microsoft.com/office/drawing/2014/main" id="{0A140BA7-4D4D-579F-C334-C39066F530F4}"/>
+              </a:ext>
+            </a:extLst>
+          </p:cNvPr>
+          <p:cNvSpPr>
+            <a:spLocks noGrp="1" noRot="1" noChangeAspect="1"/>
+          </p:cNvSpPr>
+          <p:nvPr>
+            <p:ph type="sldImg"/>
+          </p:nvPr>
+        </p:nvSpPr>
+        <p:spPr/>
+      </p:sp>
+      <p:sp>
+        <p:nvSpPr>
+          <p:cNvPr id="3" name="Notes Placeholder 2">
+            <a:extLst>
+              <a:ext uri="{FF2B5EF4-FFF2-40B4-BE49-F238E27FC236}">
+                <a16:creationId xmlns:a16="http://schemas.microsoft.com/office/drawing/2014/main" id="{56D1009E-DE37-3882-BAF2-B21F5B9771C1}"/>
+              </a:ext>
+            </a:extLst>
+          </p:cNvPr>
+          <p:cNvSpPr>
+            <a:spLocks noGrp="1"/>
+          </p:cNvSpPr>
+          <p:nvPr>
+            <p:ph type="body" idx="1"/>
+          </p:nvPr>
+        </p:nvSpPr>
+        <p:spPr/>
+        <p:txBody>
+          <a:bodyPr/>
+          <a:lstStyle/>
+          <a:p>
+            <a:endParaRPr lang="en-US" dirty="0"/>
+          </a:p>
+        </p:txBody>
+      </p:sp>
+      <p:sp>
+        <p:nvSpPr>
+          <p:cNvPr id="4" name="Slide Number Placeholder 3">
+            <a:extLst>
+              <a:ext uri="{FF2B5EF4-FFF2-40B4-BE49-F238E27FC236}">
+                <a16:creationId xmlns:a16="http://schemas.microsoft.com/office/drawing/2014/main" id="{EBF0FDC9-04DE-925A-CDF3-3FF6978EFA5C}"/>
+              </a:ext>
+            </a:extLst>
+          </p:cNvPr>
+          <p:cNvSpPr>
+            <a:spLocks noGrp="1"/>
+          </p:cNvSpPr>
+          <p:nvPr>
+            <p:ph type="sldNum" sz="quarter" idx="5"/>
+          </p:nvPr>
+        </p:nvSpPr>
+        <p:spPr/>
+        <p:txBody>
+          <a:bodyPr/>
+          <a:lstStyle/>
+          <a:p>
+            <a:fld id="{C5CB39C3-7704-43B7-896D-E2F268455EEA}" type="slidenum">
+              <a:rPr lang="en-US" smtClean="0"/>
+              <a:t>20</a:t>
+            </a:fld>
+            <a:endParaRPr lang="en-US" dirty="0"/>
+          </a:p>
+        </p:txBody>
+      </p:sp>
+    </p:spTree>
+    <p:extLst>
+      <p:ext uri="{BB962C8B-B14F-4D97-AF65-F5344CB8AC3E}">
+        <p14:creationId xmlns:p14="http://schemas.microsoft.com/office/powerpoint/2010/main" val="335984800"/>
+      </p:ext>
+    </p:extLst>
+  </p:cSld>
+  <p:clrMapOvr>
+    <a:masterClrMapping/>
+  </p:clrMapOvr>
+</p:notes>
+</file>
+
+<file path=ppt/notesSlides/notesSlide21.xml><?xml version="1.0" encoding="utf-8"?>
+<p:notes xmlns:a="http://schemas.openxmlformats.org/drawingml/2006/main" xmlns:r="http://schemas.openxmlformats.org/officeDocument/2006/relationships" xmlns:p="http://schemas.openxmlformats.org/presentationml/2006/main">
+  <p:cSld>
+    <p:spTree>
+      <p:nvGrpSpPr>
+        <p:cNvPr id="1" name="">
+          <a:extLst>
+            <a:ext uri="{FF2B5EF4-FFF2-40B4-BE49-F238E27FC236}">
+              <a16:creationId xmlns:a16="http://schemas.microsoft.com/office/drawing/2014/main" id="{37C6999A-32F0-7186-8A41-7AB699B94F76}"/>
+            </a:ext>
+          </a:extLst>
+        </p:cNvPr>
+        <p:cNvGrpSpPr/>
+        <p:nvPr/>
+      </p:nvGrpSpPr>
+      <p:grpSpPr>
+        <a:xfrm>
+          <a:off x="0" y="0"/>
+          <a:ext cx="0" cy="0"/>
+          <a:chOff x="0" y="0"/>
+          <a:chExt cx="0" cy="0"/>
+        </a:xfrm>
+      </p:grpSpPr>
+      <p:sp>
+        <p:nvSpPr>
+          <p:cNvPr id="2" name="Slide Image Placeholder 1">
+            <a:extLst>
+              <a:ext uri="{FF2B5EF4-FFF2-40B4-BE49-F238E27FC236}">
+                <a16:creationId xmlns:a16="http://schemas.microsoft.com/office/drawing/2014/main" id="{A60AEF89-53CC-3607-A5DD-701C9D3AA639}"/>
+              </a:ext>
+            </a:extLst>
+          </p:cNvPr>
+          <p:cNvSpPr>
+            <a:spLocks noGrp="1" noRot="1" noChangeAspect="1"/>
+          </p:cNvSpPr>
+          <p:nvPr>
+            <p:ph type="sldImg"/>
+          </p:nvPr>
+        </p:nvSpPr>
+        <p:spPr/>
+      </p:sp>
+      <p:sp>
+        <p:nvSpPr>
+          <p:cNvPr id="3" name="Notes Placeholder 2">
+            <a:extLst>
+              <a:ext uri="{FF2B5EF4-FFF2-40B4-BE49-F238E27FC236}">
+                <a16:creationId xmlns:a16="http://schemas.microsoft.com/office/drawing/2014/main" id="{9D72D208-0F4B-3419-6AAC-2359E1327DBB}"/>
+              </a:ext>
+            </a:extLst>
+          </p:cNvPr>
+          <p:cNvSpPr>
+            <a:spLocks noGrp="1"/>
+          </p:cNvSpPr>
+          <p:nvPr>
+            <p:ph type="body" idx="1"/>
+          </p:nvPr>
+        </p:nvSpPr>
+        <p:spPr/>
+        <p:txBody>
+          <a:bodyPr/>
+          <a:lstStyle/>
+          <a:p>
+            <a:endParaRPr lang="en-US" dirty="0"/>
+          </a:p>
+        </p:txBody>
+      </p:sp>
+      <p:sp>
+        <p:nvSpPr>
+          <p:cNvPr id="4" name="Slide Number Placeholder 3">
+            <a:extLst>
+              <a:ext uri="{FF2B5EF4-FFF2-40B4-BE49-F238E27FC236}">
+                <a16:creationId xmlns:a16="http://schemas.microsoft.com/office/drawing/2014/main" id="{59FEA5D3-6859-DD33-F7AF-7CB134EDF18C}"/>
+              </a:ext>
+            </a:extLst>
+          </p:cNvPr>
+          <p:cNvSpPr>
+            <a:spLocks noGrp="1"/>
+          </p:cNvSpPr>
+          <p:nvPr>
+            <p:ph type="sldNum" sz="quarter" idx="5"/>
+          </p:nvPr>
+        </p:nvSpPr>
+        <p:spPr/>
+        <p:txBody>
+          <a:bodyPr/>
+          <a:lstStyle/>
+          <a:p>
+            <a:fld id="{C5CB39C3-7704-43B7-896D-E2F268455EEA}" type="slidenum">
+              <a:rPr lang="en-US" smtClean="0"/>
+              <a:t>21</a:t>
+            </a:fld>
+            <a:endParaRPr lang="en-US" dirty="0"/>
+          </a:p>
+        </p:txBody>
+      </p:sp>
+    </p:spTree>
+    <p:extLst>
+      <p:ext uri="{BB962C8B-B14F-4D97-AF65-F5344CB8AC3E}">
+        <p14:creationId xmlns:p14="http://schemas.microsoft.com/office/powerpoint/2010/main" val="2640056350"/>
+      </p:ext>
+    </p:extLst>
+  </p:cSld>
+  <p:clrMapOvr>
+    <a:masterClrMapping/>
+  </p:clrMapOvr>
+</p:notes>
+</file>
+
+<file path=ppt/notesSlides/notesSlide22.xml><?xml version="1.0" encoding="utf-8"?>
+<p:notes xmlns:a="http://schemas.openxmlformats.org/drawingml/2006/main" xmlns:r="http://schemas.openxmlformats.org/officeDocument/2006/relationships" xmlns:p="http://schemas.openxmlformats.org/presentationml/2006/main">
+  <p:cSld>
+    <p:spTree>
+      <p:nvGrpSpPr>
+        <p:cNvPr id="1" name="">
+          <a:extLst>
+            <a:ext uri="{FF2B5EF4-FFF2-40B4-BE49-F238E27FC236}">
+              <a16:creationId xmlns:a16="http://schemas.microsoft.com/office/drawing/2014/main" id="{7A35DC42-4DC3-523E-3F0B-5C71E3F7537E}"/>
+            </a:ext>
+          </a:extLst>
+        </p:cNvPr>
+        <p:cNvGrpSpPr/>
+        <p:nvPr/>
+      </p:nvGrpSpPr>
+      <p:grpSpPr>
+        <a:xfrm>
+          <a:off x="0" y="0"/>
+          <a:ext cx="0" cy="0"/>
+          <a:chOff x="0" y="0"/>
+          <a:chExt cx="0" cy="0"/>
+        </a:xfrm>
+      </p:grpSpPr>
+      <p:sp>
+        <p:nvSpPr>
+          <p:cNvPr id="2" name="Slide Image Placeholder 1">
+            <a:extLst>
+              <a:ext uri="{FF2B5EF4-FFF2-40B4-BE49-F238E27FC236}">
+                <a16:creationId xmlns:a16="http://schemas.microsoft.com/office/drawing/2014/main" id="{E8E73F56-0CB5-414D-E1C0-09852F7018FD}"/>
+              </a:ext>
+            </a:extLst>
+          </p:cNvPr>
+          <p:cNvSpPr>
+            <a:spLocks noGrp="1" noRot="1" noChangeAspect="1"/>
+          </p:cNvSpPr>
+          <p:nvPr>
+            <p:ph type="sldImg"/>
+          </p:nvPr>
+        </p:nvSpPr>
+        <p:spPr/>
+      </p:sp>
+      <p:sp>
+        <p:nvSpPr>
+          <p:cNvPr id="3" name="Notes Placeholder 2">
+            <a:extLst>
+              <a:ext uri="{FF2B5EF4-FFF2-40B4-BE49-F238E27FC236}">
+                <a16:creationId xmlns:a16="http://schemas.microsoft.com/office/drawing/2014/main" id="{F7BDA5F4-D445-A041-CBAC-38BE959F2505}"/>
+              </a:ext>
+            </a:extLst>
+          </p:cNvPr>
+          <p:cNvSpPr>
+            <a:spLocks noGrp="1"/>
+          </p:cNvSpPr>
+          <p:nvPr>
+            <p:ph type="body" idx="1"/>
+          </p:nvPr>
+        </p:nvSpPr>
+        <p:spPr/>
+        <p:txBody>
+          <a:bodyPr/>
+          <a:lstStyle/>
+          <a:p>
+            <a:endParaRPr lang="en-US" dirty="0"/>
+          </a:p>
+        </p:txBody>
+      </p:sp>
+      <p:sp>
+        <p:nvSpPr>
+          <p:cNvPr id="4" name="Slide Number Placeholder 3">
+            <a:extLst>
+              <a:ext uri="{FF2B5EF4-FFF2-40B4-BE49-F238E27FC236}">
+                <a16:creationId xmlns:a16="http://schemas.microsoft.com/office/drawing/2014/main" id="{0762B35B-1285-6B2A-6EB5-4B53BD599973}"/>
+              </a:ext>
+            </a:extLst>
+          </p:cNvPr>
+          <p:cNvSpPr>
+            <a:spLocks noGrp="1"/>
+          </p:cNvSpPr>
+          <p:nvPr>
+            <p:ph type="sldNum" sz="quarter" idx="5"/>
+          </p:nvPr>
+        </p:nvSpPr>
+        <p:spPr/>
+        <p:txBody>
+          <a:bodyPr/>
+          <a:lstStyle/>
+          <a:p>
+            <a:fld id="{C5CB39C3-7704-43B7-896D-E2F268455EEA}" type="slidenum">
+              <a:rPr lang="en-US" smtClean="0"/>
+              <a:t>22</a:t>
+            </a:fld>
+            <a:endParaRPr lang="en-US" dirty="0"/>
+          </a:p>
+        </p:txBody>
+      </p:sp>
+    </p:spTree>
+    <p:extLst>
+      <p:ext uri="{BB962C8B-B14F-4D97-AF65-F5344CB8AC3E}">
+        <p14:creationId xmlns:p14="http://schemas.microsoft.com/office/powerpoint/2010/main" val="2333701433"/>
+      </p:ext>
+    </p:extLst>
+  </p:cSld>
+  <p:clrMapOvr>
+    <a:masterClrMapping/>
+  </p:clrMapOvr>
+</p:notes>
+</file>
+
+<file path=ppt/notesSlides/notesSlide23.xml><?xml version="1.0" encoding="utf-8"?>
+<p:notes xmlns:a="http://schemas.openxmlformats.org/drawingml/2006/main" xmlns:r="http://schemas.openxmlformats.org/officeDocument/2006/relationships" xmlns:p="http://schemas.openxmlformats.org/presentationml/2006/main">
+  <p:cSld>
+    <p:spTree>
+      <p:nvGrpSpPr>
+        <p:cNvPr id="1" name="">
+          <a:extLst>
+            <a:ext uri="{FF2B5EF4-FFF2-40B4-BE49-F238E27FC236}">
               <a16:creationId xmlns:a16="http://schemas.microsoft.com/office/drawing/2014/main" id="{3C3C8917-76F4-5C3A-9976-859AB54D4FB9}"/>
             </a:ext>
           </a:extLst>
@@ -1842,7 +2169,7 @@
           <a:p>
             <a:fld id="{C5CB39C3-7704-43B7-896D-E2F268455EEA}" type="slidenum">
               <a:rPr lang="en-US" smtClean="0"/>
-              <a:t>20</a:t>
+              <a:t>23</a:t>
             </a:fld>
             <a:endParaRPr lang="en-US" dirty="0"/>
           </a:p>
@@ -1861,7 +2188,7 @@
 </p:notes>
 </file>
 
-<file path=ppt/notesSlides/notesSlide21.xml><?xml version="1.0" encoding="utf-8"?>
+<file path=ppt/notesSlides/notesSlide24.xml><?xml version="1.0" encoding="utf-8"?>
 <p:notes xmlns:a="http://schemas.openxmlformats.org/drawingml/2006/main" xmlns:r="http://schemas.openxmlformats.org/officeDocument/2006/relationships" xmlns:p="http://schemas.openxmlformats.org/presentationml/2006/main">
   <p:cSld>
     <p:spTree>
@@ -1950,7 +2277,7 @@
           <a:p>
             <a:fld id="{C5CB39C3-7704-43B7-896D-E2F268455EEA}" type="slidenum">
               <a:rPr lang="en-US" smtClean="0"/>
-              <a:t>21</a:t>
+              <a:t>24</a:t>
             </a:fld>
             <a:endParaRPr lang="en-US" dirty="0"/>
           </a:p>
@@ -1969,7 +2296,7 @@
 </p:notes>
 </file>
 
-<file path=ppt/notesSlides/notesSlide22.xml><?xml version="1.0" encoding="utf-8"?>
+<file path=ppt/notesSlides/notesSlide25.xml><?xml version="1.0" encoding="utf-8"?>
 <p:notes xmlns:a="http://schemas.openxmlformats.org/drawingml/2006/main" xmlns:r="http://schemas.openxmlformats.org/officeDocument/2006/relationships" xmlns:p="http://schemas.openxmlformats.org/presentationml/2006/main">
   <p:cSld>
     <p:spTree>
@@ -2058,7 +2385,7 @@
           <a:p>
             <a:fld id="{C5CB39C3-7704-43B7-896D-E2F268455EEA}" type="slidenum">
               <a:rPr lang="en-US" smtClean="0"/>
-              <a:t>22</a:t>
+              <a:t>25</a:t>
             </a:fld>
             <a:endParaRPr lang="en-US" dirty="0"/>
           </a:p>
@@ -2077,7 +2404,7 @@
 </p:notes>
 </file>
 
-<file path=ppt/notesSlides/notesSlide23.xml><?xml version="1.0" encoding="utf-8"?>
+<file path=ppt/notesSlides/notesSlide26.xml><?xml version="1.0" encoding="utf-8"?>
 <p:notes xmlns:a="http://schemas.openxmlformats.org/drawingml/2006/main" xmlns:r="http://schemas.openxmlformats.org/officeDocument/2006/relationships" xmlns:p="http://schemas.openxmlformats.org/presentationml/2006/main">
   <p:cSld>
     <p:spTree>
@@ -2166,7 +2493,7 @@
           <a:p>
             <a:fld id="{C5CB39C3-7704-43B7-896D-E2F268455EEA}" type="slidenum">
               <a:rPr lang="en-US" smtClean="0"/>
-              <a:t>23</a:t>
+              <a:t>26</a:t>
             </a:fld>
             <a:endParaRPr lang="en-US" dirty="0"/>
           </a:p>
@@ -2185,7 +2512,7 @@
 </p:notes>
 </file>
 
-<file path=ppt/notesSlides/notesSlide24.xml><?xml version="1.0" encoding="utf-8"?>
+<file path=ppt/notesSlides/notesSlide27.xml><?xml version="1.0" encoding="utf-8"?>
 <p:notes xmlns:a="http://schemas.openxmlformats.org/drawingml/2006/main" xmlns:r="http://schemas.openxmlformats.org/officeDocument/2006/relationships" xmlns:p="http://schemas.openxmlformats.org/presentationml/2006/main">
   <p:cSld>
     <p:spTree>
@@ -2274,7 +2601,7 @@
           <a:p>
             <a:fld id="{C5CB39C3-7704-43B7-896D-E2F268455EEA}" type="slidenum">
               <a:rPr lang="en-US" smtClean="0"/>
-              <a:t>24</a:t>
+              <a:t>27</a:t>
             </a:fld>
             <a:endParaRPr lang="en-US" dirty="0"/>
           </a:p>
@@ -2293,7 +2620,7 @@
 </p:notes>
 </file>
 
-<file path=ppt/notesSlides/notesSlide25.xml><?xml version="1.0" encoding="utf-8"?>
+<file path=ppt/notesSlides/notesSlide28.xml><?xml version="1.0" encoding="utf-8"?>
 <p:notes xmlns:a="http://schemas.openxmlformats.org/drawingml/2006/main" xmlns:r="http://schemas.openxmlformats.org/officeDocument/2006/relationships" xmlns:p="http://schemas.openxmlformats.org/presentationml/2006/main">
   <p:cSld>
     <p:spTree>
@@ -2382,7 +2709,7 @@
           <a:p>
             <a:fld id="{C5CB39C3-7704-43B7-896D-E2F268455EEA}" type="slidenum">
               <a:rPr lang="en-US" smtClean="0"/>
-              <a:t>25</a:t>
+              <a:t>28</a:t>
             </a:fld>
             <a:endParaRPr lang="en-US" dirty="0"/>
           </a:p>
@@ -2401,7 +2728,7 @@
 </p:notes>
 </file>
 
-<file path=ppt/notesSlides/notesSlide26.xml><?xml version="1.0" encoding="utf-8"?>
+<file path=ppt/notesSlides/notesSlide29.xml><?xml version="1.0" encoding="utf-8"?>
 <p:notes xmlns:a="http://schemas.openxmlformats.org/drawingml/2006/main" xmlns:r="http://schemas.openxmlformats.org/officeDocument/2006/relationships" xmlns:p="http://schemas.openxmlformats.org/presentationml/2006/main">
   <p:cSld>
     <p:spTree>
@@ -2490,7 +2817,7 @@
           <a:p>
             <a:fld id="{C5CB39C3-7704-43B7-896D-E2F268455EEA}" type="slidenum">
               <a:rPr lang="en-US" smtClean="0"/>
-              <a:t>26</a:t>
+              <a:t>29</a:t>
             </a:fld>
             <a:endParaRPr lang="en-US" dirty="0"/>
           </a:p>
@@ -2500,330 +2827,6 @@
     <p:extLst>
       <p:ext uri="{BB962C8B-B14F-4D97-AF65-F5344CB8AC3E}">
         <p14:creationId xmlns:p14="http://schemas.microsoft.com/office/powerpoint/2010/main" val="4093163436"/>
-      </p:ext>
-    </p:extLst>
-  </p:cSld>
-  <p:clrMapOvr>
-    <a:masterClrMapping/>
-  </p:clrMapOvr>
-</p:notes>
-</file>
-
-<file path=ppt/notesSlides/notesSlide27.xml><?xml version="1.0" encoding="utf-8"?>
-<p:notes xmlns:a="http://schemas.openxmlformats.org/drawingml/2006/main" xmlns:r="http://schemas.openxmlformats.org/officeDocument/2006/relationships" xmlns:p="http://schemas.openxmlformats.org/presentationml/2006/main">
-  <p:cSld>
-    <p:spTree>
-      <p:nvGrpSpPr>
-        <p:cNvPr id="1" name="">
-          <a:extLst>
-            <a:ext uri="{FF2B5EF4-FFF2-40B4-BE49-F238E27FC236}">
-              <a16:creationId xmlns:a16="http://schemas.microsoft.com/office/drawing/2014/main" id="{CA58BA0A-DB76-0D65-68E2-17660E44356C}"/>
-            </a:ext>
-          </a:extLst>
-        </p:cNvPr>
-        <p:cNvGrpSpPr/>
-        <p:nvPr/>
-      </p:nvGrpSpPr>
-      <p:grpSpPr>
-        <a:xfrm>
-          <a:off x="0" y="0"/>
-          <a:ext cx="0" cy="0"/>
-          <a:chOff x="0" y="0"/>
-          <a:chExt cx="0" cy="0"/>
-        </a:xfrm>
-      </p:grpSpPr>
-      <p:sp>
-        <p:nvSpPr>
-          <p:cNvPr id="2" name="Slide Image Placeholder 1">
-            <a:extLst>
-              <a:ext uri="{FF2B5EF4-FFF2-40B4-BE49-F238E27FC236}">
-                <a16:creationId xmlns:a16="http://schemas.microsoft.com/office/drawing/2014/main" id="{80612DF5-829D-D53D-F0C6-893F3FEA0C90}"/>
-              </a:ext>
-            </a:extLst>
-          </p:cNvPr>
-          <p:cNvSpPr>
-            <a:spLocks noGrp="1" noRot="1" noChangeAspect="1"/>
-          </p:cNvSpPr>
-          <p:nvPr>
-            <p:ph type="sldImg"/>
-          </p:nvPr>
-        </p:nvSpPr>
-        <p:spPr/>
-      </p:sp>
-      <p:sp>
-        <p:nvSpPr>
-          <p:cNvPr id="3" name="Notes Placeholder 2">
-            <a:extLst>
-              <a:ext uri="{FF2B5EF4-FFF2-40B4-BE49-F238E27FC236}">
-                <a16:creationId xmlns:a16="http://schemas.microsoft.com/office/drawing/2014/main" id="{5B9E3228-DAC0-2282-A808-46D5ED8237EB}"/>
-              </a:ext>
-            </a:extLst>
-          </p:cNvPr>
-          <p:cNvSpPr>
-            <a:spLocks noGrp="1"/>
-          </p:cNvSpPr>
-          <p:nvPr>
-            <p:ph type="body" idx="1"/>
-          </p:nvPr>
-        </p:nvSpPr>
-        <p:spPr/>
-        <p:txBody>
-          <a:bodyPr/>
-          <a:lstStyle/>
-          <a:p>
-            <a:endParaRPr lang="en-US" dirty="0"/>
-          </a:p>
-        </p:txBody>
-      </p:sp>
-      <p:sp>
-        <p:nvSpPr>
-          <p:cNvPr id="4" name="Slide Number Placeholder 3">
-            <a:extLst>
-              <a:ext uri="{FF2B5EF4-FFF2-40B4-BE49-F238E27FC236}">
-                <a16:creationId xmlns:a16="http://schemas.microsoft.com/office/drawing/2014/main" id="{FA5F094E-01EF-2983-288E-3308DA0934A5}"/>
-              </a:ext>
-            </a:extLst>
-          </p:cNvPr>
-          <p:cNvSpPr>
-            <a:spLocks noGrp="1"/>
-          </p:cNvSpPr>
-          <p:nvPr>
-            <p:ph type="sldNum" sz="quarter" idx="5"/>
-          </p:nvPr>
-        </p:nvSpPr>
-        <p:spPr/>
-        <p:txBody>
-          <a:bodyPr/>
-          <a:lstStyle/>
-          <a:p>
-            <a:fld id="{C5CB39C3-7704-43B7-896D-E2F268455EEA}" type="slidenum">
-              <a:rPr lang="en-US" smtClean="0"/>
-              <a:t>27</a:t>
-            </a:fld>
-            <a:endParaRPr lang="en-US" dirty="0"/>
-          </a:p>
-        </p:txBody>
-      </p:sp>
-    </p:spTree>
-    <p:extLst>
-      <p:ext uri="{BB962C8B-B14F-4D97-AF65-F5344CB8AC3E}">
-        <p14:creationId xmlns:p14="http://schemas.microsoft.com/office/powerpoint/2010/main" val="3111854826"/>
-      </p:ext>
-    </p:extLst>
-  </p:cSld>
-  <p:clrMapOvr>
-    <a:masterClrMapping/>
-  </p:clrMapOvr>
-</p:notes>
-</file>
-
-<file path=ppt/notesSlides/notesSlide28.xml><?xml version="1.0" encoding="utf-8"?>
-<p:notes xmlns:a="http://schemas.openxmlformats.org/drawingml/2006/main" xmlns:r="http://schemas.openxmlformats.org/officeDocument/2006/relationships" xmlns:p="http://schemas.openxmlformats.org/presentationml/2006/main">
-  <p:cSld>
-    <p:spTree>
-      <p:nvGrpSpPr>
-        <p:cNvPr id="1" name="">
-          <a:extLst>
-            <a:ext uri="{FF2B5EF4-FFF2-40B4-BE49-F238E27FC236}">
-              <a16:creationId xmlns:a16="http://schemas.microsoft.com/office/drawing/2014/main" id="{2260F4C2-DFF3-131C-868B-AE1DA8091EB9}"/>
-            </a:ext>
-          </a:extLst>
-        </p:cNvPr>
-        <p:cNvGrpSpPr/>
-        <p:nvPr/>
-      </p:nvGrpSpPr>
-      <p:grpSpPr>
-        <a:xfrm>
-          <a:off x="0" y="0"/>
-          <a:ext cx="0" cy="0"/>
-          <a:chOff x="0" y="0"/>
-          <a:chExt cx="0" cy="0"/>
-        </a:xfrm>
-      </p:grpSpPr>
-      <p:sp>
-        <p:nvSpPr>
-          <p:cNvPr id="2" name="Slide Image Placeholder 1">
-            <a:extLst>
-              <a:ext uri="{FF2B5EF4-FFF2-40B4-BE49-F238E27FC236}">
-                <a16:creationId xmlns:a16="http://schemas.microsoft.com/office/drawing/2014/main" id="{8B4E1DC5-A7B5-CDFE-A633-8E8213763F21}"/>
-              </a:ext>
-            </a:extLst>
-          </p:cNvPr>
-          <p:cNvSpPr>
-            <a:spLocks noGrp="1" noRot="1" noChangeAspect="1"/>
-          </p:cNvSpPr>
-          <p:nvPr>
-            <p:ph type="sldImg"/>
-          </p:nvPr>
-        </p:nvSpPr>
-        <p:spPr/>
-      </p:sp>
-      <p:sp>
-        <p:nvSpPr>
-          <p:cNvPr id="3" name="Notes Placeholder 2">
-            <a:extLst>
-              <a:ext uri="{FF2B5EF4-FFF2-40B4-BE49-F238E27FC236}">
-                <a16:creationId xmlns:a16="http://schemas.microsoft.com/office/drawing/2014/main" id="{569294EA-9F8A-A5C1-4865-3A0470DE82E9}"/>
-              </a:ext>
-            </a:extLst>
-          </p:cNvPr>
-          <p:cNvSpPr>
-            <a:spLocks noGrp="1"/>
-          </p:cNvSpPr>
-          <p:nvPr>
-            <p:ph type="body" idx="1"/>
-          </p:nvPr>
-        </p:nvSpPr>
-        <p:spPr/>
-        <p:txBody>
-          <a:bodyPr/>
-          <a:lstStyle/>
-          <a:p>
-            <a:endParaRPr lang="en-US" dirty="0"/>
-          </a:p>
-        </p:txBody>
-      </p:sp>
-      <p:sp>
-        <p:nvSpPr>
-          <p:cNvPr id="4" name="Slide Number Placeholder 3">
-            <a:extLst>
-              <a:ext uri="{FF2B5EF4-FFF2-40B4-BE49-F238E27FC236}">
-                <a16:creationId xmlns:a16="http://schemas.microsoft.com/office/drawing/2014/main" id="{64E9330F-19C8-4100-A572-FAEBB7489520}"/>
-              </a:ext>
-            </a:extLst>
-          </p:cNvPr>
-          <p:cNvSpPr>
-            <a:spLocks noGrp="1"/>
-          </p:cNvSpPr>
-          <p:nvPr>
-            <p:ph type="sldNum" sz="quarter" idx="5"/>
-          </p:nvPr>
-        </p:nvSpPr>
-        <p:spPr/>
-        <p:txBody>
-          <a:bodyPr/>
-          <a:lstStyle/>
-          <a:p>
-            <a:fld id="{C5CB39C3-7704-43B7-896D-E2F268455EEA}" type="slidenum">
-              <a:rPr lang="en-US" smtClean="0"/>
-              <a:t>28</a:t>
-            </a:fld>
-            <a:endParaRPr lang="en-US" dirty="0"/>
-          </a:p>
-        </p:txBody>
-      </p:sp>
-    </p:spTree>
-    <p:extLst>
-      <p:ext uri="{BB962C8B-B14F-4D97-AF65-F5344CB8AC3E}">
-        <p14:creationId xmlns:p14="http://schemas.microsoft.com/office/powerpoint/2010/main" val="3589255602"/>
-      </p:ext>
-    </p:extLst>
-  </p:cSld>
-  <p:clrMapOvr>
-    <a:masterClrMapping/>
-  </p:clrMapOvr>
-</p:notes>
-</file>
-
-<file path=ppt/notesSlides/notesSlide29.xml><?xml version="1.0" encoding="utf-8"?>
-<p:notes xmlns:a="http://schemas.openxmlformats.org/drawingml/2006/main" xmlns:r="http://schemas.openxmlformats.org/officeDocument/2006/relationships" xmlns:p="http://schemas.openxmlformats.org/presentationml/2006/main">
-  <p:cSld>
-    <p:spTree>
-      <p:nvGrpSpPr>
-        <p:cNvPr id="1" name="">
-          <a:extLst>
-            <a:ext uri="{FF2B5EF4-FFF2-40B4-BE49-F238E27FC236}">
-              <a16:creationId xmlns:a16="http://schemas.microsoft.com/office/drawing/2014/main" id="{F892DA80-A353-9870-4A69-88B5F18B7B99}"/>
-            </a:ext>
-          </a:extLst>
-        </p:cNvPr>
-        <p:cNvGrpSpPr/>
-        <p:nvPr/>
-      </p:nvGrpSpPr>
-      <p:grpSpPr>
-        <a:xfrm>
-          <a:off x="0" y="0"/>
-          <a:ext cx="0" cy="0"/>
-          <a:chOff x="0" y="0"/>
-          <a:chExt cx="0" cy="0"/>
-        </a:xfrm>
-      </p:grpSpPr>
-      <p:sp>
-        <p:nvSpPr>
-          <p:cNvPr id="2" name="Slide Image Placeholder 1">
-            <a:extLst>
-              <a:ext uri="{FF2B5EF4-FFF2-40B4-BE49-F238E27FC236}">
-                <a16:creationId xmlns:a16="http://schemas.microsoft.com/office/drawing/2014/main" id="{EBD234D6-43DA-52DE-C8F4-37979BFD61B0}"/>
-              </a:ext>
-            </a:extLst>
-          </p:cNvPr>
-          <p:cNvSpPr>
-            <a:spLocks noGrp="1" noRot="1" noChangeAspect="1"/>
-          </p:cNvSpPr>
-          <p:nvPr>
-            <p:ph type="sldImg"/>
-          </p:nvPr>
-        </p:nvSpPr>
-        <p:spPr/>
-      </p:sp>
-      <p:sp>
-        <p:nvSpPr>
-          <p:cNvPr id="3" name="Notes Placeholder 2">
-            <a:extLst>
-              <a:ext uri="{FF2B5EF4-FFF2-40B4-BE49-F238E27FC236}">
-                <a16:creationId xmlns:a16="http://schemas.microsoft.com/office/drawing/2014/main" id="{D1341CCD-30EE-E842-F026-125351097F23}"/>
-              </a:ext>
-            </a:extLst>
-          </p:cNvPr>
-          <p:cNvSpPr>
-            <a:spLocks noGrp="1"/>
-          </p:cNvSpPr>
-          <p:nvPr>
-            <p:ph type="body" idx="1"/>
-          </p:nvPr>
-        </p:nvSpPr>
-        <p:spPr/>
-        <p:txBody>
-          <a:bodyPr/>
-          <a:lstStyle/>
-          <a:p>
-            <a:endParaRPr lang="en-US" dirty="0"/>
-          </a:p>
-        </p:txBody>
-      </p:sp>
-      <p:sp>
-        <p:nvSpPr>
-          <p:cNvPr id="4" name="Slide Number Placeholder 3">
-            <a:extLst>
-              <a:ext uri="{FF2B5EF4-FFF2-40B4-BE49-F238E27FC236}">
-                <a16:creationId xmlns:a16="http://schemas.microsoft.com/office/drawing/2014/main" id="{7D90E84E-0A23-2977-EB16-F69A12063AF1}"/>
-              </a:ext>
-            </a:extLst>
-          </p:cNvPr>
-          <p:cNvSpPr>
-            <a:spLocks noGrp="1"/>
-          </p:cNvSpPr>
-          <p:nvPr>
-            <p:ph type="sldNum" sz="quarter" idx="5"/>
-          </p:nvPr>
-        </p:nvSpPr>
-        <p:spPr/>
-        <p:txBody>
-          <a:bodyPr/>
-          <a:lstStyle/>
-          <a:p>
-            <a:fld id="{C5CB39C3-7704-43B7-896D-E2F268455EEA}" type="slidenum">
-              <a:rPr lang="en-US" smtClean="0"/>
-              <a:t>29</a:t>
-            </a:fld>
-            <a:endParaRPr lang="en-US" dirty="0"/>
-          </a:p>
-        </p:txBody>
-      </p:sp>
-    </p:spTree>
-    <p:extLst>
-      <p:ext uri="{BB962C8B-B14F-4D97-AF65-F5344CB8AC3E}">
-        <p14:creationId xmlns:p14="http://schemas.microsoft.com/office/powerpoint/2010/main" val="4106883737"/>
       </p:ext>
     </p:extLst>
   </p:cSld>
@@ -2949,6 +2952,330 @@
         <p:cNvPr id="1" name="">
           <a:extLst>
             <a:ext uri="{FF2B5EF4-FFF2-40B4-BE49-F238E27FC236}">
+              <a16:creationId xmlns:a16="http://schemas.microsoft.com/office/drawing/2014/main" id="{CA58BA0A-DB76-0D65-68E2-17660E44356C}"/>
+            </a:ext>
+          </a:extLst>
+        </p:cNvPr>
+        <p:cNvGrpSpPr/>
+        <p:nvPr/>
+      </p:nvGrpSpPr>
+      <p:grpSpPr>
+        <a:xfrm>
+          <a:off x="0" y="0"/>
+          <a:ext cx="0" cy="0"/>
+          <a:chOff x="0" y="0"/>
+          <a:chExt cx="0" cy="0"/>
+        </a:xfrm>
+      </p:grpSpPr>
+      <p:sp>
+        <p:nvSpPr>
+          <p:cNvPr id="2" name="Slide Image Placeholder 1">
+            <a:extLst>
+              <a:ext uri="{FF2B5EF4-FFF2-40B4-BE49-F238E27FC236}">
+                <a16:creationId xmlns:a16="http://schemas.microsoft.com/office/drawing/2014/main" id="{80612DF5-829D-D53D-F0C6-893F3FEA0C90}"/>
+              </a:ext>
+            </a:extLst>
+          </p:cNvPr>
+          <p:cNvSpPr>
+            <a:spLocks noGrp="1" noRot="1" noChangeAspect="1"/>
+          </p:cNvSpPr>
+          <p:nvPr>
+            <p:ph type="sldImg"/>
+          </p:nvPr>
+        </p:nvSpPr>
+        <p:spPr/>
+      </p:sp>
+      <p:sp>
+        <p:nvSpPr>
+          <p:cNvPr id="3" name="Notes Placeholder 2">
+            <a:extLst>
+              <a:ext uri="{FF2B5EF4-FFF2-40B4-BE49-F238E27FC236}">
+                <a16:creationId xmlns:a16="http://schemas.microsoft.com/office/drawing/2014/main" id="{5B9E3228-DAC0-2282-A808-46D5ED8237EB}"/>
+              </a:ext>
+            </a:extLst>
+          </p:cNvPr>
+          <p:cNvSpPr>
+            <a:spLocks noGrp="1"/>
+          </p:cNvSpPr>
+          <p:nvPr>
+            <p:ph type="body" idx="1"/>
+          </p:nvPr>
+        </p:nvSpPr>
+        <p:spPr/>
+        <p:txBody>
+          <a:bodyPr/>
+          <a:lstStyle/>
+          <a:p>
+            <a:endParaRPr lang="en-US" dirty="0"/>
+          </a:p>
+        </p:txBody>
+      </p:sp>
+      <p:sp>
+        <p:nvSpPr>
+          <p:cNvPr id="4" name="Slide Number Placeholder 3">
+            <a:extLst>
+              <a:ext uri="{FF2B5EF4-FFF2-40B4-BE49-F238E27FC236}">
+                <a16:creationId xmlns:a16="http://schemas.microsoft.com/office/drawing/2014/main" id="{FA5F094E-01EF-2983-288E-3308DA0934A5}"/>
+              </a:ext>
+            </a:extLst>
+          </p:cNvPr>
+          <p:cNvSpPr>
+            <a:spLocks noGrp="1"/>
+          </p:cNvSpPr>
+          <p:nvPr>
+            <p:ph type="sldNum" sz="quarter" idx="5"/>
+          </p:nvPr>
+        </p:nvSpPr>
+        <p:spPr/>
+        <p:txBody>
+          <a:bodyPr/>
+          <a:lstStyle/>
+          <a:p>
+            <a:fld id="{C5CB39C3-7704-43B7-896D-E2F268455EEA}" type="slidenum">
+              <a:rPr lang="en-US" smtClean="0"/>
+              <a:t>30</a:t>
+            </a:fld>
+            <a:endParaRPr lang="en-US" dirty="0"/>
+          </a:p>
+        </p:txBody>
+      </p:sp>
+    </p:spTree>
+    <p:extLst>
+      <p:ext uri="{BB962C8B-B14F-4D97-AF65-F5344CB8AC3E}">
+        <p14:creationId xmlns:p14="http://schemas.microsoft.com/office/powerpoint/2010/main" val="3111854826"/>
+      </p:ext>
+    </p:extLst>
+  </p:cSld>
+  <p:clrMapOvr>
+    <a:masterClrMapping/>
+  </p:clrMapOvr>
+</p:notes>
+</file>
+
+<file path=ppt/notesSlides/notesSlide31.xml><?xml version="1.0" encoding="utf-8"?>
+<p:notes xmlns:a="http://schemas.openxmlformats.org/drawingml/2006/main" xmlns:r="http://schemas.openxmlformats.org/officeDocument/2006/relationships" xmlns:p="http://schemas.openxmlformats.org/presentationml/2006/main">
+  <p:cSld>
+    <p:spTree>
+      <p:nvGrpSpPr>
+        <p:cNvPr id="1" name="">
+          <a:extLst>
+            <a:ext uri="{FF2B5EF4-FFF2-40B4-BE49-F238E27FC236}">
+              <a16:creationId xmlns:a16="http://schemas.microsoft.com/office/drawing/2014/main" id="{2260F4C2-DFF3-131C-868B-AE1DA8091EB9}"/>
+            </a:ext>
+          </a:extLst>
+        </p:cNvPr>
+        <p:cNvGrpSpPr/>
+        <p:nvPr/>
+      </p:nvGrpSpPr>
+      <p:grpSpPr>
+        <a:xfrm>
+          <a:off x="0" y="0"/>
+          <a:ext cx="0" cy="0"/>
+          <a:chOff x="0" y="0"/>
+          <a:chExt cx="0" cy="0"/>
+        </a:xfrm>
+      </p:grpSpPr>
+      <p:sp>
+        <p:nvSpPr>
+          <p:cNvPr id="2" name="Slide Image Placeholder 1">
+            <a:extLst>
+              <a:ext uri="{FF2B5EF4-FFF2-40B4-BE49-F238E27FC236}">
+                <a16:creationId xmlns:a16="http://schemas.microsoft.com/office/drawing/2014/main" id="{8B4E1DC5-A7B5-CDFE-A633-8E8213763F21}"/>
+              </a:ext>
+            </a:extLst>
+          </p:cNvPr>
+          <p:cNvSpPr>
+            <a:spLocks noGrp="1" noRot="1" noChangeAspect="1"/>
+          </p:cNvSpPr>
+          <p:nvPr>
+            <p:ph type="sldImg"/>
+          </p:nvPr>
+        </p:nvSpPr>
+        <p:spPr/>
+      </p:sp>
+      <p:sp>
+        <p:nvSpPr>
+          <p:cNvPr id="3" name="Notes Placeholder 2">
+            <a:extLst>
+              <a:ext uri="{FF2B5EF4-FFF2-40B4-BE49-F238E27FC236}">
+                <a16:creationId xmlns:a16="http://schemas.microsoft.com/office/drawing/2014/main" id="{569294EA-9F8A-A5C1-4865-3A0470DE82E9}"/>
+              </a:ext>
+            </a:extLst>
+          </p:cNvPr>
+          <p:cNvSpPr>
+            <a:spLocks noGrp="1"/>
+          </p:cNvSpPr>
+          <p:nvPr>
+            <p:ph type="body" idx="1"/>
+          </p:nvPr>
+        </p:nvSpPr>
+        <p:spPr/>
+        <p:txBody>
+          <a:bodyPr/>
+          <a:lstStyle/>
+          <a:p>
+            <a:endParaRPr lang="en-US" dirty="0"/>
+          </a:p>
+        </p:txBody>
+      </p:sp>
+      <p:sp>
+        <p:nvSpPr>
+          <p:cNvPr id="4" name="Slide Number Placeholder 3">
+            <a:extLst>
+              <a:ext uri="{FF2B5EF4-FFF2-40B4-BE49-F238E27FC236}">
+                <a16:creationId xmlns:a16="http://schemas.microsoft.com/office/drawing/2014/main" id="{64E9330F-19C8-4100-A572-FAEBB7489520}"/>
+              </a:ext>
+            </a:extLst>
+          </p:cNvPr>
+          <p:cNvSpPr>
+            <a:spLocks noGrp="1"/>
+          </p:cNvSpPr>
+          <p:nvPr>
+            <p:ph type="sldNum" sz="quarter" idx="5"/>
+          </p:nvPr>
+        </p:nvSpPr>
+        <p:spPr/>
+        <p:txBody>
+          <a:bodyPr/>
+          <a:lstStyle/>
+          <a:p>
+            <a:fld id="{C5CB39C3-7704-43B7-896D-E2F268455EEA}" type="slidenum">
+              <a:rPr lang="en-US" smtClean="0"/>
+              <a:t>31</a:t>
+            </a:fld>
+            <a:endParaRPr lang="en-US" dirty="0"/>
+          </a:p>
+        </p:txBody>
+      </p:sp>
+    </p:spTree>
+    <p:extLst>
+      <p:ext uri="{BB962C8B-B14F-4D97-AF65-F5344CB8AC3E}">
+        <p14:creationId xmlns:p14="http://schemas.microsoft.com/office/powerpoint/2010/main" val="3589255602"/>
+      </p:ext>
+    </p:extLst>
+  </p:cSld>
+  <p:clrMapOvr>
+    <a:masterClrMapping/>
+  </p:clrMapOvr>
+</p:notes>
+</file>
+
+<file path=ppt/notesSlides/notesSlide32.xml><?xml version="1.0" encoding="utf-8"?>
+<p:notes xmlns:a="http://schemas.openxmlformats.org/drawingml/2006/main" xmlns:r="http://schemas.openxmlformats.org/officeDocument/2006/relationships" xmlns:p="http://schemas.openxmlformats.org/presentationml/2006/main">
+  <p:cSld>
+    <p:spTree>
+      <p:nvGrpSpPr>
+        <p:cNvPr id="1" name="">
+          <a:extLst>
+            <a:ext uri="{FF2B5EF4-FFF2-40B4-BE49-F238E27FC236}">
+              <a16:creationId xmlns:a16="http://schemas.microsoft.com/office/drawing/2014/main" id="{F892DA80-A353-9870-4A69-88B5F18B7B99}"/>
+            </a:ext>
+          </a:extLst>
+        </p:cNvPr>
+        <p:cNvGrpSpPr/>
+        <p:nvPr/>
+      </p:nvGrpSpPr>
+      <p:grpSpPr>
+        <a:xfrm>
+          <a:off x="0" y="0"/>
+          <a:ext cx="0" cy="0"/>
+          <a:chOff x="0" y="0"/>
+          <a:chExt cx="0" cy="0"/>
+        </a:xfrm>
+      </p:grpSpPr>
+      <p:sp>
+        <p:nvSpPr>
+          <p:cNvPr id="2" name="Slide Image Placeholder 1">
+            <a:extLst>
+              <a:ext uri="{FF2B5EF4-FFF2-40B4-BE49-F238E27FC236}">
+                <a16:creationId xmlns:a16="http://schemas.microsoft.com/office/drawing/2014/main" id="{EBD234D6-43DA-52DE-C8F4-37979BFD61B0}"/>
+              </a:ext>
+            </a:extLst>
+          </p:cNvPr>
+          <p:cNvSpPr>
+            <a:spLocks noGrp="1" noRot="1" noChangeAspect="1"/>
+          </p:cNvSpPr>
+          <p:nvPr>
+            <p:ph type="sldImg"/>
+          </p:nvPr>
+        </p:nvSpPr>
+        <p:spPr/>
+      </p:sp>
+      <p:sp>
+        <p:nvSpPr>
+          <p:cNvPr id="3" name="Notes Placeholder 2">
+            <a:extLst>
+              <a:ext uri="{FF2B5EF4-FFF2-40B4-BE49-F238E27FC236}">
+                <a16:creationId xmlns:a16="http://schemas.microsoft.com/office/drawing/2014/main" id="{D1341CCD-30EE-E842-F026-125351097F23}"/>
+              </a:ext>
+            </a:extLst>
+          </p:cNvPr>
+          <p:cNvSpPr>
+            <a:spLocks noGrp="1"/>
+          </p:cNvSpPr>
+          <p:nvPr>
+            <p:ph type="body" idx="1"/>
+          </p:nvPr>
+        </p:nvSpPr>
+        <p:spPr/>
+        <p:txBody>
+          <a:bodyPr/>
+          <a:lstStyle/>
+          <a:p>
+            <a:endParaRPr lang="en-US" dirty="0"/>
+          </a:p>
+        </p:txBody>
+      </p:sp>
+      <p:sp>
+        <p:nvSpPr>
+          <p:cNvPr id="4" name="Slide Number Placeholder 3">
+            <a:extLst>
+              <a:ext uri="{FF2B5EF4-FFF2-40B4-BE49-F238E27FC236}">
+                <a16:creationId xmlns:a16="http://schemas.microsoft.com/office/drawing/2014/main" id="{7D90E84E-0A23-2977-EB16-F69A12063AF1}"/>
+              </a:ext>
+            </a:extLst>
+          </p:cNvPr>
+          <p:cNvSpPr>
+            <a:spLocks noGrp="1"/>
+          </p:cNvSpPr>
+          <p:nvPr>
+            <p:ph type="sldNum" sz="quarter" idx="5"/>
+          </p:nvPr>
+        </p:nvSpPr>
+        <p:spPr/>
+        <p:txBody>
+          <a:bodyPr/>
+          <a:lstStyle/>
+          <a:p>
+            <a:fld id="{C5CB39C3-7704-43B7-896D-E2F268455EEA}" type="slidenum">
+              <a:rPr lang="en-US" smtClean="0"/>
+              <a:t>32</a:t>
+            </a:fld>
+            <a:endParaRPr lang="en-US" dirty="0"/>
+          </a:p>
+        </p:txBody>
+      </p:sp>
+    </p:spTree>
+    <p:extLst>
+      <p:ext uri="{BB962C8B-B14F-4D97-AF65-F5344CB8AC3E}">
+        <p14:creationId xmlns:p14="http://schemas.microsoft.com/office/powerpoint/2010/main" val="4106883737"/>
+      </p:ext>
+    </p:extLst>
+  </p:cSld>
+  <p:clrMapOvr>
+    <a:masterClrMapping/>
+  </p:clrMapOvr>
+</p:notes>
+</file>
+
+<file path=ppt/notesSlides/notesSlide33.xml><?xml version="1.0" encoding="utf-8"?>
+<p:notes xmlns:a="http://schemas.openxmlformats.org/drawingml/2006/main" xmlns:r="http://schemas.openxmlformats.org/officeDocument/2006/relationships" xmlns:p="http://schemas.openxmlformats.org/presentationml/2006/main">
+  <p:cSld>
+    <p:spTree>
+      <p:nvGrpSpPr>
+        <p:cNvPr id="1" name="">
+          <a:extLst>
+            <a:ext uri="{FF2B5EF4-FFF2-40B4-BE49-F238E27FC236}">
               <a16:creationId xmlns:a16="http://schemas.microsoft.com/office/drawing/2014/main" id="{9B3568FE-8A52-AB53-AC5E-2C2D096F59CE}"/>
             </a:ext>
           </a:extLst>
@@ -3030,7 +3357,7 @@
           <a:p>
             <a:fld id="{C5CB39C3-7704-43B7-896D-E2F268455EEA}" type="slidenum">
               <a:rPr lang="en-US" smtClean="0"/>
-              <a:t>30</a:t>
+              <a:t>33</a:t>
             </a:fld>
             <a:endParaRPr lang="en-US" dirty="0"/>
           </a:p>
@@ -3049,7 +3376,7 @@
 </p:notes>
 </file>
 
-<file path=ppt/notesSlides/notesSlide31.xml><?xml version="1.0" encoding="utf-8"?>
+<file path=ppt/notesSlides/notesSlide34.xml><?xml version="1.0" encoding="utf-8"?>
 <p:notes xmlns:a="http://schemas.openxmlformats.org/drawingml/2006/main" xmlns:r="http://schemas.openxmlformats.org/officeDocument/2006/relationships" xmlns:p="http://schemas.openxmlformats.org/presentationml/2006/main">
   <p:cSld>
     <p:spTree>
@@ -3138,7 +3465,7 @@
           <a:p>
             <a:fld id="{C5CB39C3-7704-43B7-896D-E2F268455EEA}" type="slidenum">
               <a:rPr lang="en-US" smtClean="0"/>
-              <a:t>31</a:t>
+              <a:t>34</a:t>
             </a:fld>
             <a:endParaRPr lang="en-US" dirty="0"/>
           </a:p>
@@ -3157,7 +3484,7 @@
 </p:notes>
 </file>
 
-<file path=ppt/notesSlides/notesSlide32.xml><?xml version="1.0" encoding="utf-8"?>
+<file path=ppt/notesSlides/notesSlide35.xml><?xml version="1.0" encoding="utf-8"?>
 <p:notes xmlns:a="http://schemas.openxmlformats.org/drawingml/2006/main" xmlns:r="http://schemas.openxmlformats.org/officeDocument/2006/relationships" xmlns:p="http://schemas.openxmlformats.org/presentationml/2006/main">
   <p:cSld>
     <p:spTree>
@@ -3246,7 +3573,7 @@
           <a:p>
             <a:fld id="{C5CB39C3-7704-43B7-896D-E2F268455EEA}" type="slidenum">
               <a:rPr lang="en-US" smtClean="0"/>
-              <a:t>32</a:t>
+              <a:t>35</a:t>
             </a:fld>
             <a:endParaRPr lang="en-US" dirty="0"/>
           </a:p>
@@ -3265,7 +3592,7 @@
 </p:notes>
 </file>
 
-<file path=ppt/notesSlides/notesSlide33.xml><?xml version="1.0" encoding="utf-8"?>
+<file path=ppt/notesSlides/notesSlide36.xml><?xml version="1.0" encoding="utf-8"?>
 <p:notes xmlns:a="http://schemas.openxmlformats.org/drawingml/2006/main" xmlns:r="http://schemas.openxmlformats.org/officeDocument/2006/relationships" xmlns:p="http://schemas.openxmlformats.org/presentationml/2006/main">
   <p:cSld>
     <p:spTree>
@@ -3354,7 +3681,7 @@
           <a:p>
             <a:fld id="{C5CB39C3-7704-43B7-896D-E2F268455EEA}" type="slidenum">
               <a:rPr lang="en-US" smtClean="0"/>
-              <a:t>33</a:t>
+              <a:t>36</a:t>
             </a:fld>
             <a:endParaRPr lang="en-US" dirty="0"/>
           </a:p>
@@ -3373,7 +3700,7 @@
 </p:notes>
 </file>
 
-<file path=ppt/notesSlides/notesSlide34.xml><?xml version="1.0" encoding="utf-8"?>
+<file path=ppt/notesSlides/notesSlide37.xml><?xml version="1.0" encoding="utf-8"?>
 <p:notes xmlns:a="http://schemas.openxmlformats.org/drawingml/2006/main" xmlns:r="http://schemas.openxmlformats.org/officeDocument/2006/relationships" xmlns:p="http://schemas.openxmlformats.org/presentationml/2006/main">
   <p:cSld>
     <p:spTree>
@@ -3462,7 +3789,7 @@
           <a:p>
             <a:fld id="{C5CB39C3-7704-43B7-896D-E2F268455EEA}" type="slidenum">
               <a:rPr lang="en-US" smtClean="0"/>
-              <a:t>34</a:t>
+              <a:t>37</a:t>
             </a:fld>
             <a:endParaRPr lang="en-US" dirty="0"/>
           </a:p>
@@ -3481,7 +3808,7 @@
 </p:notes>
 </file>
 
-<file path=ppt/notesSlides/notesSlide35.xml><?xml version="1.0" encoding="utf-8"?>
+<file path=ppt/notesSlides/notesSlide38.xml><?xml version="1.0" encoding="utf-8"?>
 <p:notes xmlns:a="http://schemas.openxmlformats.org/drawingml/2006/main" xmlns:r="http://schemas.openxmlformats.org/officeDocument/2006/relationships" xmlns:p="http://schemas.openxmlformats.org/presentationml/2006/main">
   <p:cSld>
     <p:spTree>
@@ -3570,7 +3897,7 @@
           <a:p>
             <a:fld id="{C5CB39C3-7704-43B7-896D-E2F268455EEA}" type="slidenum">
               <a:rPr lang="en-US" smtClean="0"/>
-              <a:t>35</a:t>
+              <a:t>38</a:t>
             </a:fld>
             <a:endParaRPr lang="en-US" dirty="0"/>
           </a:p>
@@ -3589,7 +3916,7 @@
 </p:notes>
 </file>
 
-<file path=ppt/notesSlides/notesSlide36.xml><?xml version="1.0" encoding="utf-8"?>
+<file path=ppt/notesSlides/notesSlide39.xml><?xml version="1.0" encoding="utf-8"?>
 <p:notes xmlns:a="http://schemas.openxmlformats.org/drawingml/2006/main" xmlns:r="http://schemas.openxmlformats.org/officeDocument/2006/relationships" xmlns:p="http://schemas.openxmlformats.org/presentationml/2006/main">
   <p:cSld>
     <p:spTree>
@@ -3678,7 +4005,7 @@
           <a:p>
             <a:fld id="{C5CB39C3-7704-43B7-896D-E2F268455EEA}" type="slidenum">
               <a:rPr lang="en-US" smtClean="0"/>
-              <a:t>36</a:t>
+              <a:t>39</a:t>
             </a:fld>
             <a:endParaRPr lang="en-US" dirty="0"/>
           </a:p>
@@ -3688,330 +4015,6 @@
     <p:extLst>
       <p:ext uri="{BB962C8B-B14F-4D97-AF65-F5344CB8AC3E}">
         <p14:creationId xmlns:p14="http://schemas.microsoft.com/office/powerpoint/2010/main" val="324480515"/>
-      </p:ext>
-    </p:extLst>
-  </p:cSld>
-  <p:clrMapOvr>
-    <a:masterClrMapping/>
-  </p:clrMapOvr>
-</p:notes>
-</file>
-
-<file path=ppt/notesSlides/notesSlide37.xml><?xml version="1.0" encoding="utf-8"?>
-<p:notes xmlns:a="http://schemas.openxmlformats.org/drawingml/2006/main" xmlns:r="http://schemas.openxmlformats.org/officeDocument/2006/relationships" xmlns:p="http://schemas.openxmlformats.org/presentationml/2006/main">
-  <p:cSld>
-    <p:spTree>
-      <p:nvGrpSpPr>
-        <p:cNvPr id="1" name="">
-          <a:extLst>
-            <a:ext uri="{FF2B5EF4-FFF2-40B4-BE49-F238E27FC236}">
-              <a16:creationId xmlns:a16="http://schemas.microsoft.com/office/drawing/2014/main" id="{3B6E7F9D-795A-B9C2-91F8-F0285947EADC}"/>
-            </a:ext>
-          </a:extLst>
-        </p:cNvPr>
-        <p:cNvGrpSpPr/>
-        <p:nvPr/>
-      </p:nvGrpSpPr>
-      <p:grpSpPr>
-        <a:xfrm>
-          <a:off x="0" y="0"/>
-          <a:ext cx="0" cy="0"/>
-          <a:chOff x="0" y="0"/>
-          <a:chExt cx="0" cy="0"/>
-        </a:xfrm>
-      </p:grpSpPr>
-      <p:sp>
-        <p:nvSpPr>
-          <p:cNvPr id="2" name="Slide Image Placeholder 1">
-            <a:extLst>
-              <a:ext uri="{FF2B5EF4-FFF2-40B4-BE49-F238E27FC236}">
-                <a16:creationId xmlns:a16="http://schemas.microsoft.com/office/drawing/2014/main" id="{EB3581A0-60EF-D251-5E9F-185CED502DBF}"/>
-              </a:ext>
-            </a:extLst>
-          </p:cNvPr>
-          <p:cNvSpPr>
-            <a:spLocks noGrp="1" noRot="1" noChangeAspect="1"/>
-          </p:cNvSpPr>
-          <p:nvPr>
-            <p:ph type="sldImg"/>
-          </p:nvPr>
-        </p:nvSpPr>
-        <p:spPr/>
-      </p:sp>
-      <p:sp>
-        <p:nvSpPr>
-          <p:cNvPr id="3" name="Notes Placeholder 2">
-            <a:extLst>
-              <a:ext uri="{FF2B5EF4-FFF2-40B4-BE49-F238E27FC236}">
-                <a16:creationId xmlns:a16="http://schemas.microsoft.com/office/drawing/2014/main" id="{0D69E03F-964F-5B34-22D5-D9CF588B1A9E}"/>
-              </a:ext>
-            </a:extLst>
-          </p:cNvPr>
-          <p:cNvSpPr>
-            <a:spLocks noGrp="1"/>
-          </p:cNvSpPr>
-          <p:nvPr>
-            <p:ph type="body" idx="1"/>
-          </p:nvPr>
-        </p:nvSpPr>
-        <p:spPr/>
-        <p:txBody>
-          <a:bodyPr/>
-          <a:lstStyle/>
-          <a:p>
-            <a:endParaRPr lang="en-US" dirty="0"/>
-          </a:p>
-        </p:txBody>
-      </p:sp>
-      <p:sp>
-        <p:nvSpPr>
-          <p:cNvPr id="4" name="Slide Number Placeholder 3">
-            <a:extLst>
-              <a:ext uri="{FF2B5EF4-FFF2-40B4-BE49-F238E27FC236}">
-                <a16:creationId xmlns:a16="http://schemas.microsoft.com/office/drawing/2014/main" id="{B0224116-7C05-E00B-07B8-154487BF1C0D}"/>
-              </a:ext>
-            </a:extLst>
-          </p:cNvPr>
-          <p:cNvSpPr>
-            <a:spLocks noGrp="1"/>
-          </p:cNvSpPr>
-          <p:nvPr>
-            <p:ph type="sldNum" sz="quarter" idx="5"/>
-          </p:nvPr>
-        </p:nvSpPr>
-        <p:spPr/>
-        <p:txBody>
-          <a:bodyPr/>
-          <a:lstStyle/>
-          <a:p>
-            <a:fld id="{C5CB39C3-7704-43B7-896D-E2F268455EEA}" type="slidenum">
-              <a:rPr lang="en-US" smtClean="0"/>
-              <a:t>37</a:t>
-            </a:fld>
-            <a:endParaRPr lang="en-US" dirty="0"/>
-          </a:p>
-        </p:txBody>
-      </p:sp>
-    </p:spTree>
-    <p:extLst>
-      <p:ext uri="{BB962C8B-B14F-4D97-AF65-F5344CB8AC3E}">
-        <p14:creationId xmlns:p14="http://schemas.microsoft.com/office/powerpoint/2010/main" val="3070174706"/>
-      </p:ext>
-    </p:extLst>
-  </p:cSld>
-  <p:clrMapOvr>
-    <a:masterClrMapping/>
-  </p:clrMapOvr>
-</p:notes>
-</file>
-
-<file path=ppt/notesSlides/notesSlide38.xml><?xml version="1.0" encoding="utf-8"?>
-<p:notes xmlns:a="http://schemas.openxmlformats.org/drawingml/2006/main" xmlns:r="http://schemas.openxmlformats.org/officeDocument/2006/relationships" xmlns:p="http://schemas.openxmlformats.org/presentationml/2006/main">
-  <p:cSld>
-    <p:spTree>
-      <p:nvGrpSpPr>
-        <p:cNvPr id="1" name="">
-          <a:extLst>
-            <a:ext uri="{FF2B5EF4-FFF2-40B4-BE49-F238E27FC236}">
-              <a16:creationId xmlns:a16="http://schemas.microsoft.com/office/drawing/2014/main" id="{D22112FC-B2C8-C25B-5059-04F736320DA4}"/>
-            </a:ext>
-          </a:extLst>
-        </p:cNvPr>
-        <p:cNvGrpSpPr/>
-        <p:nvPr/>
-      </p:nvGrpSpPr>
-      <p:grpSpPr>
-        <a:xfrm>
-          <a:off x="0" y="0"/>
-          <a:ext cx="0" cy="0"/>
-          <a:chOff x="0" y="0"/>
-          <a:chExt cx="0" cy="0"/>
-        </a:xfrm>
-      </p:grpSpPr>
-      <p:sp>
-        <p:nvSpPr>
-          <p:cNvPr id="2" name="Slide Image Placeholder 1">
-            <a:extLst>
-              <a:ext uri="{FF2B5EF4-FFF2-40B4-BE49-F238E27FC236}">
-                <a16:creationId xmlns:a16="http://schemas.microsoft.com/office/drawing/2014/main" id="{8114B84F-980F-2F98-5089-4355D5C526E8}"/>
-              </a:ext>
-            </a:extLst>
-          </p:cNvPr>
-          <p:cNvSpPr>
-            <a:spLocks noGrp="1" noRot="1" noChangeAspect="1"/>
-          </p:cNvSpPr>
-          <p:nvPr>
-            <p:ph type="sldImg"/>
-          </p:nvPr>
-        </p:nvSpPr>
-        <p:spPr/>
-      </p:sp>
-      <p:sp>
-        <p:nvSpPr>
-          <p:cNvPr id="3" name="Notes Placeholder 2">
-            <a:extLst>
-              <a:ext uri="{FF2B5EF4-FFF2-40B4-BE49-F238E27FC236}">
-                <a16:creationId xmlns:a16="http://schemas.microsoft.com/office/drawing/2014/main" id="{C11402C3-33B2-6015-B9F4-3B5ED0F413ED}"/>
-              </a:ext>
-            </a:extLst>
-          </p:cNvPr>
-          <p:cNvSpPr>
-            <a:spLocks noGrp="1"/>
-          </p:cNvSpPr>
-          <p:nvPr>
-            <p:ph type="body" idx="1"/>
-          </p:nvPr>
-        </p:nvSpPr>
-        <p:spPr/>
-        <p:txBody>
-          <a:bodyPr/>
-          <a:lstStyle/>
-          <a:p>
-            <a:endParaRPr lang="en-US" dirty="0"/>
-          </a:p>
-        </p:txBody>
-      </p:sp>
-      <p:sp>
-        <p:nvSpPr>
-          <p:cNvPr id="4" name="Slide Number Placeholder 3">
-            <a:extLst>
-              <a:ext uri="{FF2B5EF4-FFF2-40B4-BE49-F238E27FC236}">
-                <a16:creationId xmlns:a16="http://schemas.microsoft.com/office/drawing/2014/main" id="{49E2F100-A534-1C7F-2E94-BD24CB31F667}"/>
-              </a:ext>
-            </a:extLst>
-          </p:cNvPr>
-          <p:cNvSpPr>
-            <a:spLocks noGrp="1"/>
-          </p:cNvSpPr>
-          <p:nvPr>
-            <p:ph type="sldNum" sz="quarter" idx="5"/>
-          </p:nvPr>
-        </p:nvSpPr>
-        <p:spPr/>
-        <p:txBody>
-          <a:bodyPr/>
-          <a:lstStyle/>
-          <a:p>
-            <a:fld id="{C5CB39C3-7704-43B7-896D-E2F268455EEA}" type="slidenum">
-              <a:rPr lang="en-US" smtClean="0"/>
-              <a:t>38</a:t>
-            </a:fld>
-            <a:endParaRPr lang="en-US" dirty="0"/>
-          </a:p>
-        </p:txBody>
-      </p:sp>
-    </p:spTree>
-    <p:extLst>
-      <p:ext uri="{BB962C8B-B14F-4D97-AF65-F5344CB8AC3E}">
-        <p14:creationId xmlns:p14="http://schemas.microsoft.com/office/powerpoint/2010/main" val="1627975798"/>
-      </p:ext>
-    </p:extLst>
-  </p:cSld>
-  <p:clrMapOvr>
-    <a:masterClrMapping/>
-  </p:clrMapOvr>
-</p:notes>
-</file>
-
-<file path=ppt/notesSlides/notesSlide39.xml><?xml version="1.0" encoding="utf-8"?>
-<p:notes xmlns:a="http://schemas.openxmlformats.org/drawingml/2006/main" xmlns:r="http://schemas.openxmlformats.org/officeDocument/2006/relationships" xmlns:p="http://schemas.openxmlformats.org/presentationml/2006/main">
-  <p:cSld>
-    <p:spTree>
-      <p:nvGrpSpPr>
-        <p:cNvPr id="1" name="">
-          <a:extLst>
-            <a:ext uri="{FF2B5EF4-FFF2-40B4-BE49-F238E27FC236}">
-              <a16:creationId xmlns:a16="http://schemas.microsoft.com/office/drawing/2014/main" id="{E76682C5-22D8-330F-753C-5D4751CCCA9B}"/>
-            </a:ext>
-          </a:extLst>
-        </p:cNvPr>
-        <p:cNvGrpSpPr/>
-        <p:nvPr/>
-      </p:nvGrpSpPr>
-      <p:grpSpPr>
-        <a:xfrm>
-          <a:off x="0" y="0"/>
-          <a:ext cx="0" cy="0"/>
-          <a:chOff x="0" y="0"/>
-          <a:chExt cx="0" cy="0"/>
-        </a:xfrm>
-      </p:grpSpPr>
-      <p:sp>
-        <p:nvSpPr>
-          <p:cNvPr id="2" name="Slide Image Placeholder 1">
-            <a:extLst>
-              <a:ext uri="{FF2B5EF4-FFF2-40B4-BE49-F238E27FC236}">
-                <a16:creationId xmlns:a16="http://schemas.microsoft.com/office/drawing/2014/main" id="{77621376-8325-885A-520B-9F11250F5B30}"/>
-              </a:ext>
-            </a:extLst>
-          </p:cNvPr>
-          <p:cNvSpPr>
-            <a:spLocks noGrp="1" noRot="1" noChangeAspect="1"/>
-          </p:cNvSpPr>
-          <p:nvPr>
-            <p:ph type="sldImg"/>
-          </p:nvPr>
-        </p:nvSpPr>
-        <p:spPr/>
-      </p:sp>
-      <p:sp>
-        <p:nvSpPr>
-          <p:cNvPr id="3" name="Notes Placeholder 2">
-            <a:extLst>
-              <a:ext uri="{FF2B5EF4-FFF2-40B4-BE49-F238E27FC236}">
-                <a16:creationId xmlns:a16="http://schemas.microsoft.com/office/drawing/2014/main" id="{37BE18C5-2173-1A5E-991B-8B02DD4606D2}"/>
-              </a:ext>
-            </a:extLst>
-          </p:cNvPr>
-          <p:cNvSpPr>
-            <a:spLocks noGrp="1"/>
-          </p:cNvSpPr>
-          <p:nvPr>
-            <p:ph type="body" idx="1"/>
-          </p:nvPr>
-        </p:nvSpPr>
-        <p:spPr/>
-        <p:txBody>
-          <a:bodyPr/>
-          <a:lstStyle/>
-          <a:p>
-            <a:endParaRPr lang="en-US" dirty="0"/>
-          </a:p>
-        </p:txBody>
-      </p:sp>
-      <p:sp>
-        <p:nvSpPr>
-          <p:cNvPr id="4" name="Slide Number Placeholder 3">
-            <a:extLst>
-              <a:ext uri="{FF2B5EF4-FFF2-40B4-BE49-F238E27FC236}">
-                <a16:creationId xmlns:a16="http://schemas.microsoft.com/office/drawing/2014/main" id="{9046D724-9AF8-6639-E1E6-81B9FC87279E}"/>
-              </a:ext>
-            </a:extLst>
-          </p:cNvPr>
-          <p:cNvSpPr>
-            <a:spLocks noGrp="1"/>
-          </p:cNvSpPr>
-          <p:nvPr>
-            <p:ph type="sldNum" sz="quarter" idx="5"/>
-          </p:nvPr>
-        </p:nvSpPr>
-        <p:spPr/>
-        <p:txBody>
-          <a:bodyPr/>
-          <a:lstStyle/>
-          <a:p>
-            <a:fld id="{C5CB39C3-7704-43B7-896D-E2F268455EEA}" type="slidenum">
-              <a:rPr lang="en-US" smtClean="0"/>
-              <a:t>39</a:t>
-            </a:fld>
-            <a:endParaRPr lang="en-US" dirty="0"/>
-          </a:p>
-        </p:txBody>
-      </p:sp>
-    </p:spTree>
-    <p:extLst>
-      <p:ext uri="{BB962C8B-B14F-4D97-AF65-F5344CB8AC3E}">
-        <p14:creationId xmlns:p14="http://schemas.microsoft.com/office/powerpoint/2010/main" val="3880332752"/>
       </p:ext>
     </p:extLst>
   </p:cSld>
@@ -4065,7 +4068,10 @@
           <a:bodyPr/>
           <a:lstStyle/>
           <a:p>
-            <a:endParaRPr lang="en-US" dirty="0"/>
+            <a:r>
+              <a:rPr lang="en-US" dirty="0"/>
+              <a:t>Real assets have value because they directly provide goods/services or contribute to production</a:t>
+            </a:r>
           </a:p>
         </p:txBody>
       </p:sp>
@@ -4106,6 +4112,330 @@
 </file>
 
 <file path=ppt/notesSlides/notesSlide40.xml><?xml version="1.0" encoding="utf-8"?>
+<p:notes xmlns:a="http://schemas.openxmlformats.org/drawingml/2006/main" xmlns:r="http://schemas.openxmlformats.org/officeDocument/2006/relationships" xmlns:p="http://schemas.openxmlformats.org/presentationml/2006/main">
+  <p:cSld>
+    <p:spTree>
+      <p:nvGrpSpPr>
+        <p:cNvPr id="1" name="">
+          <a:extLst>
+            <a:ext uri="{FF2B5EF4-FFF2-40B4-BE49-F238E27FC236}">
+              <a16:creationId xmlns:a16="http://schemas.microsoft.com/office/drawing/2014/main" id="{3B6E7F9D-795A-B9C2-91F8-F0285947EADC}"/>
+            </a:ext>
+          </a:extLst>
+        </p:cNvPr>
+        <p:cNvGrpSpPr/>
+        <p:nvPr/>
+      </p:nvGrpSpPr>
+      <p:grpSpPr>
+        <a:xfrm>
+          <a:off x="0" y="0"/>
+          <a:ext cx="0" cy="0"/>
+          <a:chOff x="0" y="0"/>
+          <a:chExt cx="0" cy="0"/>
+        </a:xfrm>
+      </p:grpSpPr>
+      <p:sp>
+        <p:nvSpPr>
+          <p:cNvPr id="2" name="Slide Image Placeholder 1">
+            <a:extLst>
+              <a:ext uri="{FF2B5EF4-FFF2-40B4-BE49-F238E27FC236}">
+                <a16:creationId xmlns:a16="http://schemas.microsoft.com/office/drawing/2014/main" id="{EB3581A0-60EF-D251-5E9F-185CED502DBF}"/>
+              </a:ext>
+            </a:extLst>
+          </p:cNvPr>
+          <p:cNvSpPr>
+            <a:spLocks noGrp="1" noRot="1" noChangeAspect="1"/>
+          </p:cNvSpPr>
+          <p:nvPr>
+            <p:ph type="sldImg"/>
+          </p:nvPr>
+        </p:nvSpPr>
+        <p:spPr/>
+      </p:sp>
+      <p:sp>
+        <p:nvSpPr>
+          <p:cNvPr id="3" name="Notes Placeholder 2">
+            <a:extLst>
+              <a:ext uri="{FF2B5EF4-FFF2-40B4-BE49-F238E27FC236}">
+                <a16:creationId xmlns:a16="http://schemas.microsoft.com/office/drawing/2014/main" id="{0D69E03F-964F-5B34-22D5-D9CF588B1A9E}"/>
+              </a:ext>
+            </a:extLst>
+          </p:cNvPr>
+          <p:cNvSpPr>
+            <a:spLocks noGrp="1"/>
+          </p:cNvSpPr>
+          <p:nvPr>
+            <p:ph type="body" idx="1"/>
+          </p:nvPr>
+        </p:nvSpPr>
+        <p:spPr/>
+        <p:txBody>
+          <a:bodyPr/>
+          <a:lstStyle/>
+          <a:p>
+            <a:endParaRPr lang="en-US" dirty="0"/>
+          </a:p>
+        </p:txBody>
+      </p:sp>
+      <p:sp>
+        <p:nvSpPr>
+          <p:cNvPr id="4" name="Slide Number Placeholder 3">
+            <a:extLst>
+              <a:ext uri="{FF2B5EF4-FFF2-40B4-BE49-F238E27FC236}">
+                <a16:creationId xmlns:a16="http://schemas.microsoft.com/office/drawing/2014/main" id="{B0224116-7C05-E00B-07B8-154487BF1C0D}"/>
+              </a:ext>
+            </a:extLst>
+          </p:cNvPr>
+          <p:cNvSpPr>
+            <a:spLocks noGrp="1"/>
+          </p:cNvSpPr>
+          <p:nvPr>
+            <p:ph type="sldNum" sz="quarter" idx="5"/>
+          </p:nvPr>
+        </p:nvSpPr>
+        <p:spPr/>
+        <p:txBody>
+          <a:bodyPr/>
+          <a:lstStyle/>
+          <a:p>
+            <a:fld id="{C5CB39C3-7704-43B7-896D-E2F268455EEA}" type="slidenum">
+              <a:rPr lang="en-US" smtClean="0"/>
+              <a:t>40</a:t>
+            </a:fld>
+            <a:endParaRPr lang="en-US" dirty="0"/>
+          </a:p>
+        </p:txBody>
+      </p:sp>
+    </p:spTree>
+    <p:extLst>
+      <p:ext uri="{BB962C8B-B14F-4D97-AF65-F5344CB8AC3E}">
+        <p14:creationId xmlns:p14="http://schemas.microsoft.com/office/powerpoint/2010/main" val="3070174706"/>
+      </p:ext>
+    </p:extLst>
+  </p:cSld>
+  <p:clrMapOvr>
+    <a:masterClrMapping/>
+  </p:clrMapOvr>
+</p:notes>
+</file>
+
+<file path=ppt/notesSlides/notesSlide41.xml><?xml version="1.0" encoding="utf-8"?>
+<p:notes xmlns:a="http://schemas.openxmlformats.org/drawingml/2006/main" xmlns:r="http://schemas.openxmlformats.org/officeDocument/2006/relationships" xmlns:p="http://schemas.openxmlformats.org/presentationml/2006/main">
+  <p:cSld>
+    <p:spTree>
+      <p:nvGrpSpPr>
+        <p:cNvPr id="1" name="">
+          <a:extLst>
+            <a:ext uri="{FF2B5EF4-FFF2-40B4-BE49-F238E27FC236}">
+              <a16:creationId xmlns:a16="http://schemas.microsoft.com/office/drawing/2014/main" id="{D22112FC-B2C8-C25B-5059-04F736320DA4}"/>
+            </a:ext>
+          </a:extLst>
+        </p:cNvPr>
+        <p:cNvGrpSpPr/>
+        <p:nvPr/>
+      </p:nvGrpSpPr>
+      <p:grpSpPr>
+        <a:xfrm>
+          <a:off x="0" y="0"/>
+          <a:ext cx="0" cy="0"/>
+          <a:chOff x="0" y="0"/>
+          <a:chExt cx="0" cy="0"/>
+        </a:xfrm>
+      </p:grpSpPr>
+      <p:sp>
+        <p:nvSpPr>
+          <p:cNvPr id="2" name="Slide Image Placeholder 1">
+            <a:extLst>
+              <a:ext uri="{FF2B5EF4-FFF2-40B4-BE49-F238E27FC236}">
+                <a16:creationId xmlns:a16="http://schemas.microsoft.com/office/drawing/2014/main" id="{8114B84F-980F-2F98-5089-4355D5C526E8}"/>
+              </a:ext>
+            </a:extLst>
+          </p:cNvPr>
+          <p:cNvSpPr>
+            <a:spLocks noGrp="1" noRot="1" noChangeAspect="1"/>
+          </p:cNvSpPr>
+          <p:nvPr>
+            <p:ph type="sldImg"/>
+          </p:nvPr>
+        </p:nvSpPr>
+        <p:spPr/>
+      </p:sp>
+      <p:sp>
+        <p:nvSpPr>
+          <p:cNvPr id="3" name="Notes Placeholder 2">
+            <a:extLst>
+              <a:ext uri="{FF2B5EF4-FFF2-40B4-BE49-F238E27FC236}">
+                <a16:creationId xmlns:a16="http://schemas.microsoft.com/office/drawing/2014/main" id="{C11402C3-33B2-6015-B9F4-3B5ED0F413ED}"/>
+              </a:ext>
+            </a:extLst>
+          </p:cNvPr>
+          <p:cNvSpPr>
+            <a:spLocks noGrp="1"/>
+          </p:cNvSpPr>
+          <p:nvPr>
+            <p:ph type="body" idx="1"/>
+          </p:nvPr>
+        </p:nvSpPr>
+        <p:spPr/>
+        <p:txBody>
+          <a:bodyPr/>
+          <a:lstStyle/>
+          <a:p>
+            <a:endParaRPr lang="en-US" dirty="0"/>
+          </a:p>
+        </p:txBody>
+      </p:sp>
+      <p:sp>
+        <p:nvSpPr>
+          <p:cNvPr id="4" name="Slide Number Placeholder 3">
+            <a:extLst>
+              <a:ext uri="{FF2B5EF4-FFF2-40B4-BE49-F238E27FC236}">
+                <a16:creationId xmlns:a16="http://schemas.microsoft.com/office/drawing/2014/main" id="{49E2F100-A534-1C7F-2E94-BD24CB31F667}"/>
+              </a:ext>
+            </a:extLst>
+          </p:cNvPr>
+          <p:cNvSpPr>
+            <a:spLocks noGrp="1"/>
+          </p:cNvSpPr>
+          <p:nvPr>
+            <p:ph type="sldNum" sz="quarter" idx="5"/>
+          </p:nvPr>
+        </p:nvSpPr>
+        <p:spPr/>
+        <p:txBody>
+          <a:bodyPr/>
+          <a:lstStyle/>
+          <a:p>
+            <a:fld id="{C5CB39C3-7704-43B7-896D-E2F268455EEA}" type="slidenum">
+              <a:rPr lang="en-US" smtClean="0"/>
+              <a:t>41</a:t>
+            </a:fld>
+            <a:endParaRPr lang="en-US" dirty="0"/>
+          </a:p>
+        </p:txBody>
+      </p:sp>
+    </p:spTree>
+    <p:extLst>
+      <p:ext uri="{BB962C8B-B14F-4D97-AF65-F5344CB8AC3E}">
+        <p14:creationId xmlns:p14="http://schemas.microsoft.com/office/powerpoint/2010/main" val="1627975798"/>
+      </p:ext>
+    </p:extLst>
+  </p:cSld>
+  <p:clrMapOvr>
+    <a:masterClrMapping/>
+  </p:clrMapOvr>
+</p:notes>
+</file>
+
+<file path=ppt/notesSlides/notesSlide42.xml><?xml version="1.0" encoding="utf-8"?>
+<p:notes xmlns:a="http://schemas.openxmlformats.org/drawingml/2006/main" xmlns:r="http://schemas.openxmlformats.org/officeDocument/2006/relationships" xmlns:p="http://schemas.openxmlformats.org/presentationml/2006/main">
+  <p:cSld>
+    <p:spTree>
+      <p:nvGrpSpPr>
+        <p:cNvPr id="1" name="">
+          <a:extLst>
+            <a:ext uri="{FF2B5EF4-FFF2-40B4-BE49-F238E27FC236}">
+              <a16:creationId xmlns:a16="http://schemas.microsoft.com/office/drawing/2014/main" id="{E76682C5-22D8-330F-753C-5D4751CCCA9B}"/>
+            </a:ext>
+          </a:extLst>
+        </p:cNvPr>
+        <p:cNvGrpSpPr/>
+        <p:nvPr/>
+      </p:nvGrpSpPr>
+      <p:grpSpPr>
+        <a:xfrm>
+          <a:off x="0" y="0"/>
+          <a:ext cx="0" cy="0"/>
+          <a:chOff x="0" y="0"/>
+          <a:chExt cx="0" cy="0"/>
+        </a:xfrm>
+      </p:grpSpPr>
+      <p:sp>
+        <p:nvSpPr>
+          <p:cNvPr id="2" name="Slide Image Placeholder 1">
+            <a:extLst>
+              <a:ext uri="{FF2B5EF4-FFF2-40B4-BE49-F238E27FC236}">
+                <a16:creationId xmlns:a16="http://schemas.microsoft.com/office/drawing/2014/main" id="{77621376-8325-885A-520B-9F11250F5B30}"/>
+              </a:ext>
+            </a:extLst>
+          </p:cNvPr>
+          <p:cNvSpPr>
+            <a:spLocks noGrp="1" noRot="1" noChangeAspect="1"/>
+          </p:cNvSpPr>
+          <p:nvPr>
+            <p:ph type="sldImg"/>
+          </p:nvPr>
+        </p:nvSpPr>
+        <p:spPr/>
+      </p:sp>
+      <p:sp>
+        <p:nvSpPr>
+          <p:cNvPr id="3" name="Notes Placeholder 2">
+            <a:extLst>
+              <a:ext uri="{FF2B5EF4-FFF2-40B4-BE49-F238E27FC236}">
+                <a16:creationId xmlns:a16="http://schemas.microsoft.com/office/drawing/2014/main" id="{37BE18C5-2173-1A5E-991B-8B02DD4606D2}"/>
+              </a:ext>
+            </a:extLst>
+          </p:cNvPr>
+          <p:cNvSpPr>
+            <a:spLocks noGrp="1"/>
+          </p:cNvSpPr>
+          <p:nvPr>
+            <p:ph type="body" idx="1"/>
+          </p:nvPr>
+        </p:nvSpPr>
+        <p:spPr/>
+        <p:txBody>
+          <a:bodyPr/>
+          <a:lstStyle/>
+          <a:p>
+            <a:endParaRPr lang="en-US" dirty="0"/>
+          </a:p>
+        </p:txBody>
+      </p:sp>
+      <p:sp>
+        <p:nvSpPr>
+          <p:cNvPr id="4" name="Slide Number Placeholder 3">
+            <a:extLst>
+              <a:ext uri="{FF2B5EF4-FFF2-40B4-BE49-F238E27FC236}">
+                <a16:creationId xmlns:a16="http://schemas.microsoft.com/office/drawing/2014/main" id="{9046D724-9AF8-6639-E1E6-81B9FC87279E}"/>
+              </a:ext>
+            </a:extLst>
+          </p:cNvPr>
+          <p:cNvSpPr>
+            <a:spLocks noGrp="1"/>
+          </p:cNvSpPr>
+          <p:nvPr>
+            <p:ph type="sldNum" sz="quarter" idx="5"/>
+          </p:nvPr>
+        </p:nvSpPr>
+        <p:spPr/>
+        <p:txBody>
+          <a:bodyPr/>
+          <a:lstStyle/>
+          <a:p>
+            <a:fld id="{C5CB39C3-7704-43B7-896D-E2F268455EEA}" type="slidenum">
+              <a:rPr lang="en-US" smtClean="0"/>
+              <a:t>42</a:t>
+            </a:fld>
+            <a:endParaRPr lang="en-US" dirty="0"/>
+          </a:p>
+        </p:txBody>
+      </p:sp>
+    </p:spTree>
+    <p:extLst>
+      <p:ext uri="{BB962C8B-B14F-4D97-AF65-F5344CB8AC3E}">
+        <p14:creationId xmlns:p14="http://schemas.microsoft.com/office/powerpoint/2010/main" val="3880332752"/>
+      </p:ext>
+    </p:extLst>
+  </p:cSld>
+  <p:clrMapOvr>
+    <a:masterClrMapping/>
+  </p:clrMapOvr>
+</p:notes>
+</file>
+
+<file path=ppt/notesSlides/notesSlide43.xml><?xml version="1.0" encoding="utf-8"?>
 <p:notes xmlns:a="http://schemas.openxmlformats.org/drawingml/2006/main" xmlns:r="http://schemas.openxmlformats.org/officeDocument/2006/relationships" xmlns:p="http://schemas.openxmlformats.org/presentationml/2006/main">
   <p:cSld>
     <p:spTree>
@@ -4194,7 +4524,7 @@
           <a:p>
             <a:fld id="{C5CB39C3-7704-43B7-896D-E2F268455EEA}" type="slidenum">
               <a:rPr lang="en-US" smtClean="0"/>
-              <a:t>40</a:t>
+              <a:t>43</a:t>
             </a:fld>
             <a:endParaRPr lang="en-US" dirty="0"/>
           </a:p>
@@ -4213,7 +4543,7 @@
 </p:notes>
 </file>
 
-<file path=ppt/notesSlides/notesSlide41.xml><?xml version="1.0" encoding="utf-8"?>
+<file path=ppt/notesSlides/notesSlide44.xml><?xml version="1.0" encoding="utf-8"?>
 <p:notes xmlns:a="http://schemas.openxmlformats.org/drawingml/2006/main" xmlns:r="http://schemas.openxmlformats.org/officeDocument/2006/relationships" xmlns:p="http://schemas.openxmlformats.org/presentationml/2006/main">
   <p:cSld>
     <p:spTree>
@@ -4278,7 +4608,7 @@
           <a:p>
             <a:fld id="{C5CB39C3-7704-43B7-896D-E2F268455EEA}" type="slidenum">
               <a:rPr lang="en-US" smtClean="0"/>
-              <a:t>41</a:t>
+              <a:t>44</a:t>
             </a:fld>
             <a:endParaRPr lang="en-US" dirty="0"/>
           </a:p>
@@ -4497,7 +4827,7 @@
         <p:cNvPr id="1" name="">
           <a:extLst>
             <a:ext uri="{FF2B5EF4-FFF2-40B4-BE49-F238E27FC236}">
-              <a16:creationId xmlns:a16="http://schemas.microsoft.com/office/drawing/2014/main" id="{5E4185A3-DD59-26A6-6E10-3AE6D9772DC0}"/>
+              <a16:creationId xmlns:a16="http://schemas.microsoft.com/office/drawing/2014/main" id="{8A130D1C-7D26-17CC-717A-78BF95BCAC6F}"/>
             </a:ext>
           </a:extLst>
         </p:cNvPr>
@@ -4517,7 +4847,7 @@
           <p:cNvPr id="2" name="Slide Image Placeholder 1">
             <a:extLst>
               <a:ext uri="{FF2B5EF4-FFF2-40B4-BE49-F238E27FC236}">
-                <a16:creationId xmlns:a16="http://schemas.microsoft.com/office/drawing/2014/main" id="{A4FF7ABE-F8A0-C72F-2110-284A13531A69}"/>
+                <a16:creationId xmlns:a16="http://schemas.microsoft.com/office/drawing/2014/main" id="{1C598E8C-9AE2-6594-E627-850ABEC9A663}"/>
               </a:ext>
             </a:extLst>
           </p:cNvPr>
@@ -4535,7 +4865,7 @@
           <p:cNvPr id="3" name="Notes Placeholder 2">
             <a:extLst>
               <a:ext uri="{FF2B5EF4-FFF2-40B4-BE49-F238E27FC236}">
-                <a16:creationId xmlns:a16="http://schemas.microsoft.com/office/drawing/2014/main" id="{D05B5490-D495-42C4-DB60-9EB98A50F594}"/>
+                <a16:creationId xmlns:a16="http://schemas.microsoft.com/office/drawing/2014/main" id="{30305E02-2358-989E-58A9-7134AD761FC3}"/>
               </a:ext>
             </a:extLst>
           </p:cNvPr>
@@ -4560,7 +4890,7 @@
           <p:cNvPr id="4" name="Slide Number Placeholder 3">
             <a:extLst>
               <a:ext uri="{FF2B5EF4-FFF2-40B4-BE49-F238E27FC236}">
-                <a16:creationId xmlns:a16="http://schemas.microsoft.com/office/drawing/2014/main" id="{ED24877F-3BAF-34C0-D90E-2E4DDA85158C}"/>
+                <a16:creationId xmlns:a16="http://schemas.microsoft.com/office/drawing/2014/main" id="{C9A73712-9993-25CC-4AAE-39783422D1F4}"/>
               </a:ext>
             </a:extLst>
           </p:cNvPr>
@@ -4587,7 +4917,7 @@
     </p:spTree>
     <p:extLst>
       <p:ext uri="{BB962C8B-B14F-4D97-AF65-F5344CB8AC3E}">
-        <p14:creationId xmlns:p14="http://schemas.microsoft.com/office/powerpoint/2010/main" val="934324468"/>
+        <p14:creationId xmlns:p14="http://schemas.microsoft.com/office/powerpoint/2010/main" val="1423978437"/>
       </p:ext>
     </p:extLst>
   </p:cSld>
@@ -4605,7 +4935,7 @@
         <p:cNvPr id="1" name="">
           <a:extLst>
             <a:ext uri="{FF2B5EF4-FFF2-40B4-BE49-F238E27FC236}">
-              <a16:creationId xmlns:a16="http://schemas.microsoft.com/office/drawing/2014/main" id="{C96BABB0-316D-22C5-57A4-3C6C4455CDDB}"/>
+              <a16:creationId xmlns:a16="http://schemas.microsoft.com/office/drawing/2014/main" id="{51470ED5-B1E2-2464-A4FE-A4F696D6B5C3}"/>
             </a:ext>
           </a:extLst>
         </p:cNvPr>
@@ -4625,7 +4955,7 @@
           <p:cNvPr id="2" name="Slide Image Placeholder 1">
             <a:extLst>
               <a:ext uri="{FF2B5EF4-FFF2-40B4-BE49-F238E27FC236}">
-                <a16:creationId xmlns:a16="http://schemas.microsoft.com/office/drawing/2014/main" id="{6214CCC8-D2D2-C5B7-997F-477D5A11D75E}"/>
+                <a16:creationId xmlns:a16="http://schemas.microsoft.com/office/drawing/2014/main" id="{ED76D894-8FBE-9FDB-0572-451E89043480}"/>
               </a:ext>
             </a:extLst>
           </p:cNvPr>
@@ -4643,7 +4973,7 @@
           <p:cNvPr id="3" name="Notes Placeholder 2">
             <a:extLst>
               <a:ext uri="{FF2B5EF4-FFF2-40B4-BE49-F238E27FC236}">
-                <a16:creationId xmlns:a16="http://schemas.microsoft.com/office/drawing/2014/main" id="{B8694E96-A44E-2419-5C6F-1159F303669A}"/>
+                <a16:creationId xmlns:a16="http://schemas.microsoft.com/office/drawing/2014/main" id="{C11B49A4-48C3-0D25-3CB2-0EFD7E730FE8}"/>
               </a:ext>
             </a:extLst>
           </p:cNvPr>
@@ -4668,7 +4998,7 @@
           <p:cNvPr id="4" name="Slide Number Placeholder 3">
             <a:extLst>
               <a:ext uri="{FF2B5EF4-FFF2-40B4-BE49-F238E27FC236}">
-                <a16:creationId xmlns:a16="http://schemas.microsoft.com/office/drawing/2014/main" id="{1FC81F0A-0965-93D5-3FE7-6FE72E0AE534}"/>
+                <a16:creationId xmlns:a16="http://schemas.microsoft.com/office/drawing/2014/main" id="{FB0F9159-4E77-8D6C-D82C-749225DD588D}"/>
               </a:ext>
             </a:extLst>
           </p:cNvPr>
@@ -4695,7 +5025,7 @@
     </p:spTree>
     <p:extLst>
       <p:ext uri="{BB962C8B-B14F-4D97-AF65-F5344CB8AC3E}">
-        <p14:creationId xmlns:p14="http://schemas.microsoft.com/office/powerpoint/2010/main" val="2244613857"/>
+        <p14:creationId xmlns:p14="http://schemas.microsoft.com/office/powerpoint/2010/main" val="948821029"/>
       </p:ext>
     </p:extLst>
   </p:cSld>
@@ -4713,7 +5043,7 @@
         <p:cNvPr id="1" name="">
           <a:extLst>
             <a:ext uri="{FF2B5EF4-FFF2-40B4-BE49-F238E27FC236}">
-              <a16:creationId xmlns:a16="http://schemas.microsoft.com/office/drawing/2014/main" id="{002CF418-1071-7BDA-F9CC-380E11CC8AA7}"/>
+              <a16:creationId xmlns:a16="http://schemas.microsoft.com/office/drawing/2014/main" id="{5E4185A3-DD59-26A6-6E10-3AE6D9772DC0}"/>
             </a:ext>
           </a:extLst>
         </p:cNvPr>
@@ -4733,7 +5063,7 @@
           <p:cNvPr id="2" name="Slide Image Placeholder 1">
             <a:extLst>
               <a:ext uri="{FF2B5EF4-FFF2-40B4-BE49-F238E27FC236}">
-                <a16:creationId xmlns:a16="http://schemas.microsoft.com/office/drawing/2014/main" id="{57FA8CE4-FE7E-D5A3-BF75-6C6323C83D50}"/>
+                <a16:creationId xmlns:a16="http://schemas.microsoft.com/office/drawing/2014/main" id="{A4FF7ABE-F8A0-C72F-2110-284A13531A69}"/>
               </a:ext>
             </a:extLst>
           </p:cNvPr>
@@ -4751,7 +5081,7 @@
           <p:cNvPr id="3" name="Notes Placeholder 2">
             <a:extLst>
               <a:ext uri="{FF2B5EF4-FFF2-40B4-BE49-F238E27FC236}">
-                <a16:creationId xmlns:a16="http://schemas.microsoft.com/office/drawing/2014/main" id="{6B8C5174-0EF6-D364-90D2-02FB22980887}"/>
+                <a16:creationId xmlns:a16="http://schemas.microsoft.com/office/drawing/2014/main" id="{D05B5490-D495-42C4-DB60-9EB98A50F594}"/>
               </a:ext>
             </a:extLst>
           </p:cNvPr>
@@ -4776,7 +5106,7 @@
           <p:cNvPr id="4" name="Slide Number Placeholder 3">
             <a:extLst>
               <a:ext uri="{FF2B5EF4-FFF2-40B4-BE49-F238E27FC236}">
-                <a16:creationId xmlns:a16="http://schemas.microsoft.com/office/drawing/2014/main" id="{10CDE50F-F617-A64F-495E-BCD59A26F226}"/>
+                <a16:creationId xmlns:a16="http://schemas.microsoft.com/office/drawing/2014/main" id="{ED24877F-3BAF-34C0-D90E-2E4DDA85158C}"/>
               </a:ext>
             </a:extLst>
           </p:cNvPr>
@@ -4803,7 +5133,7 @@
     </p:spTree>
     <p:extLst>
       <p:ext uri="{BB962C8B-B14F-4D97-AF65-F5344CB8AC3E}">
-        <p14:creationId xmlns:p14="http://schemas.microsoft.com/office/powerpoint/2010/main" val="2066363862"/>
+        <p14:creationId xmlns:p14="http://schemas.microsoft.com/office/powerpoint/2010/main" val="934324468"/>
       </p:ext>
     </p:extLst>
   </p:cSld>
@@ -5065,7 +5395,7 @@
           <a:p>
             <a:fld id="{BC9AB8A9-18BE-4EDF-90DD-E48A588FE9E1}" type="datetime1">
               <a:rPr lang="en-US" smtClean="0"/>
-              <a:t>2/21/2026</a:t>
+              <a:t>8/11/2026</a:t>
             </a:fld>
             <a:endParaRPr lang="en-US" dirty="0"/>
           </a:p>
@@ -5327,7 +5657,7 @@
           <a:p>
             <a:fld id="{31C11933-86B0-441A-B639-BD29FDFEFE70}" type="datetime1">
               <a:rPr lang="en-US" smtClean="0"/>
-              <a:t>2/21/2026</a:t>
+              <a:t>8/11/2026</a:t>
             </a:fld>
             <a:endParaRPr lang="en-US" dirty="0"/>
           </a:p>
@@ -5562,7 +5892,7 @@
           <a:p>
             <a:fld id="{74662F02-AFBF-41E7-AC4B-D00C212D7A74}" type="datetime1">
               <a:rPr lang="en-US" smtClean="0"/>
-              <a:t>2/21/2026</a:t>
+              <a:t>8/11/2026</a:t>
             </a:fld>
             <a:endParaRPr lang="en-US" dirty="0"/>
           </a:p>
@@ -9152,7 +9482,7 @@
           <a:p>
             <a:fld id="{5F466308-2A9A-43A3-8189-DAED754C8691}" type="datetime1">
               <a:rPr lang="en-US" smtClean="0"/>
-              <a:t>2/21/2026</a:t>
+              <a:t>8/11/2026</a:t>
             </a:fld>
             <a:endParaRPr lang="en-US" dirty="0"/>
           </a:p>
@@ -9809,7 +10139,7 @@
           <a:p>
             <a:fld id="{FC51178D-1D9D-49FF-BA4D-77D5F3F2ABE7}" type="datetime1">
               <a:rPr lang="en-US" smtClean="0"/>
-              <a:t>2/21/2026</a:t>
+              <a:t>8/11/2026</a:t>
             </a:fld>
             <a:endParaRPr lang="en-US" dirty="0"/>
           </a:p>
@@ -10111,7 +10441,7 @@
           <a:p>
             <a:fld id="{84A73D5F-7352-4D75-84BB-BEEE96694360}" type="datetime1">
               <a:rPr lang="en-US" smtClean="0"/>
-              <a:t>2/21/2026</a:t>
+              <a:t>8/11/2026</a:t>
             </a:fld>
             <a:endParaRPr lang="en-US" dirty="0"/>
           </a:p>
@@ -10533,7 +10863,7 @@
           <a:p>
             <a:fld id="{73AEC2FA-EF00-4A47-8C60-11D9B66273AB}" type="datetime1">
               <a:rPr lang="en-US" smtClean="0"/>
-              <a:t>2/21/2026</a:t>
+              <a:t>8/11/2026</a:t>
             </a:fld>
             <a:endParaRPr lang="en-US" dirty="0"/>
           </a:p>
@@ -10695,7 +11025,7 @@
           <a:p>
             <a:fld id="{69C03762-E4E4-41FB-87AC-4875A8A25370}" type="datetime1">
               <a:rPr lang="en-US" smtClean="0"/>
-              <a:t>2/21/2026</a:t>
+              <a:t>8/11/2026</a:t>
             </a:fld>
             <a:endParaRPr lang="en-US" dirty="0"/>
           </a:p>
@@ -10790,7 +11120,7 @@
           <a:p>
             <a:fld id="{663153EE-997E-48D6-BC05-B28D307B015C}" type="datetime1">
               <a:rPr lang="en-US" smtClean="0"/>
-              <a:t>2/21/2026</a:t>
+              <a:t>8/11/2026</a:t>
             </a:fld>
             <a:endParaRPr lang="en-US" dirty="0"/>
           </a:p>
@@ -11168,7 +11498,7 @@
           <a:p>
             <a:fld id="{E67CB83A-8CDA-4EB5-9F88-80628B7C644C}" type="datetime1">
               <a:rPr lang="en-US" smtClean="0"/>
-              <a:t>2/21/2026</a:t>
+              <a:t>8/11/2026</a:t>
             </a:fld>
             <a:endParaRPr lang="en-US" dirty="0"/>
           </a:p>
@@ -11456,7 +11786,7 @@
           <a:p>
             <a:fld id="{22FEB533-51F5-4A09-A69B-BDA5FA92A366}" type="datetime1">
               <a:rPr lang="en-US" smtClean="0"/>
-              <a:t>2/21/2026</a:t>
+              <a:t>8/11/2026</a:t>
             </a:fld>
             <a:endParaRPr lang="en-US" dirty="0"/>
           </a:p>
@@ -11667,7 +11997,7 @@
           <a:p>
             <a:fld id="{64819377-49A4-4FAF-9376-1B9935A96765}" type="datetime1">
               <a:rPr lang="en-US" smtClean="0"/>
-              <a:t>2/21/2026</a:t>
+              <a:t>8/11/2026</a:t>
             </a:fld>
             <a:endParaRPr lang="en-US" dirty="0"/>
           </a:p>
@@ -13321,6 +13651,877 @@
         <p:cNvPr id="1" name="">
           <a:extLst>
             <a:ext uri="{FF2B5EF4-FFF2-40B4-BE49-F238E27FC236}">
+              <a16:creationId xmlns:a16="http://schemas.microsoft.com/office/drawing/2014/main" id="{3537A537-75F0-E425-50DE-E2375AA59EB6}"/>
+            </a:ext>
+          </a:extLst>
+        </p:cNvPr>
+        <p:cNvGrpSpPr/>
+        <p:nvPr/>
+      </p:nvGrpSpPr>
+      <p:grpSpPr>
+        <a:xfrm>
+          <a:off x="0" y="0"/>
+          <a:ext cx="0" cy="0"/>
+          <a:chOff x="0" y="0"/>
+          <a:chExt cx="0" cy="0"/>
+        </a:xfrm>
+      </p:grpSpPr>
+      <p:sp>
+        <p:nvSpPr>
+          <p:cNvPr id="2" name="Title 1">
+            <a:extLst>
+              <a:ext uri="{FF2B5EF4-FFF2-40B4-BE49-F238E27FC236}">
+                <a16:creationId xmlns:a16="http://schemas.microsoft.com/office/drawing/2014/main" id="{F8B88E11-8C23-F82F-3091-BE46386EDF4E}"/>
+              </a:ext>
+            </a:extLst>
+          </p:cNvPr>
+          <p:cNvSpPr>
+            <a:spLocks noGrp="1"/>
+          </p:cNvSpPr>
+          <p:nvPr>
+            <p:ph type="title"/>
+          </p:nvPr>
+        </p:nvSpPr>
+        <p:spPr>
+          <a:xfrm>
+            <a:off x="581192" y="702156"/>
+            <a:ext cx="11029616" cy="1013800"/>
+          </a:xfrm>
+        </p:spPr>
+        <p:txBody>
+          <a:bodyPr vert="horz" lIns="91440" tIns="45720" rIns="91440" bIns="45720" rtlCol="0" anchor="b">
+            <a:normAutofit/>
+          </a:bodyPr>
+          <a:lstStyle/>
+          <a:p>
+            <a:r>
+              <a:rPr lang="en-US" dirty="0">
+                <a:solidFill>
+                  <a:srgbClr val="FFFFFF"/>
+                </a:solidFill>
+              </a:rPr>
+              <a:t>Corporate Investment and Financing Decisions</a:t>
+            </a:r>
+          </a:p>
+        </p:txBody>
+      </p:sp>
+      <p:sp>
+        <p:nvSpPr>
+          <p:cNvPr id="4" name="Slide Number Placeholder 3">
+            <a:extLst>
+              <a:ext uri="{FF2B5EF4-FFF2-40B4-BE49-F238E27FC236}">
+                <a16:creationId xmlns:a16="http://schemas.microsoft.com/office/drawing/2014/main" id="{2D7B27B0-DD8B-2307-55EE-D712E0F9CDFD}"/>
+              </a:ext>
+            </a:extLst>
+          </p:cNvPr>
+          <p:cNvSpPr>
+            <a:spLocks noGrp="1"/>
+          </p:cNvSpPr>
+          <p:nvPr>
+            <p:ph type="sldNum" sz="quarter" idx="12"/>
+          </p:nvPr>
+        </p:nvSpPr>
+        <p:spPr>
+          <a:xfrm>
+            <a:off x="11338370" y="6290048"/>
+            <a:ext cx="544875" cy="365125"/>
+          </a:xfrm>
+        </p:spPr>
+        <p:txBody>
+          <a:bodyPr vert="horz" lIns="91440" tIns="45720" rIns="91440" bIns="45720" rtlCol="0" anchor="ctr">
+            <a:normAutofit/>
+          </a:bodyPr>
+          <a:lstStyle/>
+          <a:p>
+            <a:pPr>
+              <a:spcAft>
+                <a:spcPts val="600"/>
+              </a:spcAft>
+            </a:pPr>
+            <a:fld id="{7128DA7F-F6FE-453F-B8BB-1900E7257DA6}" type="slidenum">
+              <a:rPr lang="en-US" smtClean="0"/>
+              <a:pPr>
+                <a:spcAft>
+                  <a:spcPts val="600"/>
+                </a:spcAft>
+              </a:pPr>
+              <a:t>10</a:t>
+            </a:fld>
+            <a:endParaRPr lang="en-US" dirty="0"/>
+          </a:p>
+        </p:txBody>
+      </p:sp>
+      <p:pic>
+        <p:nvPicPr>
+          <p:cNvPr id="5" name="Picture 4">
+            <a:extLst>
+              <a:ext uri="{FF2B5EF4-FFF2-40B4-BE49-F238E27FC236}">
+                <a16:creationId xmlns:a16="http://schemas.microsoft.com/office/drawing/2014/main" id="{68C6B576-DABA-BEC2-B264-6B16E2CD2A5F}"/>
+              </a:ext>
+            </a:extLst>
+          </p:cNvPr>
+          <p:cNvPicPr>
+            <a:picLocks noChangeAspect="1"/>
+          </p:cNvPicPr>
+          <p:nvPr/>
+        </p:nvPicPr>
+        <p:blipFill>
+          <a:blip r:embed="rId3">
+            <a:extLst>
+              <a:ext uri="{28A0092B-C50C-407E-A947-70E740481C1C}">
+                <a14:useLocalDpi xmlns:a14="http://schemas.microsoft.com/office/drawing/2010/main" val="0"/>
+              </a:ext>
+            </a:extLst>
+          </a:blip>
+          <a:stretch>
+            <a:fillRect/>
+          </a:stretch>
+        </p:blipFill>
+        <p:spPr>
+          <a:xfrm>
+            <a:off x="2324582" y="1968761"/>
+            <a:ext cx="7542836" cy="4646511"/>
+          </a:xfrm>
+          <a:prstGeom prst="rect">
+            <a:avLst/>
+          </a:prstGeom>
+        </p:spPr>
+      </p:pic>
+    </p:spTree>
+    <p:extLst>
+      <p:ext uri="{BB962C8B-B14F-4D97-AF65-F5344CB8AC3E}">
+        <p14:creationId xmlns:p14="http://schemas.microsoft.com/office/powerpoint/2010/main" val="1746390872"/>
+      </p:ext>
+    </p:extLst>
+  </p:cSld>
+  <p:clrMapOvr>
+    <a:masterClrMapping/>
+  </p:clrMapOvr>
+</p:sld>
+</file>
+
+<file path=ppt/slides/slide11.xml><?xml version="1.0" encoding="utf-8"?>
+<p:sld xmlns:a="http://schemas.openxmlformats.org/drawingml/2006/main" xmlns:r="http://schemas.openxmlformats.org/officeDocument/2006/relationships" xmlns:p="http://schemas.openxmlformats.org/presentationml/2006/main">
+  <p:cSld>
+    <p:spTree>
+      <p:nvGrpSpPr>
+        <p:cNvPr id="1" name="">
+          <a:extLst>
+            <a:ext uri="{FF2B5EF4-FFF2-40B4-BE49-F238E27FC236}">
+              <a16:creationId xmlns:a16="http://schemas.microsoft.com/office/drawing/2014/main" id="{90F50D76-6D8C-8C14-667D-E0B938200247}"/>
+            </a:ext>
+          </a:extLst>
+        </p:cNvPr>
+        <p:cNvGrpSpPr/>
+        <p:nvPr/>
+      </p:nvGrpSpPr>
+      <p:grpSpPr>
+        <a:xfrm>
+          <a:off x="0" y="0"/>
+          <a:ext cx="0" cy="0"/>
+          <a:chOff x="0" y="0"/>
+          <a:chExt cx="0" cy="0"/>
+        </a:xfrm>
+      </p:grpSpPr>
+      <p:sp>
+        <p:nvSpPr>
+          <p:cNvPr id="2" name="Title 1">
+            <a:extLst>
+              <a:ext uri="{FF2B5EF4-FFF2-40B4-BE49-F238E27FC236}">
+                <a16:creationId xmlns:a16="http://schemas.microsoft.com/office/drawing/2014/main" id="{5CF28523-82B1-6FB7-8175-56508158B015}"/>
+              </a:ext>
+            </a:extLst>
+          </p:cNvPr>
+          <p:cNvSpPr>
+            <a:spLocks noGrp="1"/>
+          </p:cNvSpPr>
+          <p:nvPr>
+            <p:ph type="title"/>
+          </p:nvPr>
+        </p:nvSpPr>
+        <p:spPr>
+          <a:xfrm>
+            <a:off x="581192" y="702156"/>
+            <a:ext cx="11029616" cy="1013800"/>
+          </a:xfrm>
+        </p:spPr>
+        <p:txBody>
+          <a:bodyPr vert="horz" lIns="91440" tIns="45720" rIns="91440" bIns="45720" rtlCol="0" anchor="b">
+            <a:normAutofit/>
+          </a:bodyPr>
+          <a:lstStyle/>
+          <a:p>
+            <a:r>
+              <a:rPr lang="en-US" dirty="0">
+                <a:solidFill>
+                  <a:srgbClr val="FFFFFF"/>
+                </a:solidFill>
+              </a:rPr>
+              <a:t>Corporate Investment and Financing Decisions</a:t>
+            </a:r>
+            <a:endParaRPr lang="en-US" dirty="0"/>
+          </a:p>
+        </p:txBody>
+      </p:sp>
+      <p:sp>
+        <p:nvSpPr>
+          <p:cNvPr id="4" name="Slide Number Placeholder 3">
+            <a:extLst>
+              <a:ext uri="{FF2B5EF4-FFF2-40B4-BE49-F238E27FC236}">
+                <a16:creationId xmlns:a16="http://schemas.microsoft.com/office/drawing/2014/main" id="{4827AE37-C88B-33BB-860E-8309E8E29B73}"/>
+              </a:ext>
+            </a:extLst>
+          </p:cNvPr>
+          <p:cNvSpPr>
+            <a:spLocks noGrp="1"/>
+          </p:cNvSpPr>
+          <p:nvPr>
+            <p:ph type="sldNum" sz="quarter" idx="12"/>
+          </p:nvPr>
+        </p:nvSpPr>
+        <p:spPr>
+          <a:xfrm>
+            <a:off x="10558300" y="6400800"/>
+            <a:ext cx="1052508" cy="365125"/>
+          </a:xfrm>
+        </p:spPr>
+        <p:txBody>
+          <a:bodyPr vert="horz" lIns="91440" tIns="45720" rIns="91440" bIns="45720" rtlCol="0" anchor="ctr">
+            <a:normAutofit/>
+          </a:bodyPr>
+          <a:lstStyle/>
+          <a:p>
+            <a:pPr>
+              <a:spcAft>
+                <a:spcPts val="600"/>
+              </a:spcAft>
+            </a:pPr>
+            <a:fld id="{7128DA7F-F6FE-453F-B8BB-1900E7257DA6}" type="slidenum">
+              <a:rPr lang="en-US" smtClean="0"/>
+              <a:pPr>
+                <a:spcAft>
+                  <a:spcPts val="600"/>
+                </a:spcAft>
+              </a:pPr>
+              <a:t>11</a:t>
+            </a:fld>
+            <a:endParaRPr lang="en-US" dirty="0"/>
+          </a:p>
+        </p:txBody>
+      </p:sp>
+      <p:graphicFrame>
+        <p:nvGraphicFramePr>
+          <p:cNvPr id="6" name="Table 9">
+            <a:extLst>
+              <a:ext uri="{FF2B5EF4-FFF2-40B4-BE49-F238E27FC236}">
+                <a16:creationId xmlns:a16="http://schemas.microsoft.com/office/drawing/2014/main" id="{CADBE7B9-E5A2-0624-E3D3-17E06AF55BD9}"/>
+              </a:ext>
+            </a:extLst>
+          </p:cNvPr>
+          <p:cNvGraphicFramePr>
+            <a:graphicFrameLocks noGrp="1"/>
+          </p:cNvGraphicFramePr>
+          <p:nvPr>
+            <p:extLst>
+              <p:ext uri="{D42A27DB-BD31-4B8C-83A1-F6EECF244321}">
+                <p14:modId xmlns:p14="http://schemas.microsoft.com/office/powerpoint/2010/main" val="1368630320"/>
+              </p:ext>
+            </p:extLst>
+          </p:nvPr>
+        </p:nvGraphicFramePr>
+        <p:xfrm>
+          <a:off x="2152728" y="2029146"/>
+          <a:ext cx="7886544" cy="4593721"/>
+        </p:xfrm>
+        <a:graphic>
+          <a:graphicData uri="http://schemas.openxmlformats.org/drawingml/2006/table">
+            <a:tbl>
+              <a:tblPr firstRow="1" bandRow="1">
+                <a:tableStyleId>{5C22544A-7EE6-4342-B048-85BDC9FD1C3A}</a:tableStyleId>
+              </a:tblPr>
+              <a:tblGrid>
+                <a:gridCol w="1865743">
+                  <a:extLst>
+                    <a:ext uri="{9D8B030D-6E8A-4147-A177-3AD203B41FA5}">
+                      <a16:colId xmlns:a16="http://schemas.microsoft.com/office/drawing/2014/main" val="1994840649"/>
+                    </a:ext>
+                  </a:extLst>
+                </a:gridCol>
+                <a:gridCol w="3156634">
+                  <a:extLst>
+                    <a:ext uri="{9D8B030D-6E8A-4147-A177-3AD203B41FA5}">
+                      <a16:colId xmlns:a16="http://schemas.microsoft.com/office/drawing/2014/main" val="1213569130"/>
+                    </a:ext>
+                  </a:extLst>
+                </a:gridCol>
+                <a:gridCol w="2864167">
+                  <a:extLst>
+                    <a:ext uri="{9D8B030D-6E8A-4147-A177-3AD203B41FA5}">
+                      <a16:colId xmlns:a16="http://schemas.microsoft.com/office/drawing/2014/main" val="2659718133"/>
+                    </a:ext>
+                  </a:extLst>
+                </a:gridCol>
+              </a:tblGrid>
+              <a:tr h="613097">
+                <a:tc>
+                  <a:txBody>
+                    <a:bodyPr/>
+                    <a:lstStyle/>
+                    <a:p>
+                      <a:r>
+                        <a:rPr lang="en-US" sz="1600" dirty="0"/>
+                        <a:t>Company</a:t>
+                      </a:r>
+                    </a:p>
+                  </a:txBody>
+                  <a:tcPr/>
+                </a:tc>
+                <a:tc>
+                  <a:txBody>
+                    <a:bodyPr/>
+                    <a:lstStyle/>
+                    <a:p>
+                      <a:r>
+                        <a:rPr lang="en-US" sz="1600" dirty="0"/>
+                        <a:t>Recent Investment Decisions</a:t>
+                      </a:r>
+                    </a:p>
+                  </a:txBody>
+                  <a:tcPr/>
+                </a:tc>
+                <a:tc>
+                  <a:txBody>
+                    <a:bodyPr/>
+                    <a:lstStyle/>
+                    <a:p>
+                      <a:r>
+                        <a:rPr lang="en-US" sz="1600" dirty="0"/>
+                        <a:t>Recent Financing Decisions</a:t>
+                      </a:r>
+                    </a:p>
+                  </a:txBody>
+                  <a:tcPr/>
+                </a:tc>
+                <a:extLst>
+                  <a:ext uri="{0D108BD9-81ED-4DB2-BD59-A6C34878D82A}">
+                    <a16:rowId xmlns:a16="http://schemas.microsoft.com/office/drawing/2014/main" val="3524318364"/>
+                  </a:ext>
+                </a:extLst>
+              </a:tr>
+              <a:tr h="792444">
+                <a:tc>
+                  <a:txBody>
+                    <a:bodyPr/>
+                    <a:lstStyle/>
+                    <a:p>
+                      <a:r>
+                        <a:rPr lang="en-US" sz="1600" dirty="0"/>
+                        <a:t>Intel (US)</a:t>
+                      </a:r>
+                    </a:p>
+                  </a:txBody>
+                  <a:tcPr/>
+                </a:tc>
+                <a:tc>
+                  <a:txBody>
+                    <a:bodyPr/>
+                    <a:lstStyle/>
+                    <a:p>
+                      <a:r>
+                        <a:rPr lang="en-US" sz="1600" dirty="0"/>
+                        <a:t>Invests $7 billion in expanding semiconductor plant in Chandler, Arizona.</a:t>
+                      </a:r>
+                    </a:p>
+                  </a:txBody>
+                  <a:tcPr/>
+                </a:tc>
+                <a:tc>
+                  <a:txBody>
+                    <a:bodyPr/>
+                    <a:lstStyle/>
+                    <a:p>
+                      <a:r>
+                        <a:rPr lang="en-US" sz="1600" dirty="0"/>
+                        <a:t>Borrows $600 million from Chandler Industrial Development Authority.</a:t>
+                      </a:r>
+                    </a:p>
+                  </a:txBody>
+                  <a:tcPr/>
+                </a:tc>
+                <a:extLst>
+                  <a:ext uri="{0D108BD9-81ED-4DB2-BD59-A6C34878D82A}">
+                    <a16:rowId xmlns:a16="http://schemas.microsoft.com/office/drawing/2014/main" val="3605431750"/>
+                  </a:ext>
+                </a:extLst>
+              </a:tr>
+              <a:tr h="755872">
+                <a:tc>
+                  <a:txBody>
+                    <a:bodyPr/>
+                    <a:lstStyle/>
+                    <a:p>
+                      <a:r>
+                        <a:rPr lang="en-US" sz="1600" dirty="0"/>
+                        <a:t>Amazon (US)</a:t>
+                      </a:r>
+                    </a:p>
+                  </a:txBody>
+                  <a:tcPr/>
+                </a:tc>
+                <a:tc>
+                  <a:txBody>
+                    <a:bodyPr/>
+                    <a:lstStyle/>
+                    <a:p>
+                      <a:r>
+                        <a:rPr lang="en-US" sz="1600" dirty="0"/>
+                        <a:t>Acquires self-driving start-up, </a:t>
+                      </a:r>
+                      <a:r>
+                        <a:rPr lang="en-US" sz="1600" dirty="0" err="1"/>
+                        <a:t>Zoox</a:t>
+                      </a:r>
+                      <a:r>
+                        <a:rPr lang="en-US" sz="1600" dirty="0"/>
+                        <a:t>, for over $1.2 billion</a:t>
+                      </a:r>
+                    </a:p>
+                  </a:txBody>
+                  <a:tcPr/>
+                </a:tc>
+                <a:tc>
+                  <a:txBody>
+                    <a:bodyPr/>
+                    <a:lstStyle/>
+                    <a:p>
+                      <a:r>
+                        <a:rPr lang="en-US" sz="1600" dirty="0"/>
+                        <a:t>Reinvests $33 billion that it generates from operations</a:t>
+                      </a:r>
+                    </a:p>
+                  </a:txBody>
+                  <a:tcPr/>
+                </a:tc>
+                <a:extLst>
+                  <a:ext uri="{0D108BD9-81ED-4DB2-BD59-A6C34878D82A}">
+                    <a16:rowId xmlns:a16="http://schemas.microsoft.com/office/drawing/2014/main" val="3916050718"/>
+                  </a:ext>
+                </a:extLst>
+              </a:tr>
+              <a:tr h="792444">
+                <a:tc>
+                  <a:txBody>
+                    <a:bodyPr/>
+                    <a:lstStyle/>
+                    <a:p>
+                      <a:r>
+                        <a:rPr lang="en-US" sz="1600" dirty="0"/>
+                        <a:t>Tesla (US)</a:t>
+                      </a:r>
+                    </a:p>
+                  </a:txBody>
+                  <a:tcPr/>
+                </a:tc>
+                <a:tc>
+                  <a:txBody>
+                    <a:bodyPr/>
+                    <a:lstStyle/>
+                    <a:p>
+                      <a:r>
+                        <a:rPr lang="en-US" sz="1600" dirty="0"/>
+                        <a:t>Announces construction of new plant to build the electric </a:t>
+                      </a:r>
+                      <a:r>
+                        <a:rPr lang="en-US" sz="1600" dirty="0" err="1"/>
+                        <a:t>Cybertruck</a:t>
+                      </a:r>
+                      <a:endParaRPr lang="en-US" sz="1600" dirty="0"/>
+                    </a:p>
+                  </a:txBody>
+                  <a:tcPr/>
+                </a:tc>
+                <a:tc>
+                  <a:txBody>
+                    <a:bodyPr/>
+                    <a:lstStyle/>
+                    <a:p>
+                      <a:r>
+                        <a:rPr lang="en-US" sz="1600" dirty="0"/>
+                        <a:t>Announces plans to sell $2 billion of shares</a:t>
+                      </a:r>
+                    </a:p>
+                  </a:txBody>
+                  <a:tcPr/>
+                </a:tc>
+                <a:extLst>
+                  <a:ext uri="{0D108BD9-81ED-4DB2-BD59-A6C34878D82A}">
+                    <a16:rowId xmlns:a16="http://schemas.microsoft.com/office/drawing/2014/main" val="2539725806"/>
+                  </a:ext>
+                </a:extLst>
+              </a:tr>
+              <a:tr h="755872">
+                <a:tc>
+                  <a:txBody>
+                    <a:bodyPr/>
+                    <a:lstStyle/>
+                    <a:p>
+                      <a:r>
+                        <a:rPr lang="en-US" sz="1600" dirty="0"/>
+                        <a:t>Shell (UK)</a:t>
+                      </a:r>
+                    </a:p>
+                  </a:txBody>
+                  <a:tcPr/>
+                </a:tc>
+                <a:tc>
+                  <a:txBody>
+                    <a:bodyPr/>
+                    <a:lstStyle/>
+                    <a:p>
+                      <a:r>
+                        <a:rPr lang="en-US" sz="1600" dirty="0"/>
+                        <a:t>Starts production at a deep water development in the Gulf of Mexico</a:t>
+                      </a:r>
+                    </a:p>
+                  </a:txBody>
+                  <a:tcPr/>
+                </a:tc>
+                <a:tc>
+                  <a:txBody>
+                    <a:bodyPr/>
+                    <a:lstStyle/>
+                    <a:p>
+                      <a:r>
+                        <a:rPr lang="en-US" sz="1600" dirty="0"/>
+                        <a:t>Cuts dividend to preserve cash</a:t>
+                      </a:r>
+                    </a:p>
+                  </a:txBody>
+                  <a:tcPr/>
+                </a:tc>
+                <a:extLst>
+                  <a:ext uri="{0D108BD9-81ED-4DB2-BD59-A6C34878D82A}">
+                    <a16:rowId xmlns:a16="http://schemas.microsoft.com/office/drawing/2014/main" val="2090028308"/>
+                  </a:ext>
+                </a:extLst>
+              </a:tr>
+              <a:tr h="792444">
+                <a:tc>
+                  <a:txBody>
+                    <a:bodyPr/>
+                    <a:lstStyle/>
+                    <a:p>
+                      <a:r>
+                        <a:rPr lang="en-US" sz="1600" dirty="0"/>
+                        <a:t>B</a:t>
+                      </a:r>
+                      <a:r>
+                        <a:rPr lang="en-US" sz="100" dirty="0"/>
+                        <a:t> </a:t>
+                      </a:r>
+                      <a:r>
+                        <a:rPr lang="en-US" sz="1600" dirty="0"/>
+                        <a:t>Y</a:t>
+                      </a:r>
+                      <a:r>
+                        <a:rPr lang="en-US" sz="100" dirty="0"/>
+                        <a:t> </a:t>
+                      </a:r>
+                      <a:r>
+                        <a:rPr lang="en-US" sz="1600" dirty="0"/>
+                        <a:t>D (China)</a:t>
+                      </a:r>
+                    </a:p>
+                  </a:txBody>
+                  <a:tcPr/>
+                </a:tc>
+                <a:tc>
+                  <a:txBody>
+                    <a:bodyPr/>
+                    <a:lstStyle/>
+                    <a:p>
+                      <a:r>
+                        <a:rPr lang="en-US" sz="1600" dirty="0"/>
+                        <a:t>Increases production capacity to meet fast-growing demand for its electric cars</a:t>
+                      </a:r>
+                    </a:p>
+                  </a:txBody>
+                  <a:tcPr/>
+                </a:tc>
+                <a:tc>
+                  <a:txBody>
+                    <a:bodyPr/>
+                    <a:lstStyle/>
+                    <a:p>
+                      <a:r>
+                        <a:rPr lang="en-US" sz="1600" dirty="0"/>
+                        <a:t>Reduces total debt from RMB 33.7 billion to RMB 18.5 billion</a:t>
+                      </a:r>
+                    </a:p>
+                  </a:txBody>
+                  <a:tcPr/>
+                </a:tc>
+                <a:extLst>
+                  <a:ext uri="{0D108BD9-81ED-4DB2-BD59-A6C34878D82A}">
+                    <a16:rowId xmlns:a16="http://schemas.microsoft.com/office/drawing/2014/main" val="10005"/>
+                  </a:ext>
+                </a:extLst>
+              </a:tr>
+            </a:tbl>
+          </a:graphicData>
+        </a:graphic>
+      </p:graphicFrame>
+    </p:spTree>
+    <p:extLst>
+      <p:ext uri="{BB962C8B-B14F-4D97-AF65-F5344CB8AC3E}">
+        <p14:creationId xmlns:p14="http://schemas.microsoft.com/office/powerpoint/2010/main" val="4123574077"/>
+      </p:ext>
+    </p:extLst>
+  </p:cSld>
+  <p:clrMapOvr>
+    <a:masterClrMapping/>
+  </p:clrMapOvr>
+</p:sld>
+</file>
+
+<file path=ppt/slides/slide12.xml><?xml version="1.0" encoding="utf-8"?>
+<p:sld xmlns:a="http://schemas.openxmlformats.org/drawingml/2006/main" xmlns:r="http://schemas.openxmlformats.org/officeDocument/2006/relationships" xmlns:p="http://schemas.openxmlformats.org/presentationml/2006/main">
+  <p:cSld>
+    <p:spTree>
+      <p:nvGrpSpPr>
+        <p:cNvPr id="1" name="">
+          <a:extLst>
+            <a:ext uri="{FF2B5EF4-FFF2-40B4-BE49-F238E27FC236}">
+              <a16:creationId xmlns:a16="http://schemas.microsoft.com/office/drawing/2014/main" id="{10F9DE5D-A6E2-E17F-25B5-BFA9D8E94729}"/>
+            </a:ext>
+          </a:extLst>
+        </p:cNvPr>
+        <p:cNvGrpSpPr/>
+        <p:nvPr/>
+      </p:nvGrpSpPr>
+      <p:grpSpPr>
+        <a:xfrm>
+          <a:off x="0" y="0"/>
+          <a:ext cx="0" cy="0"/>
+          <a:chOff x="0" y="0"/>
+          <a:chExt cx="0" cy="0"/>
+        </a:xfrm>
+      </p:grpSpPr>
+      <p:sp>
+        <p:nvSpPr>
+          <p:cNvPr id="2" name="Title 1">
+            <a:extLst>
+              <a:ext uri="{FF2B5EF4-FFF2-40B4-BE49-F238E27FC236}">
+                <a16:creationId xmlns:a16="http://schemas.microsoft.com/office/drawing/2014/main" id="{0FC63237-590D-D213-0A52-D887700E9C83}"/>
+              </a:ext>
+            </a:extLst>
+          </p:cNvPr>
+          <p:cNvSpPr>
+            <a:spLocks noGrp="1"/>
+          </p:cNvSpPr>
+          <p:nvPr>
+            <p:ph type="title"/>
+          </p:nvPr>
+        </p:nvSpPr>
+        <p:spPr>
+          <a:xfrm>
+            <a:off x="581192" y="702156"/>
+            <a:ext cx="11029616" cy="1013800"/>
+          </a:xfrm>
+        </p:spPr>
+        <p:txBody>
+          <a:bodyPr vert="horz" lIns="91440" tIns="45720" rIns="91440" bIns="45720" rtlCol="0" anchor="b">
+            <a:normAutofit/>
+          </a:bodyPr>
+          <a:lstStyle/>
+          <a:p>
+            <a:r>
+              <a:rPr lang="en-US" dirty="0">
+                <a:solidFill>
+                  <a:srgbClr val="FFFFFF"/>
+                </a:solidFill>
+              </a:rPr>
+              <a:t>Corporate Investment and Financing Decisions</a:t>
+            </a:r>
+            <a:endParaRPr lang="en-US" dirty="0"/>
+          </a:p>
+        </p:txBody>
+      </p:sp>
+      <p:sp>
+        <p:nvSpPr>
+          <p:cNvPr id="4" name="Slide Number Placeholder 3">
+            <a:extLst>
+              <a:ext uri="{FF2B5EF4-FFF2-40B4-BE49-F238E27FC236}">
+                <a16:creationId xmlns:a16="http://schemas.microsoft.com/office/drawing/2014/main" id="{62127590-A699-239F-80CB-4765DFB0EEBA}"/>
+              </a:ext>
+            </a:extLst>
+          </p:cNvPr>
+          <p:cNvSpPr>
+            <a:spLocks noGrp="1"/>
+          </p:cNvSpPr>
+          <p:nvPr>
+            <p:ph type="sldNum" sz="quarter" idx="12"/>
+          </p:nvPr>
+        </p:nvSpPr>
+        <p:spPr>
+          <a:xfrm>
+            <a:off x="10558300" y="6400800"/>
+            <a:ext cx="1052508" cy="365125"/>
+          </a:xfrm>
+        </p:spPr>
+        <p:txBody>
+          <a:bodyPr vert="horz" lIns="91440" tIns="45720" rIns="91440" bIns="45720" rtlCol="0" anchor="ctr">
+            <a:normAutofit/>
+          </a:bodyPr>
+          <a:lstStyle/>
+          <a:p>
+            <a:pPr>
+              <a:spcAft>
+                <a:spcPts val="600"/>
+              </a:spcAft>
+            </a:pPr>
+            <a:fld id="{7128DA7F-F6FE-453F-B8BB-1900E7257DA6}" type="slidenum">
+              <a:rPr lang="en-US" smtClean="0"/>
+              <a:pPr>
+                <a:spcAft>
+                  <a:spcPts val="600"/>
+                </a:spcAft>
+              </a:pPr>
+              <a:t>12</a:t>
+            </a:fld>
+            <a:endParaRPr lang="en-US" dirty="0"/>
+          </a:p>
+        </p:txBody>
+      </p:sp>
+      <p:pic>
+        <p:nvPicPr>
+          <p:cNvPr id="3" name="Picture 2" descr="A diagram of cash flow cycle. 1, firm raises funds, 2, invests in operations, 3, generates cash,4, reinvests/pays investors.">
+            <a:extLst>
+              <a:ext uri="{FF2B5EF4-FFF2-40B4-BE49-F238E27FC236}">
+                <a16:creationId xmlns:a16="http://schemas.microsoft.com/office/drawing/2014/main" id="{8FE77140-4D0E-7AB8-A63D-7F17662FF6BA}"/>
+              </a:ext>
+            </a:extLst>
+          </p:cNvPr>
+          <p:cNvPicPr>
+            <a:picLocks noChangeAspect="1"/>
+          </p:cNvPicPr>
+          <p:nvPr/>
+        </p:nvPicPr>
+        <p:blipFill>
+          <a:blip r:embed="rId3"/>
+          <a:stretch>
+            <a:fillRect/>
+          </a:stretch>
+        </p:blipFill>
+        <p:spPr>
+          <a:xfrm>
+            <a:off x="2836284" y="2036399"/>
+            <a:ext cx="6519429" cy="2363855"/>
+          </a:xfrm>
+          <a:prstGeom prst="rect">
+            <a:avLst/>
+          </a:prstGeom>
+        </p:spPr>
+      </p:pic>
+      <p:sp>
+        <p:nvSpPr>
+          <p:cNvPr id="7" name="Content Placeholder 2">
+            <a:extLst>
+              <a:ext uri="{FF2B5EF4-FFF2-40B4-BE49-F238E27FC236}">
+                <a16:creationId xmlns:a16="http://schemas.microsoft.com/office/drawing/2014/main" id="{CAF8365A-B86A-692F-8B00-E407180A8ED7}"/>
+              </a:ext>
+            </a:extLst>
+          </p:cNvPr>
+          <p:cNvSpPr>
+            <a:spLocks noGrp="1"/>
+          </p:cNvSpPr>
+          <p:nvPr>
+            <p:ph sz="half" idx="1"/>
+          </p:nvPr>
+        </p:nvSpPr>
+        <p:spPr>
+          <a:xfrm>
+            <a:off x="2114131" y="4564640"/>
+            <a:ext cx="7963734" cy="2136874"/>
+          </a:xfrm>
+        </p:spPr>
+        <p:txBody>
+          <a:bodyPr vert="horz" lIns="91440" tIns="45720" rIns="91440" bIns="45720" rtlCol="0" anchor="ctr">
+            <a:normAutofit/>
+          </a:bodyPr>
+          <a:lstStyle/>
+          <a:p>
+            <a:pPr marL="342900" indent="-342900">
+              <a:buFont typeface="+mj-lt"/>
+              <a:buAutoNum type="arabicPeriod"/>
+            </a:pPr>
+            <a:r>
+              <a:rPr lang="en-US" dirty="0"/>
+              <a:t>Cash raised by selling financial assets to investors.</a:t>
+            </a:r>
+          </a:p>
+          <a:p>
+            <a:pPr marL="342900" indent="-342900">
+              <a:buFont typeface="+mj-lt"/>
+              <a:buAutoNum type="arabicPeriod"/>
+            </a:pPr>
+            <a:r>
+              <a:rPr lang="en-US" dirty="0"/>
+              <a:t>Cash invested in the firm’s operations and used to purchase real assets.</a:t>
+            </a:r>
+          </a:p>
+          <a:p>
+            <a:pPr marL="342900" indent="-342900">
+              <a:buFont typeface="+mj-lt"/>
+              <a:buAutoNum type="arabicPeriod"/>
+            </a:pPr>
+            <a:r>
+              <a:rPr lang="en-US" dirty="0"/>
+              <a:t>Cash generated by the firm’s operations.</a:t>
+            </a:r>
+          </a:p>
+          <a:p>
+            <a:pPr marL="342900" indent="-342900">
+              <a:buFont typeface="+mj-lt"/>
+              <a:buAutoNum type="arabicPeriod"/>
+            </a:pPr>
+            <a:r>
+              <a:rPr lang="en-US" dirty="0"/>
+              <a:t>(a) Cash reinvested (b) Cash returned to investors.</a:t>
+            </a:r>
+          </a:p>
+          <a:p>
+            <a:pPr marL="0" indent="0">
+              <a:buNone/>
+            </a:pPr>
+            <a:r>
+              <a:rPr lang="en-US" dirty="0"/>
+              <a:t>Q: Who is the “financial manager” here?</a:t>
+            </a:r>
+          </a:p>
+        </p:txBody>
+      </p:sp>
+    </p:spTree>
+    <p:extLst>
+      <p:ext uri="{BB962C8B-B14F-4D97-AF65-F5344CB8AC3E}">
+        <p14:creationId xmlns:p14="http://schemas.microsoft.com/office/powerpoint/2010/main" val="93092744"/>
+      </p:ext>
+    </p:extLst>
+  </p:cSld>
+  <p:clrMapOvr>
+    <a:masterClrMapping/>
+  </p:clrMapOvr>
+</p:sld>
+</file>
+
+<file path=ppt/slides/slide13.xml><?xml version="1.0" encoding="utf-8"?>
+<p:sld xmlns:a="http://schemas.openxmlformats.org/drawingml/2006/main" xmlns:r="http://schemas.openxmlformats.org/officeDocument/2006/relationships" xmlns:p="http://schemas.openxmlformats.org/presentationml/2006/main">
+  <p:cSld>
+    <p:spTree>
+      <p:nvGrpSpPr>
+        <p:cNvPr id="1" name="">
+          <a:extLst>
+            <a:ext uri="{FF2B5EF4-FFF2-40B4-BE49-F238E27FC236}">
               <a16:creationId xmlns:a16="http://schemas.microsoft.com/office/drawing/2014/main" id="{01B1ED6C-FEA1-E89E-D80A-0AC6CA3F46A2}"/>
             </a:ext>
           </a:extLst>
@@ -13416,7 +14617,7 @@
                   <a:spcPts val="600"/>
                 </a:spcAft>
               </a:pPr>
-              <a:t>10</a:t>
+              <a:t>13</a:t>
             </a:fld>
             <a:endParaRPr lang="en-US" dirty="0"/>
           </a:p>
@@ -13500,7 +14701,7 @@
 </p:sld>
 </file>
 
-<file path=ppt/slides/slide11.xml><?xml version="1.0" encoding="utf-8"?>
+<file path=ppt/slides/slide14.xml><?xml version="1.0" encoding="utf-8"?>
 <p:sld xmlns:a="http://schemas.openxmlformats.org/drawingml/2006/main" xmlns:r="http://schemas.openxmlformats.org/officeDocument/2006/relationships" xmlns:p="http://schemas.openxmlformats.org/presentationml/2006/main">
   <p:cSld>
     <p:spTree>
@@ -13603,7 +14804,7 @@
                   <a:spcPts val="600"/>
                 </a:spcAft>
               </a:pPr>
-              <a:t>11</a:t>
+              <a:t>14</a:t>
             </a:fld>
             <a:endParaRPr lang="en-US" dirty="0"/>
           </a:p>
@@ -13735,7 +14936,7 @@
 </p:sld>
 </file>
 
-<file path=ppt/slides/slide12.xml><?xml version="1.0" encoding="utf-8"?>
+<file path=ppt/slides/slide15.xml><?xml version="1.0" encoding="utf-8"?>
 <p:sld xmlns:a="http://schemas.openxmlformats.org/drawingml/2006/main" xmlns:r="http://schemas.openxmlformats.org/officeDocument/2006/relationships" xmlns:p="http://schemas.openxmlformats.org/presentationml/2006/main">
   <p:cSld>
     <p:spTree>
@@ -13838,7 +15039,7 @@
                   <a:spcPts val="600"/>
                 </a:spcAft>
               </a:pPr>
-              <a:t>12</a:t>
+              <a:t>15</a:t>
             </a:fld>
             <a:endParaRPr lang="en-US" dirty="0"/>
           </a:p>
@@ -13927,7 +15128,7 @@
 </p:sld>
 </file>
 
-<file path=ppt/slides/slide13.xml><?xml version="1.0" encoding="utf-8"?>
+<file path=ppt/slides/slide16.xml><?xml version="1.0" encoding="utf-8"?>
 <p:sld xmlns:a="http://schemas.openxmlformats.org/drawingml/2006/main" xmlns:r="http://schemas.openxmlformats.org/officeDocument/2006/relationships" xmlns:p="http://schemas.openxmlformats.org/presentationml/2006/main">
   <p:cSld>
     <p:spTree>
@@ -14030,7 +15231,7 @@
                   <a:spcPts val="600"/>
                 </a:spcAft>
               </a:pPr>
-              <a:t>13</a:t>
+              <a:t>16</a:t>
             </a:fld>
             <a:endParaRPr lang="en-US" dirty="0"/>
           </a:p>
@@ -14117,7 +15318,7 @@
 </p:sld>
 </file>
 
-<file path=ppt/slides/slide14.xml><?xml version="1.0" encoding="utf-8"?>
+<file path=ppt/slides/slide17.xml><?xml version="1.0" encoding="utf-8"?>
 <p:sld xmlns:a="http://schemas.openxmlformats.org/drawingml/2006/main" xmlns:r="http://schemas.openxmlformats.org/officeDocument/2006/relationships" xmlns:p="http://schemas.openxmlformats.org/presentationml/2006/main">
   <p:cSld>
     <p:spTree>
@@ -14220,7 +15421,7 @@
                   <a:spcPts val="600"/>
                 </a:spcAft>
               </a:pPr>
-              <a:t>14</a:t>
+              <a:t>17</a:t>
             </a:fld>
             <a:endParaRPr lang="en-US" dirty="0"/>
           </a:p>
@@ -14330,7 +15531,7 @@
 </p:sld>
 </file>
 
-<file path=ppt/slides/slide15.xml><?xml version="1.0" encoding="utf-8"?>
+<file path=ppt/slides/slide18.xml><?xml version="1.0" encoding="utf-8"?>
 <p:sld xmlns:a="http://schemas.openxmlformats.org/drawingml/2006/main" xmlns:r="http://schemas.openxmlformats.org/officeDocument/2006/relationships" xmlns:p="http://schemas.openxmlformats.org/presentationml/2006/main">
   <p:cSld>
     <p:spTree>
@@ -14433,7 +15634,7 @@
                   <a:spcPts val="600"/>
                 </a:spcAft>
               </a:pPr>
-              <a:t>15</a:t>
+              <a:t>18</a:t>
             </a:fld>
             <a:endParaRPr lang="en-US" dirty="0"/>
           </a:p>
@@ -14550,7 +15751,7 @@
 </p:sld>
 </file>
 
-<file path=ppt/slides/slide16.xml><?xml version="1.0" encoding="utf-8"?>
+<file path=ppt/slides/slide19.xml><?xml version="1.0" encoding="utf-8"?>
 <p:sld xmlns:a="http://schemas.openxmlformats.org/drawingml/2006/main" xmlns:r="http://schemas.openxmlformats.org/officeDocument/2006/relationships" xmlns:p="http://schemas.openxmlformats.org/presentationml/2006/main">
   <p:cSld>
     <p:spTree>
@@ -14653,7 +15854,7 @@
                   <a:spcPts val="600"/>
                 </a:spcAft>
               </a:pPr>
-              <a:t>16</a:t>
+              <a:t>19</a:t>
             </a:fld>
             <a:endParaRPr lang="en-US" dirty="0"/>
           </a:p>
@@ -15231,7 +16432,293 @@
 </p:sld>
 </file>
 
-<file path=ppt/slides/slide17.xml><?xml version="1.0" encoding="utf-8"?>
+<file path=ppt/slides/slide2.xml><?xml version="1.0" encoding="utf-8"?>
+<p:sld xmlns:a="http://schemas.openxmlformats.org/drawingml/2006/main" xmlns:r="http://schemas.openxmlformats.org/officeDocument/2006/relationships" xmlns:p="http://schemas.openxmlformats.org/presentationml/2006/main">
+  <p:cSld>
+    <p:bg>
+      <p:bgPr>
+        <a:solidFill>
+          <a:schemeClr val="bg1"/>
+        </a:solidFill>
+        <a:effectLst/>
+      </p:bgPr>
+    </p:bg>
+    <p:spTree>
+      <p:nvGrpSpPr>
+        <p:cNvPr id="1" name=""/>
+        <p:cNvGrpSpPr/>
+        <p:nvPr/>
+      </p:nvGrpSpPr>
+      <p:grpSpPr>
+        <a:xfrm>
+          <a:off x="0" y="0"/>
+          <a:ext cx="0" cy="0"/>
+          <a:chOff x="0" y="0"/>
+          <a:chExt cx="0" cy="0"/>
+        </a:xfrm>
+      </p:grpSpPr>
+      <p:sp>
+        <p:nvSpPr>
+          <p:cNvPr id="2" name="Title 1">
+            <a:extLst>
+              <a:ext uri="{FF2B5EF4-FFF2-40B4-BE49-F238E27FC236}">
+                <a16:creationId xmlns:a16="http://schemas.microsoft.com/office/drawing/2014/main" id="{16B4A4C4-A6F4-421D-AD5A-6F0EFEBB9C72}"/>
+              </a:ext>
+            </a:extLst>
+          </p:cNvPr>
+          <p:cNvSpPr>
+            <a:spLocks noGrp="1"/>
+          </p:cNvSpPr>
+          <p:nvPr>
+            <p:ph type="title"/>
+          </p:nvPr>
+        </p:nvSpPr>
+        <p:spPr>
+          <a:xfrm>
+            <a:off x="581192" y="702156"/>
+            <a:ext cx="11029616" cy="1013800"/>
+          </a:xfrm>
+        </p:spPr>
+        <p:txBody>
+          <a:bodyPr>
+            <a:normAutofit/>
+          </a:bodyPr>
+          <a:lstStyle/>
+          <a:p>
+            <a:r>
+              <a:rPr lang="en-US" dirty="0">
+                <a:solidFill>
+                  <a:srgbClr val="FFFFFF"/>
+                </a:solidFill>
+              </a:rPr>
+              <a:t>Introduction and present values</a:t>
+            </a:r>
+          </a:p>
+        </p:txBody>
+      </p:sp>
+      <p:sp>
+        <p:nvSpPr>
+          <p:cNvPr id="11" name="Rectangle 10">
+            <a:extLst>
+              <a:ext uri="{FF2B5EF4-FFF2-40B4-BE49-F238E27FC236}">
+                <a16:creationId xmlns:a16="http://schemas.microsoft.com/office/drawing/2014/main" id="{5F9644DA-21E4-4D4B-B872-F14551490E4B}"/>
+              </a:ext>
+              <a:ext uri="{C183D7F6-B498-43B3-948B-1728B52AA6E4}">
+                <adec:decorative xmlns:adec="http://schemas.microsoft.com/office/drawing/2017/decorative" val="1"/>
+              </a:ext>
+            </a:extLst>
+          </p:cNvPr>
+          <p:cNvSpPr>
+            <a:spLocks noGrp="1" noRot="1" noChangeAspect="1" noMove="1" noResize="1" noEditPoints="1" noAdjustHandles="1" noChangeArrowheads="1" noChangeShapeType="1" noTextEdit="1"/>
+          </p:cNvSpPr>
+          <p:nvPr>
+            <p:extLst>
+              <p:ext uri="{386F3935-93C4-4BCD-93E2-E3B085C9AB24}">
+                <p16:designElem xmlns:p16="http://schemas.microsoft.com/office/powerpoint/2015/main" val="1"/>
+              </p:ext>
+            </p:extLst>
+          </p:nvPr>
+        </p:nvSpPr>
+        <p:spPr>
+          <a:xfrm>
+            <a:off x="446534" y="2180496"/>
+            <a:ext cx="3703320" cy="4045683"/>
+          </a:xfrm>
+          <a:prstGeom prst="rect">
+            <a:avLst/>
+          </a:prstGeom>
+          <a:solidFill>
+            <a:srgbClr val="FFFFFF"/>
+          </a:solidFill>
+          <a:ln w="38100">
+            <a:solidFill>
+              <a:schemeClr val="accent1"/>
+            </a:solidFill>
+          </a:ln>
+        </p:spPr>
+        <p:style>
+          <a:lnRef idx="2">
+            <a:schemeClr val="accent1">
+              <a:shade val="50000"/>
+            </a:schemeClr>
+          </a:lnRef>
+          <a:fillRef idx="1">
+            <a:schemeClr val="accent1"/>
+          </a:fillRef>
+          <a:effectRef idx="0">
+            <a:schemeClr val="accent1"/>
+          </a:effectRef>
+          <a:fontRef idx="minor">
+            <a:schemeClr val="lt1"/>
+          </a:fontRef>
+        </p:style>
+        <p:txBody>
+          <a:bodyPr rtlCol="0" anchor="ctr"/>
+          <a:lstStyle/>
+          <a:p>
+            <a:pPr algn="ctr"/>
+            <a:endParaRPr lang="en-US" dirty="0"/>
+          </a:p>
+        </p:txBody>
+      </p:sp>
+      <p:pic>
+        <p:nvPicPr>
+          <p:cNvPr id="6" name="Picture 5" descr="A picture containing drawing&#10;&#10;Description automatically generated">
+            <a:extLst>
+              <a:ext uri="{FF2B5EF4-FFF2-40B4-BE49-F238E27FC236}">
+                <a16:creationId xmlns:a16="http://schemas.microsoft.com/office/drawing/2014/main" id="{4BAA0921-244A-4243-B5C8-9DC525FF1CA0}"/>
+              </a:ext>
+            </a:extLst>
+          </p:cNvPr>
+          <p:cNvPicPr>
+            <a:picLocks noChangeAspect="1"/>
+          </p:cNvPicPr>
+          <p:nvPr/>
+        </p:nvPicPr>
+        <p:blipFill rotWithShape="1">
+          <a:blip r:embed="rId3">
+            <a:extLst>
+              <a:ext uri="{28A0092B-C50C-407E-A947-70E740481C1C}">
+                <a14:useLocalDpi xmlns:a14="http://schemas.microsoft.com/office/drawing/2010/main" val="0"/>
+              </a:ext>
+            </a:extLst>
+          </a:blip>
+          <a:srcRect l="19870" r="44807" b="-2"/>
+          <a:stretch/>
+        </p:blipFill>
+        <p:spPr>
+          <a:xfrm>
+            <a:off x="657225" y="2361056"/>
+            <a:ext cx="3305175" cy="3649219"/>
+          </a:xfrm>
+          <a:prstGeom prst="rect">
+            <a:avLst/>
+          </a:prstGeom>
+        </p:spPr>
+      </p:pic>
+      <p:sp>
+        <p:nvSpPr>
+          <p:cNvPr id="3" name="Content Placeholder 2">
+            <a:extLst>
+              <a:ext uri="{FF2B5EF4-FFF2-40B4-BE49-F238E27FC236}">
+                <a16:creationId xmlns:a16="http://schemas.microsoft.com/office/drawing/2014/main" id="{D3D1AD1C-49A8-41B1-9189-3179F1DD1BE4}"/>
+              </a:ext>
+            </a:extLst>
+          </p:cNvPr>
+          <p:cNvSpPr>
+            <a:spLocks noGrp="1"/>
+          </p:cNvSpPr>
+          <p:nvPr>
+            <p:ph idx="1"/>
+          </p:nvPr>
+        </p:nvSpPr>
+        <p:spPr>
+          <a:xfrm>
+            <a:off x="4505325" y="2180496"/>
+            <a:ext cx="7105481" cy="4045683"/>
+          </a:xfrm>
+        </p:spPr>
+        <p:txBody>
+          <a:bodyPr>
+            <a:noAutofit/>
+          </a:bodyPr>
+          <a:lstStyle/>
+          <a:p>
+            <a:pPr marL="0" indent="0">
+              <a:lnSpc>
+                <a:spcPct val="90000"/>
+              </a:lnSpc>
+              <a:buNone/>
+            </a:pPr>
+            <a:r>
+              <a:rPr lang="en-US" sz="2000" dirty="0"/>
+              <a:t>Introduction to Corporate Finance</a:t>
+            </a:r>
+          </a:p>
+          <a:p>
+            <a:pPr>
+              <a:lnSpc>
+                <a:spcPct val="90000"/>
+              </a:lnSpc>
+            </a:pPr>
+            <a:r>
+              <a:rPr lang="en-US" sz="2000" dirty="0"/>
+              <a:t>Corporate Investment and Financing Decisions.</a:t>
+            </a:r>
+          </a:p>
+          <a:p>
+            <a:pPr>
+              <a:lnSpc>
+                <a:spcPct val="90000"/>
+              </a:lnSpc>
+            </a:pPr>
+            <a:r>
+              <a:rPr lang="en-US" sz="2000" dirty="0"/>
+              <a:t>The Financial Goal of the Corporation.</a:t>
+            </a:r>
+          </a:p>
+        </p:txBody>
+      </p:sp>
+      <p:sp>
+        <p:nvSpPr>
+          <p:cNvPr id="4" name="Slide Number Placeholder 3">
+            <a:extLst>
+              <a:ext uri="{FF2B5EF4-FFF2-40B4-BE49-F238E27FC236}">
+                <a16:creationId xmlns:a16="http://schemas.microsoft.com/office/drawing/2014/main" id="{0B5E5A25-AC98-493D-AB03-76077FCE0C45}"/>
+              </a:ext>
+            </a:extLst>
+          </p:cNvPr>
+          <p:cNvSpPr>
+            <a:spLocks noGrp="1"/>
+          </p:cNvSpPr>
+          <p:nvPr>
+            <p:ph type="sldNum" sz="quarter" idx="12"/>
+          </p:nvPr>
+        </p:nvSpPr>
+        <p:spPr>
+          <a:xfrm>
+            <a:off x="10558300" y="6400800"/>
+            <a:ext cx="1052508" cy="365125"/>
+          </a:xfrm>
+        </p:spPr>
+        <p:txBody>
+          <a:bodyPr>
+            <a:normAutofit/>
+          </a:bodyPr>
+          <a:lstStyle/>
+          <a:p>
+            <a:pPr>
+              <a:spcAft>
+                <a:spcPts val="600"/>
+              </a:spcAft>
+            </a:pPr>
+            <a:fld id="{7128DA7F-F6FE-453F-B8BB-1900E7257DA6}" type="slidenum">
+              <a:rPr lang="en-US" smtClean="0"/>
+              <a:pPr>
+                <a:spcAft>
+                  <a:spcPts val="600"/>
+                </a:spcAft>
+              </a:pPr>
+              <a:t>2</a:t>
+            </a:fld>
+            <a:endParaRPr lang="en-US" dirty="0"/>
+          </a:p>
+        </p:txBody>
+      </p:sp>
+    </p:spTree>
+    <p:extLst>
+      <p:ext uri="{BB962C8B-B14F-4D97-AF65-F5344CB8AC3E}">
+        <p14:creationId xmlns:p14="http://schemas.microsoft.com/office/powerpoint/2010/main" val="2036483810"/>
+      </p:ext>
+    </p:extLst>
+  </p:cSld>
+  <p:clrMapOvr>
+    <a:masterClrMapping/>
+  </p:clrMapOvr>
+</p:sld>
+</file>
+
+<file path=ppt/slides/slide20.xml><?xml version="1.0" encoding="utf-8"?>
 <p:sld xmlns:a="http://schemas.openxmlformats.org/drawingml/2006/main" xmlns:r="http://schemas.openxmlformats.org/officeDocument/2006/relationships" xmlns:p="http://schemas.openxmlformats.org/presentationml/2006/main">
   <p:cSld>
     <p:spTree>
@@ -15334,7 +16821,7 @@
                   <a:spcPts val="600"/>
                 </a:spcAft>
               </a:pPr>
-              <a:t>17</a:t>
+              <a:t>20</a:t>
             </a:fld>
             <a:endParaRPr lang="en-US" dirty="0"/>
           </a:p>
@@ -15383,7 +16870,7 @@
 </p:sld>
 </file>
 
-<file path=ppt/slides/slide18.xml><?xml version="1.0" encoding="utf-8"?>
+<file path=ppt/slides/slide21.xml><?xml version="1.0" encoding="utf-8"?>
 <p:sld xmlns:a="http://schemas.openxmlformats.org/drawingml/2006/main" xmlns:r="http://schemas.openxmlformats.org/officeDocument/2006/relationships" xmlns:p="http://schemas.openxmlformats.org/presentationml/2006/main">
   <p:cSld>
     <p:spTree>
@@ -15486,7 +16973,7 @@
                   <a:spcPts val="600"/>
                 </a:spcAft>
               </a:pPr>
-              <a:t>18</a:t>
+              <a:t>21</a:t>
             </a:fld>
             <a:endParaRPr lang="en-US" dirty="0"/>
           </a:p>
@@ -15996,7 +17483,7 @@
 </p:sld>
 </file>
 
-<file path=ppt/slides/slide19.xml><?xml version="1.0" encoding="utf-8"?>
+<file path=ppt/slides/slide22.xml><?xml version="1.0" encoding="utf-8"?>
 <p:sld xmlns:a="http://schemas.openxmlformats.org/drawingml/2006/main" xmlns:r="http://schemas.openxmlformats.org/officeDocument/2006/relationships" xmlns:p="http://schemas.openxmlformats.org/presentationml/2006/main">
   <p:cSld>
     <p:spTree>
@@ -16099,7 +17586,7 @@
                   <a:spcPts val="600"/>
                 </a:spcAft>
               </a:pPr>
-              <a:t>19</a:t>
+              <a:t>22</a:t>
             </a:fld>
             <a:endParaRPr lang="en-US" dirty="0"/>
           </a:p>
@@ -16291,293 +17778,7 @@
 </p:sld>
 </file>
 
-<file path=ppt/slides/slide2.xml><?xml version="1.0" encoding="utf-8"?>
-<p:sld xmlns:a="http://schemas.openxmlformats.org/drawingml/2006/main" xmlns:r="http://schemas.openxmlformats.org/officeDocument/2006/relationships" xmlns:p="http://schemas.openxmlformats.org/presentationml/2006/main">
-  <p:cSld>
-    <p:bg>
-      <p:bgPr>
-        <a:solidFill>
-          <a:schemeClr val="bg1"/>
-        </a:solidFill>
-        <a:effectLst/>
-      </p:bgPr>
-    </p:bg>
-    <p:spTree>
-      <p:nvGrpSpPr>
-        <p:cNvPr id="1" name=""/>
-        <p:cNvGrpSpPr/>
-        <p:nvPr/>
-      </p:nvGrpSpPr>
-      <p:grpSpPr>
-        <a:xfrm>
-          <a:off x="0" y="0"/>
-          <a:ext cx="0" cy="0"/>
-          <a:chOff x="0" y="0"/>
-          <a:chExt cx="0" cy="0"/>
-        </a:xfrm>
-      </p:grpSpPr>
-      <p:sp>
-        <p:nvSpPr>
-          <p:cNvPr id="2" name="Title 1">
-            <a:extLst>
-              <a:ext uri="{FF2B5EF4-FFF2-40B4-BE49-F238E27FC236}">
-                <a16:creationId xmlns:a16="http://schemas.microsoft.com/office/drawing/2014/main" id="{16B4A4C4-A6F4-421D-AD5A-6F0EFEBB9C72}"/>
-              </a:ext>
-            </a:extLst>
-          </p:cNvPr>
-          <p:cNvSpPr>
-            <a:spLocks noGrp="1"/>
-          </p:cNvSpPr>
-          <p:nvPr>
-            <p:ph type="title"/>
-          </p:nvPr>
-        </p:nvSpPr>
-        <p:spPr>
-          <a:xfrm>
-            <a:off x="581192" y="702156"/>
-            <a:ext cx="11029616" cy="1013800"/>
-          </a:xfrm>
-        </p:spPr>
-        <p:txBody>
-          <a:bodyPr>
-            <a:normAutofit/>
-          </a:bodyPr>
-          <a:lstStyle/>
-          <a:p>
-            <a:r>
-              <a:rPr lang="en-US" dirty="0">
-                <a:solidFill>
-                  <a:srgbClr val="FFFFFF"/>
-                </a:solidFill>
-              </a:rPr>
-              <a:t>Introduction and present values</a:t>
-            </a:r>
-          </a:p>
-        </p:txBody>
-      </p:sp>
-      <p:sp>
-        <p:nvSpPr>
-          <p:cNvPr id="11" name="Rectangle 10">
-            <a:extLst>
-              <a:ext uri="{FF2B5EF4-FFF2-40B4-BE49-F238E27FC236}">
-                <a16:creationId xmlns:a16="http://schemas.microsoft.com/office/drawing/2014/main" id="{5F9644DA-21E4-4D4B-B872-F14551490E4B}"/>
-              </a:ext>
-              <a:ext uri="{C183D7F6-B498-43B3-948B-1728B52AA6E4}">
-                <adec:decorative xmlns:adec="http://schemas.microsoft.com/office/drawing/2017/decorative" val="1"/>
-              </a:ext>
-            </a:extLst>
-          </p:cNvPr>
-          <p:cNvSpPr>
-            <a:spLocks noGrp="1" noRot="1" noChangeAspect="1" noMove="1" noResize="1" noEditPoints="1" noAdjustHandles="1" noChangeArrowheads="1" noChangeShapeType="1" noTextEdit="1"/>
-          </p:cNvSpPr>
-          <p:nvPr>
-            <p:extLst>
-              <p:ext uri="{386F3935-93C4-4BCD-93E2-E3B085C9AB24}">
-                <p16:designElem xmlns:p16="http://schemas.microsoft.com/office/powerpoint/2015/main" val="1"/>
-              </p:ext>
-            </p:extLst>
-          </p:nvPr>
-        </p:nvSpPr>
-        <p:spPr>
-          <a:xfrm>
-            <a:off x="446534" y="2180496"/>
-            <a:ext cx="3703320" cy="4045683"/>
-          </a:xfrm>
-          <a:prstGeom prst="rect">
-            <a:avLst/>
-          </a:prstGeom>
-          <a:solidFill>
-            <a:srgbClr val="FFFFFF"/>
-          </a:solidFill>
-          <a:ln w="38100">
-            <a:solidFill>
-              <a:schemeClr val="accent1"/>
-            </a:solidFill>
-          </a:ln>
-        </p:spPr>
-        <p:style>
-          <a:lnRef idx="2">
-            <a:schemeClr val="accent1">
-              <a:shade val="50000"/>
-            </a:schemeClr>
-          </a:lnRef>
-          <a:fillRef idx="1">
-            <a:schemeClr val="accent1"/>
-          </a:fillRef>
-          <a:effectRef idx="0">
-            <a:schemeClr val="accent1"/>
-          </a:effectRef>
-          <a:fontRef idx="minor">
-            <a:schemeClr val="lt1"/>
-          </a:fontRef>
-        </p:style>
-        <p:txBody>
-          <a:bodyPr rtlCol="0" anchor="ctr"/>
-          <a:lstStyle/>
-          <a:p>
-            <a:pPr algn="ctr"/>
-            <a:endParaRPr lang="en-US" dirty="0"/>
-          </a:p>
-        </p:txBody>
-      </p:sp>
-      <p:pic>
-        <p:nvPicPr>
-          <p:cNvPr id="6" name="Picture 5" descr="A picture containing drawing&#10;&#10;Description automatically generated">
-            <a:extLst>
-              <a:ext uri="{FF2B5EF4-FFF2-40B4-BE49-F238E27FC236}">
-                <a16:creationId xmlns:a16="http://schemas.microsoft.com/office/drawing/2014/main" id="{4BAA0921-244A-4243-B5C8-9DC525FF1CA0}"/>
-              </a:ext>
-            </a:extLst>
-          </p:cNvPr>
-          <p:cNvPicPr>
-            <a:picLocks noChangeAspect="1"/>
-          </p:cNvPicPr>
-          <p:nvPr/>
-        </p:nvPicPr>
-        <p:blipFill rotWithShape="1">
-          <a:blip r:embed="rId3">
-            <a:extLst>
-              <a:ext uri="{28A0092B-C50C-407E-A947-70E740481C1C}">
-                <a14:useLocalDpi xmlns:a14="http://schemas.microsoft.com/office/drawing/2010/main" val="0"/>
-              </a:ext>
-            </a:extLst>
-          </a:blip>
-          <a:srcRect l="19870" r="44807" b="-2"/>
-          <a:stretch/>
-        </p:blipFill>
-        <p:spPr>
-          <a:xfrm>
-            <a:off x="657225" y="2361056"/>
-            <a:ext cx="3305175" cy="3649219"/>
-          </a:xfrm>
-          <a:prstGeom prst="rect">
-            <a:avLst/>
-          </a:prstGeom>
-        </p:spPr>
-      </p:pic>
-      <p:sp>
-        <p:nvSpPr>
-          <p:cNvPr id="3" name="Content Placeholder 2">
-            <a:extLst>
-              <a:ext uri="{FF2B5EF4-FFF2-40B4-BE49-F238E27FC236}">
-                <a16:creationId xmlns:a16="http://schemas.microsoft.com/office/drawing/2014/main" id="{D3D1AD1C-49A8-41B1-9189-3179F1DD1BE4}"/>
-              </a:ext>
-            </a:extLst>
-          </p:cNvPr>
-          <p:cNvSpPr>
-            <a:spLocks noGrp="1"/>
-          </p:cNvSpPr>
-          <p:nvPr>
-            <p:ph idx="1"/>
-          </p:nvPr>
-        </p:nvSpPr>
-        <p:spPr>
-          <a:xfrm>
-            <a:off x="4505325" y="2180496"/>
-            <a:ext cx="7105481" cy="4045683"/>
-          </a:xfrm>
-        </p:spPr>
-        <p:txBody>
-          <a:bodyPr>
-            <a:noAutofit/>
-          </a:bodyPr>
-          <a:lstStyle/>
-          <a:p>
-            <a:pPr marL="0" indent="0">
-              <a:lnSpc>
-                <a:spcPct val="90000"/>
-              </a:lnSpc>
-              <a:buNone/>
-            </a:pPr>
-            <a:r>
-              <a:rPr lang="en-US" sz="2000" dirty="0"/>
-              <a:t>Introduction to Corporate Finance</a:t>
-            </a:r>
-          </a:p>
-          <a:p>
-            <a:pPr>
-              <a:lnSpc>
-                <a:spcPct val="90000"/>
-              </a:lnSpc>
-            </a:pPr>
-            <a:r>
-              <a:rPr lang="en-US" sz="2000" dirty="0"/>
-              <a:t>Corporate Investment and Financing Decisions.</a:t>
-            </a:r>
-          </a:p>
-          <a:p>
-            <a:pPr>
-              <a:lnSpc>
-                <a:spcPct val="90000"/>
-              </a:lnSpc>
-            </a:pPr>
-            <a:r>
-              <a:rPr lang="en-US" sz="2000" dirty="0"/>
-              <a:t>The Financial Goal of the Corporation.</a:t>
-            </a:r>
-          </a:p>
-        </p:txBody>
-      </p:sp>
-      <p:sp>
-        <p:nvSpPr>
-          <p:cNvPr id="4" name="Slide Number Placeholder 3">
-            <a:extLst>
-              <a:ext uri="{FF2B5EF4-FFF2-40B4-BE49-F238E27FC236}">
-                <a16:creationId xmlns:a16="http://schemas.microsoft.com/office/drawing/2014/main" id="{0B5E5A25-AC98-493D-AB03-76077FCE0C45}"/>
-              </a:ext>
-            </a:extLst>
-          </p:cNvPr>
-          <p:cNvSpPr>
-            <a:spLocks noGrp="1"/>
-          </p:cNvSpPr>
-          <p:nvPr>
-            <p:ph type="sldNum" sz="quarter" idx="12"/>
-          </p:nvPr>
-        </p:nvSpPr>
-        <p:spPr>
-          <a:xfrm>
-            <a:off x="10558300" y="6400800"/>
-            <a:ext cx="1052508" cy="365125"/>
-          </a:xfrm>
-        </p:spPr>
-        <p:txBody>
-          <a:bodyPr>
-            <a:normAutofit/>
-          </a:bodyPr>
-          <a:lstStyle/>
-          <a:p>
-            <a:pPr>
-              <a:spcAft>
-                <a:spcPts val="600"/>
-              </a:spcAft>
-            </a:pPr>
-            <a:fld id="{7128DA7F-F6FE-453F-B8BB-1900E7257DA6}" type="slidenum">
-              <a:rPr lang="en-US" smtClean="0"/>
-              <a:pPr>
-                <a:spcAft>
-                  <a:spcPts val="600"/>
-                </a:spcAft>
-              </a:pPr>
-              <a:t>2</a:t>
-            </a:fld>
-            <a:endParaRPr lang="en-US" dirty="0"/>
-          </a:p>
-        </p:txBody>
-      </p:sp>
-    </p:spTree>
-    <p:extLst>
-      <p:ext uri="{BB962C8B-B14F-4D97-AF65-F5344CB8AC3E}">
-        <p14:creationId xmlns:p14="http://schemas.microsoft.com/office/powerpoint/2010/main" val="2036483810"/>
-      </p:ext>
-    </p:extLst>
-  </p:cSld>
-  <p:clrMapOvr>
-    <a:masterClrMapping/>
-  </p:clrMapOvr>
-</p:sld>
-</file>
-
-<file path=ppt/slides/slide20.xml><?xml version="1.0" encoding="utf-8"?>
+<file path=ppt/slides/slide23.xml><?xml version="1.0" encoding="utf-8"?>
 <p:sld xmlns:a="http://schemas.openxmlformats.org/drawingml/2006/main" xmlns:r="http://schemas.openxmlformats.org/officeDocument/2006/relationships" xmlns:p="http://schemas.openxmlformats.org/presentationml/2006/main">
   <p:cSld>
     <p:spTree>
@@ -16680,7 +17881,7 @@
                   <a:spcPts val="600"/>
                 </a:spcAft>
               </a:pPr>
-              <a:t>20</a:t>
+              <a:t>23</a:t>
             </a:fld>
             <a:endParaRPr lang="en-US" dirty="0"/>
           </a:p>
@@ -16729,7 +17930,7 @@
 </p:sld>
 </file>
 
-<file path=ppt/slides/slide21.xml><?xml version="1.0" encoding="utf-8"?>
+<file path=ppt/slides/slide24.xml><?xml version="1.0" encoding="utf-8"?>
 <p:sld xmlns:a="http://schemas.openxmlformats.org/drawingml/2006/main" xmlns:r="http://schemas.openxmlformats.org/officeDocument/2006/relationships" xmlns:p="http://schemas.openxmlformats.org/presentationml/2006/main">
   <p:cSld>
     <p:spTree>
@@ -16832,7 +18033,7 @@
                   <a:spcPts val="600"/>
                 </a:spcAft>
               </a:pPr>
-              <a:t>21</a:t>
+              <a:t>24</a:t>
             </a:fld>
             <a:endParaRPr lang="en-US" dirty="0"/>
           </a:p>
@@ -17534,7 +18735,7 @@
 </p:sld>
 </file>
 
-<file path=ppt/slides/slide22.xml><?xml version="1.0" encoding="utf-8"?>
+<file path=ppt/slides/slide25.xml><?xml version="1.0" encoding="utf-8"?>
 <p:sld xmlns:a="http://schemas.openxmlformats.org/drawingml/2006/main" xmlns:r="http://schemas.openxmlformats.org/officeDocument/2006/relationships" xmlns:p="http://schemas.openxmlformats.org/presentationml/2006/main">
   <p:cSld>
     <p:spTree>
@@ -17637,7 +18838,7 @@
                   <a:spcPts val="600"/>
                 </a:spcAft>
               </a:pPr>
-              <a:t>22</a:t>
+              <a:t>25</a:t>
             </a:fld>
             <a:endParaRPr lang="en-US" dirty="0"/>
           </a:p>
@@ -18141,7 +19342,7 @@
 </p:sld>
 </file>
 
-<file path=ppt/slides/slide23.xml><?xml version="1.0" encoding="utf-8"?>
+<file path=ppt/slides/slide26.xml><?xml version="1.0" encoding="utf-8"?>
 <p:sld xmlns:a="http://schemas.openxmlformats.org/drawingml/2006/main" xmlns:r="http://schemas.openxmlformats.org/officeDocument/2006/relationships" xmlns:p="http://schemas.openxmlformats.org/presentationml/2006/main">
   <p:cSld>
     <p:spTree>
@@ -18244,7 +19445,7 @@
                   <a:spcPts val="600"/>
                 </a:spcAft>
               </a:pPr>
-              <a:t>23</a:t>
+              <a:t>26</a:t>
             </a:fld>
             <a:endParaRPr lang="en-US" dirty="0"/>
           </a:p>
@@ -18289,7 +19490,7 @@
                     <m:sSub>
                       <m:sSubPr>
                         <m:ctrlPr>
-                          <a:rPr lang="en-US" sz="2200" i="1" dirty="0" smtClean="0">
+                          <a:rPr lang="en-US" sz="2200" b="0" i="1" dirty="0" smtClean="0">
                             <a:latin typeface="Cambria Math" panose="02040503050406030204" pitchFamily="18" charset="0"/>
                           </a:rPr>
                         </m:ctrlPr>
@@ -18549,7 +19750,7 @@
 </p:sld>
 </file>
 
-<file path=ppt/slides/slide24.xml><?xml version="1.0" encoding="utf-8"?>
+<file path=ppt/slides/slide27.xml><?xml version="1.0" encoding="utf-8"?>
 <p:sld xmlns:a="http://schemas.openxmlformats.org/drawingml/2006/main" xmlns:r="http://schemas.openxmlformats.org/officeDocument/2006/relationships" xmlns:p="http://schemas.openxmlformats.org/presentationml/2006/main">
   <p:cSld>
     <p:spTree>
@@ -18652,7 +19853,7 @@
                   <a:spcPts val="600"/>
                 </a:spcAft>
               </a:pPr>
-              <a:t>24</a:t>
+              <a:t>27</a:t>
             </a:fld>
             <a:endParaRPr lang="en-US" dirty="0"/>
           </a:p>
@@ -18701,7 +19902,7 @@
 </p:sld>
 </file>
 
-<file path=ppt/slides/slide25.xml><?xml version="1.0" encoding="utf-8"?>
+<file path=ppt/slides/slide28.xml><?xml version="1.0" encoding="utf-8"?>
 <p:sld xmlns:a="http://schemas.openxmlformats.org/drawingml/2006/main" xmlns:r="http://schemas.openxmlformats.org/officeDocument/2006/relationships" xmlns:p="http://schemas.openxmlformats.org/presentationml/2006/main">
   <p:cSld>
     <p:spTree>
@@ -18804,7 +20005,7 @@
                   <a:spcPts val="600"/>
                 </a:spcAft>
               </a:pPr>
-              <a:t>25</a:t>
+              <a:t>28</a:t>
             </a:fld>
             <a:endParaRPr lang="en-US" dirty="0"/>
           </a:p>
@@ -19267,7 +20468,7 @@
 </p:sld>
 </file>
 
-<file path=ppt/slides/slide26.xml><?xml version="1.0" encoding="utf-8"?>
+<file path=ppt/slides/slide29.xml><?xml version="1.0" encoding="utf-8"?>
 <p:sld xmlns:a="http://schemas.openxmlformats.org/drawingml/2006/main" xmlns:r="http://schemas.openxmlformats.org/officeDocument/2006/relationships" xmlns:p="http://schemas.openxmlformats.org/presentationml/2006/main">
   <p:cSld>
     <p:spTree>
@@ -19370,7 +20571,7 @@
                   <a:spcPts val="600"/>
                 </a:spcAft>
               </a:pPr>
-              <a:t>26</a:t>
+              <a:t>29</a:t>
             </a:fld>
             <a:endParaRPr lang="en-US" dirty="0"/>
           </a:p>
@@ -19764,7 +20965,237 @@
 </p:sld>
 </file>
 
-<file path=ppt/slides/slide27.xml><?xml version="1.0" encoding="utf-8"?>
+<file path=ppt/slides/slide3.xml><?xml version="1.0" encoding="utf-8"?>
+<p:sld xmlns:a="http://schemas.openxmlformats.org/drawingml/2006/main" xmlns:r="http://schemas.openxmlformats.org/officeDocument/2006/relationships" xmlns:p="http://schemas.openxmlformats.org/presentationml/2006/main">
+  <p:cSld>
+    <p:spTree>
+      <p:nvGrpSpPr>
+        <p:cNvPr id="1" name="">
+          <a:extLst>
+            <a:ext uri="{FF2B5EF4-FFF2-40B4-BE49-F238E27FC236}">
+              <a16:creationId xmlns:a16="http://schemas.microsoft.com/office/drawing/2014/main" id="{536B0239-DCD3-4D2C-4136-A2E850F7A64D}"/>
+            </a:ext>
+          </a:extLst>
+        </p:cNvPr>
+        <p:cNvGrpSpPr/>
+        <p:nvPr/>
+      </p:nvGrpSpPr>
+      <p:grpSpPr>
+        <a:xfrm>
+          <a:off x="0" y="0"/>
+          <a:ext cx="0" cy="0"/>
+          <a:chOff x="0" y="0"/>
+          <a:chExt cx="0" cy="0"/>
+        </a:xfrm>
+      </p:grpSpPr>
+      <p:sp>
+        <p:nvSpPr>
+          <p:cNvPr id="2" name="Title 1">
+            <a:extLst>
+              <a:ext uri="{FF2B5EF4-FFF2-40B4-BE49-F238E27FC236}">
+                <a16:creationId xmlns:a16="http://schemas.microsoft.com/office/drawing/2014/main" id="{6C76243C-145F-6560-E2FC-DDAF84FDC41C}"/>
+              </a:ext>
+            </a:extLst>
+          </p:cNvPr>
+          <p:cNvSpPr>
+            <a:spLocks noGrp="1"/>
+          </p:cNvSpPr>
+          <p:nvPr>
+            <p:ph type="title"/>
+          </p:nvPr>
+        </p:nvSpPr>
+        <p:spPr>
+          <a:xfrm>
+            <a:off x="581192" y="702156"/>
+            <a:ext cx="11029616" cy="1013800"/>
+          </a:xfrm>
+        </p:spPr>
+        <p:txBody>
+          <a:bodyPr>
+            <a:normAutofit/>
+          </a:bodyPr>
+          <a:lstStyle/>
+          <a:p>
+            <a:r>
+              <a:rPr lang="en-US" dirty="0">
+                <a:solidFill>
+                  <a:srgbClr val="FFFFFF"/>
+                </a:solidFill>
+              </a:rPr>
+              <a:t>Introduction and present values</a:t>
+            </a:r>
+          </a:p>
+        </p:txBody>
+      </p:sp>
+      <p:pic>
+        <p:nvPicPr>
+          <p:cNvPr id="6" name="Picture 5" descr="A picture containing drawing&#10;&#10;Description automatically generated">
+            <a:extLst>
+              <a:ext uri="{FF2B5EF4-FFF2-40B4-BE49-F238E27FC236}">
+                <a16:creationId xmlns:a16="http://schemas.microsoft.com/office/drawing/2014/main" id="{C13CFF41-9094-5DD9-6392-BAEAEE12DD7B}"/>
+              </a:ext>
+            </a:extLst>
+          </p:cNvPr>
+          <p:cNvPicPr>
+            <a:picLocks noChangeAspect="1"/>
+          </p:cNvPicPr>
+          <p:nvPr/>
+        </p:nvPicPr>
+        <p:blipFill rotWithShape="1">
+          <a:blip r:embed="rId3">
+            <a:extLst>
+              <a:ext uri="{28A0092B-C50C-407E-A947-70E740481C1C}">
+                <a14:useLocalDpi xmlns:a14="http://schemas.microsoft.com/office/drawing/2010/main" val="0"/>
+              </a:ext>
+            </a:extLst>
+          </a:blip>
+          <a:srcRect l="19870" r="44807" b="-2"/>
+          <a:stretch/>
+        </p:blipFill>
+        <p:spPr>
+          <a:xfrm>
+            <a:off x="657225" y="2361056"/>
+            <a:ext cx="3305175" cy="3649219"/>
+          </a:xfrm>
+          <a:prstGeom prst="rect">
+            <a:avLst/>
+          </a:prstGeom>
+        </p:spPr>
+      </p:pic>
+      <p:sp>
+        <p:nvSpPr>
+          <p:cNvPr id="3" name="Content Placeholder 2">
+            <a:extLst>
+              <a:ext uri="{FF2B5EF4-FFF2-40B4-BE49-F238E27FC236}">
+                <a16:creationId xmlns:a16="http://schemas.microsoft.com/office/drawing/2014/main" id="{8E93B442-88D2-B2AF-827F-6A1C4663B192}"/>
+              </a:ext>
+            </a:extLst>
+          </p:cNvPr>
+          <p:cNvSpPr>
+            <a:spLocks noGrp="1"/>
+          </p:cNvSpPr>
+          <p:nvPr>
+            <p:ph idx="1"/>
+          </p:nvPr>
+        </p:nvSpPr>
+        <p:spPr>
+          <a:xfrm>
+            <a:off x="4505325" y="2180496"/>
+            <a:ext cx="7105481" cy="4045683"/>
+          </a:xfrm>
+        </p:spPr>
+        <p:txBody>
+          <a:bodyPr>
+            <a:noAutofit/>
+          </a:bodyPr>
+          <a:lstStyle/>
+          <a:p>
+            <a:pPr marL="0" indent="0">
+              <a:lnSpc>
+                <a:spcPct val="90000"/>
+              </a:lnSpc>
+              <a:buNone/>
+            </a:pPr>
+            <a:r>
+              <a:rPr lang="en-US" sz="2000" dirty="0"/>
+              <a:t>Present Values</a:t>
+            </a:r>
+          </a:p>
+          <a:p>
+            <a:pPr>
+              <a:lnSpc>
+                <a:spcPct val="90000"/>
+              </a:lnSpc>
+            </a:pPr>
+            <a:r>
+              <a:rPr lang="en-US" sz="2000" dirty="0"/>
+              <a:t>Calculating Future and Present Values.</a:t>
+            </a:r>
+          </a:p>
+          <a:p>
+            <a:pPr>
+              <a:lnSpc>
+                <a:spcPct val="90000"/>
+              </a:lnSpc>
+            </a:pPr>
+            <a:r>
+              <a:rPr lang="en-US" sz="2000" dirty="0"/>
+              <a:t>Valuing Perpetuities and Annuities.</a:t>
+            </a:r>
+          </a:p>
+          <a:p>
+            <a:pPr>
+              <a:lnSpc>
+                <a:spcPct val="90000"/>
+              </a:lnSpc>
+            </a:pPr>
+            <a:r>
+              <a:rPr lang="en-US" sz="2000" dirty="0"/>
+              <a:t>How Interest Is Paid and Quoted.</a:t>
+            </a:r>
+          </a:p>
+        </p:txBody>
+      </p:sp>
+      <p:sp>
+        <p:nvSpPr>
+          <p:cNvPr id="4" name="Slide Number Placeholder 3">
+            <a:extLst>
+              <a:ext uri="{FF2B5EF4-FFF2-40B4-BE49-F238E27FC236}">
+                <a16:creationId xmlns:a16="http://schemas.microsoft.com/office/drawing/2014/main" id="{8939F206-1130-5194-C7F8-40AEE045CEE1}"/>
+              </a:ext>
+            </a:extLst>
+          </p:cNvPr>
+          <p:cNvSpPr>
+            <a:spLocks noGrp="1"/>
+          </p:cNvSpPr>
+          <p:nvPr>
+            <p:ph type="sldNum" sz="quarter" idx="12"/>
+          </p:nvPr>
+        </p:nvSpPr>
+        <p:spPr>
+          <a:xfrm>
+            <a:off x="10558300" y="6400800"/>
+            <a:ext cx="1052508" cy="365125"/>
+          </a:xfrm>
+        </p:spPr>
+        <p:txBody>
+          <a:bodyPr>
+            <a:normAutofit/>
+          </a:bodyPr>
+          <a:lstStyle/>
+          <a:p>
+            <a:pPr>
+              <a:spcAft>
+                <a:spcPts val="600"/>
+              </a:spcAft>
+            </a:pPr>
+            <a:fld id="{7128DA7F-F6FE-453F-B8BB-1900E7257DA6}" type="slidenum">
+              <a:rPr lang="en-US" smtClean="0"/>
+              <a:pPr>
+                <a:spcAft>
+                  <a:spcPts val="600"/>
+                </a:spcAft>
+              </a:pPr>
+              <a:t>3</a:t>
+            </a:fld>
+            <a:endParaRPr lang="en-US" dirty="0"/>
+          </a:p>
+        </p:txBody>
+      </p:sp>
+    </p:spTree>
+    <p:extLst>
+      <p:ext uri="{BB962C8B-B14F-4D97-AF65-F5344CB8AC3E}">
+        <p14:creationId xmlns:p14="http://schemas.microsoft.com/office/powerpoint/2010/main" val="1493523277"/>
+      </p:ext>
+    </p:extLst>
+  </p:cSld>
+  <p:clrMapOvr>
+    <a:masterClrMapping/>
+  </p:clrMapOvr>
+</p:sld>
+</file>
+
+<file path=ppt/slides/slide30.xml><?xml version="1.0" encoding="utf-8"?>
 <p:sld xmlns:a="http://schemas.openxmlformats.org/drawingml/2006/main" xmlns:r="http://schemas.openxmlformats.org/officeDocument/2006/relationships" xmlns:p="http://schemas.openxmlformats.org/presentationml/2006/main">
   <p:cSld>
     <p:spTree>
@@ -19867,7 +21298,7 @@
                   <a:spcPts val="600"/>
                 </a:spcAft>
               </a:pPr>
-              <a:t>27</a:t>
+              <a:t>30</a:t>
             </a:fld>
             <a:endParaRPr lang="en-US" dirty="0"/>
           </a:p>
@@ -20007,7 +21438,7 @@
 </p:sld>
 </file>
 
-<file path=ppt/slides/slide28.xml><?xml version="1.0" encoding="utf-8"?>
+<file path=ppt/slides/slide31.xml><?xml version="1.0" encoding="utf-8"?>
 <p:sld xmlns:a="http://schemas.openxmlformats.org/drawingml/2006/main" xmlns:r="http://schemas.openxmlformats.org/officeDocument/2006/relationships" xmlns:p="http://schemas.openxmlformats.org/presentationml/2006/main">
   <p:cSld>
     <p:spTree>
@@ -20110,7 +21541,7 @@
                   <a:spcPts val="600"/>
                 </a:spcAft>
               </a:pPr>
-              <a:t>28</a:t>
+              <a:t>31</a:t>
             </a:fld>
             <a:endParaRPr lang="en-US" dirty="0"/>
           </a:p>
@@ -20307,7 +21738,7 @@
 </p:sld>
 </file>
 
-<file path=ppt/slides/slide29.xml><?xml version="1.0" encoding="utf-8"?>
+<file path=ppt/slides/slide32.xml><?xml version="1.0" encoding="utf-8"?>
 <p:sld xmlns:a="http://schemas.openxmlformats.org/drawingml/2006/main" xmlns:r="http://schemas.openxmlformats.org/officeDocument/2006/relationships" xmlns:p="http://schemas.openxmlformats.org/presentationml/2006/main">
   <p:cSld>
     <p:spTree>
@@ -20410,7 +21841,7 @@
                   <a:spcPts val="600"/>
                 </a:spcAft>
               </a:pPr>
-              <a:t>29</a:t>
+              <a:t>32</a:t>
             </a:fld>
             <a:endParaRPr lang="en-US" dirty="0"/>
           </a:p>
@@ -20623,237 +22054,7 @@
 </p:sld>
 </file>
 
-<file path=ppt/slides/slide3.xml><?xml version="1.0" encoding="utf-8"?>
-<p:sld xmlns:a="http://schemas.openxmlformats.org/drawingml/2006/main" xmlns:r="http://schemas.openxmlformats.org/officeDocument/2006/relationships" xmlns:p="http://schemas.openxmlformats.org/presentationml/2006/main">
-  <p:cSld>
-    <p:spTree>
-      <p:nvGrpSpPr>
-        <p:cNvPr id="1" name="">
-          <a:extLst>
-            <a:ext uri="{FF2B5EF4-FFF2-40B4-BE49-F238E27FC236}">
-              <a16:creationId xmlns:a16="http://schemas.microsoft.com/office/drawing/2014/main" id="{536B0239-DCD3-4D2C-4136-A2E850F7A64D}"/>
-            </a:ext>
-          </a:extLst>
-        </p:cNvPr>
-        <p:cNvGrpSpPr/>
-        <p:nvPr/>
-      </p:nvGrpSpPr>
-      <p:grpSpPr>
-        <a:xfrm>
-          <a:off x="0" y="0"/>
-          <a:ext cx="0" cy="0"/>
-          <a:chOff x="0" y="0"/>
-          <a:chExt cx="0" cy="0"/>
-        </a:xfrm>
-      </p:grpSpPr>
-      <p:sp>
-        <p:nvSpPr>
-          <p:cNvPr id="2" name="Title 1">
-            <a:extLst>
-              <a:ext uri="{FF2B5EF4-FFF2-40B4-BE49-F238E27FC236}">
-                <a16:creationId xmlns:a16="http://schemas.microsoft.com/office/drawing/2014/main" id="{6C76243C-145F-6560-E2FC-DDAF84FDC41C}"/>
-              </a:ext>
-            </a:extLst>
-          </p:cNvPr>
-          <p:cNvSpPr>
-            <a:spLocks noGrp="1"/>
-          </p:cNvSpPr>
-          <p:nvPr>
-            <p:ph type="title"/>
-          </p:nvPr>
-        </p:nvSpPr>
-        <p:spPr>
-          <a:xfrm>
-            <a:off x="581192" y="702156"/>
-            <a:ext cx="11029616" cy="1013800"/>
-          </a:xfrm>
-        </p:spPr>
-        <p:txBody>
-          <a:bodyPr>
-            <a:normAutofit/>
-          </a:bodyPr>
-          <a:lstStyle/>
-          <a:p>
-            <a:r>
-              <a:rPr lang="en-US" dirty="0">
-                <a:solidFill>
-                  <a:srgbClr val="FFFFFF"/>
-                </a:solidFill>
-              </a:rPr>
-              <a:t>Introduction and present values</a:t>
-            </a:r>
-          </a:p>
-        </p:txBody>
-      </p:sp>
-      <p:pic>
-        <p:nvPicPr>
-          <p:cNvPr id="6" name="Picture 5" descr="A picture containing drawing&#10;&#10;Description automatically generated">
-            <a:extLst>
-              <a:ext uri="{FF2B5EF4-FFF2-40B4-BE49-F238E27FC236}">
-                <a16:creationId xmlns:a16="http://schemas.microsoft.com/office/drawing/2014/main" id="{C13CFF41-9094-5DD9-6392-BAEAEE12DD7B}"/>
-              </a:ext>
-            </a:extLst>
-          </p:cNvPr>
-          <p:cNvPicPr>
-            <a:picLocks noChangeAspect="1"/>
-          </p:cNvPicPr>
-          <p:nvPr/>
-        </p:nvPicPr>
-        <p:blipFill rotWithShape="1">
-          <a:blip r:embed="rId3">
-            <a:extLst>
-              <a:ext uri="{28A0092B-C50C-407E-A947-70E740481C1C}">
-                <a14:useLocalDpi xmlns:a14="http://schemas.microsoft.com/office/drawing/2010/main" val="0"/>
-              </a:ext>
-            </a:extLst>
-          </a:blip>
-          <a:srcRect l="19870" r="44807" b="-2"/>
-          <a:stretch/>
-        </p:blipFill>
-        <p:spPr>
-          <a:xfrm>
-            <a:off x="657225" y="2361056"/>
-            <a:ext cx="3305175" cy="3649219"/>
-          </a:xfrm>
-          <a:prstGeom prst="rect">
-            <a:avLst/>
-          </a:prstGeom>
-        </p:spPr>
-      </p:pic>
-      <p:sp>
-        <p:nvSpPr>
-          <p:cNvPr id="3" name="Content Placeholder 2">
-            <a:extLst>
-              <a:ext uri="{FF2B5EF4-FFF2-40B4-BE49-F238E27FC236}">
-                <a16:creationId xmlns:a16="http://schemas.microsoft.com/office/drawing/2014/main" id="{8E93B442-88D2-B2AF-827F-6A1C4663B192}"/>
-              </a:ext>
-            </a:extLst>
-          </p:cNvPr>
-          <p:cNvSpPr>
-            <a:spLocks noGrp="1"/>
-          </p:cNvSpPr>
-          <p:nvPr>
-            <p:ph idx="1"/>
-          </p:nvPr>
-        </p:nvSpPr>
-        <p:spPr>
-          <a:xfrm>
-            <a:off x="4505325" y="2180496"/>
-            <a:ext cx="7105481" cy="4045683"/>
-          </a:xfrm>
-        </p:spPr>
-        <p:txBody>
-          <a:bodyPr>
-            <a:noAutofit/>
-          </a:bodyPr>
-          <a:lstStyle/>
-          <a:p>
-            <a:pPr marL="0" indent="0">
-              <a:lnSpc>
-                <a:spcPct val="90000"/>
-              </a:lnSpc>
-              <a:buNone/>
-            </a:pPr>
-            <a:r>
-              <a:rPr lang="en-US" sz="2000" dirty="0"/>
-              <a:t>Present Values</a:t>
-            </a:r>
-          </a:p>
-          <a:p>
-            <a:pPr>
-              <a:lnSpc>
-                <a:spcPct val="90000"/>
-              </a:lnSpc>
-            </a:pPr>
-            <a:r>
-              <a:rPr lang="en-US" sz="2000" dirty="0"/>
-              <a:t>Calculating Future and Present Values.</a:t>
-            </a:r>
-          </a:p>
-          <a:p>
-            <a:pPr>
-              <a:lnSpc>
-                <a:spcPct val="90000"/>
-              </a:lnSpc>
-            </a:pPr>
-            <a:r>
-              <a:rPr lang="en-US" sz="2000" dirty="0"/>
-              <a:t>Valuing Perpetuities and Annuities.</a:t>
-            </a:r>
-          </a:p>
-          <a:p>
-            <a:pPr>
-              <a:lnSpc>
-                <a:spcPct val="90000"/>
-              </a:lnSpc>
-            </a:pPr>
-            <a:r>
-              <a:rPr lang="en-US" sz="2000" dirty="0"/>
-              <a:t>How Interest Is Paid and Quoted.</a:t>
-            </a:r>
-          </a:p>
-        </p:txBody>
-      </p:sp>
-      <p:sp>
-        <p:nvSpPr>
-          <p:cNvPr id="4" name="Slide Number Placeholder 3">
-            <a:extLst>
-              <a:ext uri="{FF2B5EF4-FFF2-40B4-BE49-F238E27FC236}">
-                <a16:creationId xmlns:a16="http://schemas.microsoft.com/office/drawing/2014/main" id="{8939F206-1130-5194-C7F8-40AEE045CEE1}"/>
-              </a:ext>
-            </a:extLst>
-          </p:cNvPr>
-          <p:cNvSpPr>
-            <a:spLocks noGrp="1"/>
-          </p:cNvSpPr>
-          <p:nvPr>
-            <p:ph type="sldNum" sz="quarter" idx="12"/>
-          </p:nvPr>
-        </p:nvSpPr>
-        <p:spPr>
-          <a:xfrm>
-            <a:off x="10558300" y="6400800"/>
-            <a:ext cx="1052508" cy="365125"/>
-          </a:xfrm>
-        </p:spPr>
-        <p:txBody>
-          <a:bodyPr>
-            <a:normAutofit/>
-          </a:bodyPr>
-          <a:lstStyle/>
-          <a:p>
-            <a:pPr>
-              <a:spcAft>
-                <a:spcPts val="600"/>
-              </a:spcAft>
-            </a:pPr>
-            <a:fld id="{7128DA7F-F6FE-453F-B8BB-1900E7257DA6}" type="slidenum">
-              <a:rPr lang="en-US" smtClean="0"/>
-              <a:pPr>
-                <a:spcAft>
-                  <a:spcPts val="600"/>
-                </a:spcAft>
-              </a:pPr>
-              <a:t>3</a:t>
-            </a:fld>
-            <a:endParaRPr lang="en-US" dirty="0"/>
-          </a:p>
-        </p:txBody>
-      </p:sp>
-    </p:spTree>
-    <p:extLst>
-      <p:ext uri="{BB962C8B-B14F-4D97-AF65-F5344CB8AC3E}">
-        <p14:creationId xmlns:p14="http://schemas.microsoft.com/office/powerpoint/2010/main" val="1493523277"/>
-      </p:ext>
-    </p:extLst>
-  </p:cSld>
-  <p:clrMapOvr>
-    <a:masterClrMapping/>
-  </p:clrMapOvr>
-</p:sld>
-</file>
-
-<file path=ppt/slides/slide30.xml><?xml version="1.0" encoding="utf-8"?>
+<file path=ppt/slides/slide33.xml><?xml version="1.0" encoding="utf-8"?>
 <p:sld xmlns:a="http://schemas.openxmlformats.org/drawingml/2006/main" xmlns:r="http://schemas.openxmlformats.org/officeDocument/2006/relationships" xmlns:p="http://schemas.openxmlformats.org/presentationml/2006/main">
   <p:cSld>
     <p:spTree>
@@ -20956,7 +22157,7 @@
                   <a:spcPts val="600"/>
                 </a:spcAft>
               </a:pPr>
-              <a:t>30</a:t>
+              <a:t>33</a:t>
             </a:fld>
             <a:endParaRPr lang="en-US" dirty="0"/>
           </a:p>
@@ -21005,7 +22206,7 @@
 </p:sld>
 </file>
 
-<file path=ppt/slides/slide31.xml><?xml version="1.0" encoding="utf-8"?>
+<file path=ppt/slides/slide34.xml><?xml version="1.0" encoding="utf-8"?>
 <p:sld xmlns:a="http://schemas.openxmlformats.org/drawingml/2006/main" xmlns:r="http://schemas.openxmlformats.org/officeDocument/2006/relationships" xmlns:p="http://schemas.openxmlformats.org/presentationml/2006/main">
   <p:cSld>
     <p:spTree>
@@ -21108,7 +22309,7 @@
                   <a:spcPts val="600"/>
                 </a:spcAft>
               </a:pPr>
-              <a:t>31</a:t>
+              <a:t>34</a:t>
             </a:fld>
             <a:endParaRPr lang="en-US" dirty="0"/>
           </a:p>
@@ -21175,7 +22376,7 @@
 </p:sld>
 </file>
 
-<file path=ppt/slides/slide32.xml><?xml version="1.0" encoding="utf-8"?>
+<file path=ppt/slides/slide35.xml><?xml version="1.0" encoding="utf-8"?>
 <p:sld xmlns:a="http://schemas.openxmlformats.org/drawingml/2006/main" xmlns:r="http://schemas.openxmlformats.org/officeDocument/2006/relationships" xmlns:p="http://schemas.openxmlformats.org/presentationml/2006/main">
   <p:cSld>
     <p:spTree>
@@ -21278,7 +22479,7 @@
                   <a:spcPts val="600"/>
                 </a:spcAft>
               </a:pPr>
-              <a:t>32</a:t>
+              <a:t>35</a:t>
             </a:fld>
             <a:endParaRPr lang="en-US" dirty="0"/>
           </a:p>
@@ -21795,7 +22996,7 @@
 </p:sld>
 </file>
 
-<file path=ppt/slides/slide33.xml><?xml version="1.0" encoding="utf-8"?>
+<file path=ppt/slides/slide36.xml><?xml version="1.0" encoding="utf-8"?>
 <p:sld xmlns:a="http://schemas.openxmlformats.org/drawingml/2006/main" xmlns:r="http://schemas.openxmlformats.org/officeDocument/2006/relationships" xmlns:p="http://schemas.openxmlformats.org/presentationml/2006/main">
   <p:cSld>
     <p:spTree>
@@ -21898,7 +23099,7 @@
                   <a:spcPts val="600"/>
                 </a:spcAft>
               </a:pPr>
-              <a:t>33</a:t>
+              <a:t>36</a:t>
             </a:fld>
             <a:endParaRPr lang="en-US" dirty="0"/>
           </a:p>
@@ -22339,7 +23540,7 @@
 </p:sld>
 </file>
 
-<file path=ppt/slides/slide34.xml><?xml version="1.0" encoding="utf-8"?>
+<file path=ppt/slides/slide37.xml><?xml version="1.0" encoding="utf-8"?>
 <p:sld xmlns:a="http://schemas.openxmlformats.org/drawingml/2006/main" xmlns:r="http://schemas.openxmlformats.org/officeDocument/2006/relationships" xmlns:p="http://schemas.openxmlformats.org/presentationml/2006/main">
   <p:cSld>
     <p:spTree>
@@ -22442,7 +23643,7 @@
                   <a:spcPts val="600"/>
                 </a:spcAft>
               </a:pPr>
-              <a:t>34</a:t>
+              <a:t>37</a:t>
             </a:fld>
             <a:endParaRPr lang="en-US" dirty="0"/>
           </a:p>
@@ -22890,7 +24091,7 @@
 </p:sld>
 </file>
 
-<file path=ppt/slides/slide35.xml><?xml version="1.0" encoding="utf-8"?>
+<file path=ppt/slides/slide38.xml><?xml version="1.0" encoding="utf-8"?>
 <p:sld xmlns:a="http://schemas.openxmlformats.org/drawingml/2006/main" xmlns:r="http://schemas.openxmlformats.org/officeDocument/2006/relationships" xmlns:p="http://schemas.openxmlformats.org/presentationml/2006/main">
   <p:cSld>
     <p:spTree>
@@ -22993,7 +24194,7 @@
                   <a:spcPts val="600"/>
                 </a:spcAft>
               </a:pPr>
-              <a:t>35</a:t>
+              <a:t>38</a:t>
             </a:fld>
             <a:endParaRPr lang="en-US" dirty="0"/>
           </a:p>
@@ -23116,7 +24317,7 @@
 </p:sld>
 </file>
 
-<file path=ppt/slides/slide36.xml><?xml version="1.0" encoding="utf-8"?>
+<file path=ppt/slides/slide39.xml><?xml version="1.0" encoding="utf-8"?>
 <p:sld xmlns:a="http://schemas.openxmlformats.org/drawingml/2006/main" xmlns:r="http://schemas.openxmlformats.org/officeDocument/2006/relationships" xmlns:p="http://schemas.openxmlformats.org/presentationml/2006/main">
   <p:cSld>
     <p:spTree>
@@ -23219,7 +24420,7 @@
                   <a:spcPts val="600"/>
                 </a:spcAft>
               </a:pPr>
-              <a:t>36</a:t>
+              <a:t>39</a:t>
             </a:fld>
             <a:endParaRPr lang="en-US" dirty="0"/>
           </a:p>
@@ -23247,7 +24448,7 @@
         </p:blipFill>
         <p:spPr>
           <a:xfrm>
-            <a:off x="2273728" y="2145519"/>
+            <a:off x="2273728" y="2160930"/>
             <a:ext cx="7644543" cy="4437843"/>
           </a:xfrm>
           <a:prstGeom prst="rect">
@@ -23268,7 +24469,564 @@
 </p:sld>
 </file>
 
-<file path=ppt/slides/slide37.xml><?xml version="1.0" encoding="utf-8"?>
+<file path=ppt/slides/slide4.xml><?xml version="1.0" encoding="utf-8"?>
+<p:sld xmlns:a="http://schemas.openxmlformats.org/drawingml/2006/main" xmlns:r="http://schemas.openxmlformats.org/officeDocument/2006/relationships" xmlns:p="http://schemas.openxmlformats.org/presentationml/2006/main">
+  <p:cSld>
+    <p:bg>
+      <p:bgPr>
+        <a:solidFill>
+          <a:schemeClr val="bg1"/>
+        </a:solidFill>
+        <a:effectLst/>
+      </p:bgPr>
+    </p:bg>
+    <p:spTree>
+      <p:nvGrpSpPr>
+        <p:cNvPr id="1" name=""/>
+        <p:cNvGrpSpPr/>
+        <p:nvPr/>
+      </p:nvGrpSpPr>
+      <p:grpSpPr>
+        <a:xfrm>
+          <a:off x="0" y="0"/>
+          <a:ext cx="0" cy="0"/>
+          <a:chOff x="0" y="0"/>
+          <a:chExt cx="0" cy="0"/>
+        </a:xfrm>
+      </p:grpSpPr>
+      <p:sp>
+        <p:nvSpPr>
+          <p:cNvPr id="23" name="Rectangle 22">
+            <a:extLst>
+              <a:ext uri="{FF2B5EF4-FFF2-40B4-BE49-F238E27FC236}">
+                <a16:creationId xmlns:a16="http://schemas.microsoft.com/office/drawing/2014/main" id="{2928117C-9446-4E7F-AE62-95E0F6DB5B27}"/>
+              </a:ext>
+              <a:ext uri="{C183D7F6-B498-43B3-948B-1728B52AA6E4}">
+                <adec:decorative xmlns:adec="http://schemas.microsoft.com/office/drawing/2017/decorative" val="1"/>
+              </a:ext>
+            </a:extLst>
+          </p:cNvPr>
+          <p:cNvSpPr>
+            <a:spLocks noGrp="1" noRot="1" noChangeAspect="1" noMove="1" noResize="1" noEditPoints="1" noAdjustHandles="1" noChangeArrowheads="1" noChangeShapeType="1" noTextEdit="1"/>
+          </p:cNvSpPr>
+          <p:nvPr>
+            <p:extLst>
+              <p:ext uri="{386F3935-93C4-4BCD-93E2-E3B085C9AB24}">
+                <p16:designElem xmlns:p16="http://schemas.microsoft.com/office/powerpoint/2015/main" val="1"/>
+              </p:ext>
+            </p:extLst>
+          </p:nvPr>
+        </p:nvSpPr>
+        <p:spPr>
+          <a:xfrm>
+            <a:off x="446534" y="457200"/>
+            <a:ext cx="3703320" cy="94997"/>
+          </a:xfrm>
+          <a:prstGeom prst="rect">
+            <a:avLst/>
+          </a:prstGeom>
+          <a:solidFill>
+            <a:schemeClr val="accent1"/>
+          </a:solidFill>
+          <a:ln>
+            <a:noFill/>
+          </a:ln>
+          <a:effectLst/>
+        </p:spPr>
+        <p:style>
+          <a:lnRef idx="1">
+            <a:schemeClr val="accent1"/>
+          </a:lnRef>
+          <a:fillRef idx="3">
+            <a:schemeClr val="accent1"/>
+          </a:fillRef>
+          <a:effectRef idx="2">
+            <a:schemeClr val="accent1"/>
+          </a:effectRef>
+          <a:fontRef idx="minor">
+            <a:schemeClr val="lt1"/>
+          </a:fontRef>
+        </p:style>
+        <p:txBody>
+          <a:bodyPr/>
+          <a:lstStyle/>
+          <a:p>
+            <a:endParaRPr lang="en-SG"/>
+          </a:p>
+        </p:txBody>
+      </p:sp>
+      <p:sp>
+        <p:nvSpPr>
+          <p:cNvPr id="25" name="Rectangle 24">
+            <a:extLst>
+              <a:ext uri="{FF2B5EF4-FFF2-40B4-BE49-F238E27FC236}">
+                <a16:creationId xmlns:a16="http://schemas.microsoft.com/office/drawing/2014/main" id="{84D30AFB-4D71-48B0-AA00-28EE92363A5F}"/>
+              </a:ext>
+              <a:ext uri="{C183D7F6-B498-43B3-948B-1728B52AA6E4}">
+                <adec:decorative xmlns:adec="http://schemas.microsoft.com/office/drawing/2017/decorative" val="1"/>
+              </a:ext>
+            </a:extLst>
+          </p:cNvPr>
+          <p:cNvSpPr>
+            <a:spLocks noGrp="1" noRot="1" noChangeAspect="1" noMove="1" noResize="1" noEditPoints="1" noAdjustHandles="1" noChangeArrowheads="1" noChangeShapeType="1" noTextEdit="1"/>
+          </p:cNvSpPr>
+          <p:nvPr>
+            <p:extLst>
+              <p:ext uri="{386F3935-93C4-4BCD-93E2-E3B085C9AB24}">
+                <p16:designElem xmlns:p16="http://schemas.microsoft.com/office/powerpoint/2015/main" val="1"/>
+              </p:ext>
+            </p:extLst>
+          </p:nvPr>
+        </p:nvSpPr>
+        <p:spPr>
+          <a:xfrm>
+            <a:off x="8042147" y="453643"/>
+            <a:ext cx="3703320" cy="98554"/>
+          </a:xfrm>
+          <a:prstGeom prst="rect">
+            <a:avLst/>
+          </a:prstGeom>
+          <a:solidFill>
+            <a:schemeClr val="accent4"/>
+          </a:solidFill>
+          <a:ln>
+            <a:noFill/>
+          </a:ln>
+          <a:effectLst/>
+        </p:spPr>
+        <p:style>
+          <a:lnRef idx="1">
+            <a:schemeClr val="accent1"/>
+          </a:lnRef>
+          <a:fillRef idx="3">
+            <a:schemeClr val="accent1"/>
+          </a:fillRef>
+          <a:effectRef idx="2">
+            <a:schemeClr val="accent1"/>
+          </a:effectRef>
+          <a:fontRef idx="minor">
+            <a:schemeClr val="lt1"/>
+          </a:fontRef>
+        </p:style>
+        <p:txBody>
+          <a:bodyPr/>
+          <a:lstStyle/>
+          <a:p>
+            <a:endParaRPr lang="en-SG"/>
+          </a:p>
+        </p:txBody>
+      </p:sp>
+      <p:sp>
+        <p:nvSpPr>
+          <p:cNvPr id="27" name="Rectangle 26">
+            <a:extLst>
+              <a:ext uri="{FF2B5EF4-FFF2-40B4-BE49-F238E27FC236}">
+                <a16:creationId xmlns:a16="http://schemas.microsoft.com/office/drawing/2014/main" id="{96A0B76F-8010-4C62-B4B6-C5FC438C059E}"/>
+              </a:ext>
+              <a:ext uri="{C183D7F6-B498-43B3-948B-1728B52AA6E4}">
+                <adec:decorative xmlns:adec="http://schemas.microsoft.com/office/drawing/2017/decorative" val="1"/>
+              </a:ext>
+            </a:extLst>
+          </p:cNvPr>
+          <p:cNvSpPr>
+            <a:spLocks noGrp="1" noRot="1" noChangeAspect="1" noMove="1" noResize="1" noEditPoints="1" noAdjustHandles="1" noChangeArrowheads="1" noChangeShapeType="1" noTextEdit="1"/>
+          </p:cNvSpPr>
+          <p:nvPr>
+            <p:extLst>
+              <p:ext uri="{386F3935-93C4-4BCD-93E2-E3B085C9AB24}">
+                <p16:designElem xmlns:p16="http://schemas.microsoft.com/office/powerpoint/2015/main" val="1"/>
+              </p:ext>
+            </p:extLst>
+          </p:nvPr>
+        </p:nvSpPr>
+        <p:spPr>
+          <a:xfrm>
+            <a:off x="4241830" y="457200"/>
+            <a:ext cx="3703320" cy="91440"/>
+          </a:xfrm>
+          <a:prstGeom prst="rect">
+            <a:avLst/>
+          </a:prstGeom>
+          <a:solidFill>
+            <a:schemeClr val="accent2"/>
+          </a:solidFill>
+          <a:ln>
+            <a:noFill/>
+          </a:ln>
+          <a:effectLst/>
+        </p:spPr>
+        <p:style>
+          <a:lnRef idx="1">
+            <a:schemeClr val="accent1"/>
+          </a:lnRef>
+          <a:fillRef idx="3">
+            <a:schemeClr val="accent1"/>
+          </a:fillRef>
+          <a:effectRef idx="2">
+            <a:schemeClr val="accent1"/>
+          </a:effectRef>
+          <a:fontRef idx="minor">
+            <a:schemeClr val="lt1"/>
+          </a:fontRef>
+        </p:style>
+        <p:txBody>
+          <a:bodyPr/>
+          <a:lstStyle/>
+          <a:p>
+            <a:endParaRPr lang="en-SG"/>
+          </a:p>
+        </p:txBody>
+      </p:sp>
+      <p:sp>
+        <p:nvSpPr>
+          <p:cNvPr id="29" name="Rectangle 28">
+            <a:extLst>
+              <a:ext uri="{FF2B5EF4-FFF2-40B4-BE49-F238E27FC236}">
+                <a16:creationId xmlns:a16="http://schemas.microsoft.com/office/drawing/2014/main" id="{B36BEBD5-A373-4C8C-8C06-CD8007E22F39}"/>
+              </a:ext>
+              <a:ext uri="{C183D7F6-B498-43B3-948B-1728B52AA6E4}">
+                <adec:decorative xmlns:adec="http://schemas.microsoft.com/office/drawing/2017/decorative" val="1"/>
+              </a:ext>
+            </a:extLst>
+          </p:cNvPr>
+          <p:cNvSpPr>
+            <a:spLocks noGrp="1" noRot="1" noChangeAspect="1" noMove="1" noResize="1" noEditPoints="1" noAdjustHandles="1" noChangeArrowheads="1" noChangeShapeType="1" noTextEdit="1"/>
+          </p:cNvSpPr>
+          <p:nvPr>
+            <p:extLst>
+              <p:ext uri="{386F3935-93C4-4BCD-93E2-E3B085C9AB24}">
+                <p16:designElem xmlns:p16="http://schemas.microsoft.com/office/powerpoint/2015/main" val="1"/>
+              </p:ext>
+            </p:extLst>
+          </p:nvPr>
+        </p:nvSpPr>
+        <p:spPr>
+          <a:xfrm>
+            <a:off x="440286" y="614407"/>
+            <a:ext cx="11309338" cy="1189298"/>
+          </a:xfrm>
+          <a:prstGeom prst="rect">
+            <a:avLst/>
+          </a:prstGeom>
+          <a:solidFill>
+            <a:schemeClr val="accent1"/>
+          </a:solidFill>
+          <a:ln>
+            <a:noFill/>
+          </a:ln>
+          <a:effectLst/>
+        </p:spPr>
+        <p:style>
+          <a:lnRef idx="1">
+            <a:schemeClr val="accent1"/>
+          </a:lnRef>
+          <a:fillRef idx="3">
+            <a:schemeClr val="accent1"/>
+          </a:fillRef>
+          <a:effectRef idx="2">
+            <a:schemeClr val="accent1"/>
+          </a:effectRef>
+          <a:fontRef idx="minor">
+            <a:schemeClr val="lt1"/>
+          </a:fontRef>
+        </p:style>
+        <p:txBody>
+          <a:bodyPr/>
+          <a:lstStyle/>
+          <a:p>
+            <a:endParaRPr lang="en-SG"/>
+          </a:p>
+        </p:txBody>
+      </p:sp>
+      <p:sp>
+        <p:nvSpPr>
+          <p:cNvPr id="2" name="Title 1">
+            <a:extLst>
+              <a:ext uri="{FF2B5EF4-FFF2-40B4-BE49-F238E27FC236}">
+                <a16:creationId xmlns:a16="http://schemas.microsoft.com/office/drawing/2014/main" id="{16B4A4C4-A6F4-421D-AD5A-6F0EFEBB9C72}"/>
+              </a:ext>
+            </a:extLst>
+          </p:cNvPr>
+          <p:cNvSpPr>
+            <a:spLocks noGrp="1"/>
+          </p:cNvSpPr>
+          <p:nvPr>
+            <p:ph type="title"/>
+          </p:nvPr>
+        </p:nvSpPr>
+        <p:spPr>
+          <a:xfrm>
+            <a:off x="581192" y="702156"/>
+            <a:ext cx="11029616" cy="1013800"/>
+          </a:xfrm>
+        </p:spPr>
+        <p:txBody>
+          <a:bodyPr vert="horz" lIns="91440" tIns="45720" rIns="91440" bIns="45720" rtlCol="0" anchor="b">
+            <a:normAutofit/>
+          </a:bodyPr>
+          <a:lstStyle/>
+          <a:p>
+            <a:r>
+              <a:rPr lang="en-US" dirty="0">
+                <a:solidFill>
+                  <a:srgbClr val="FFFFFF"/>
+                </a:solidFill>
+              </a:rPr>
+              <a:t>Corporate Investment and Financing Decisions</a:t>
+            </a:r>
+          </a:p>
+        </p:txBody>
+      </p:sp>
+      <p:sp>
+        <p:nvSpPr>
+          <p:cNvPr id="3" name="Content Placeholder 2">
+            <a:extLst>
+              <a:ext uri="{FF2B5EF4-FFF2-40B4-BE49-F238E27FC236}">
+                <a16:creationId xmlns:a16="http://schemas.microsoft.com/office/drawing/2014/main" id="{D3D1AD1C-49A8-41B1-9189-3179F1DD1BE4}"/>
+              </a:ext>
+            </a:extLst>
+          </p:cNvPr>
+          <p:cNvSpPr>
+            <a:spLocks noGrp="1"/>
+          </p:cNvSpPr>
+          <p:nvPr>
+            <p:ph sz="half" idx="1"/>
+          </p:nvPr>
+        </p:nvSpPr>
+        <p:spPr>
+          <a:xfrm>
+            <a:off x="295820" y="2041795"/>
+            <a:ext cx="7513454" cy="4574762"/>
+          </a:xfrm>
+        </p:spPr>
+        <p:txBody>
+          <a:bodyPr vert="horz" lIns="91440" tIns="45720" rIns="91440" bIns="45720" rtlCol="0" anchor="ctr">
+            <a:normAutofit lnSpcReduction="10000"/>
+          </a:bodyPr>
+          <a:lstStyle/>
+          <a:p>
+            <a:r>
+              <a:rPr lang="en-US" sz="2000" dirty="0"/>
+              <a:t>To do business, a company requires inputs which are then used to produce goods and services. These inputs are known by financiers as “</a:t>
+            </a:r>
+            <a:r>
+              <a:rPr lang="en-US" sz="2000" b="1" dirty="0"/>
+              <a:t>real assets</a:t>
+            </a:r>
+            <a:r>
+              <a:rPr lang="en-US" sz="2000" dirty="0"/>
+              <a:t>”, as they have intrinsic value (Q: what is “intrinsic value”?) in and of themselves, rather than having value only from what they can buy. Two categories of real assets:</a:t>
+            </a:r>
+          </a:p>
+          <a:p>
+            <a:pPr lvl="1"/>
+            <a:r>
+              <a:rPr lang="en-US" sz="1800" b="1" dirty="0"/>
+              <a:t>Tangible Assets</a:t>
+            </a:r>
+            <a:r>
+              <a:rPr lang="en-US" sz="1800" dirty="0"/>
+              <a:t>: Physical assets such as oil fields, factories, and machines (things you can touch)</a:t>
+            </a:r>
+          </a:p>
+          <a:p>
+            <a:pPr lvl="1"/>
+            <a:r>
+              <a:rPr lang="en-US" sz="1800" b="1" dirty="0"/>
+              <a:t>Intangible Assets</a:t>
+            </a:r>
+            <a:r>
+              <a:rPr lang="en-US" sz="1800" dirty="0"/>
+              <a:t>: No physical substance, such as patents, brands, and corporate culture. </a:t>
+            </a:r>
+          </a:p>
+          <a:p>
+            <a:r>
+              <a:rPr lang="en-US" sz="2000" dirty="0"/>
+              <a:t>Real assets must be bought externally or developed internally; either way, they cost money. Companies pay for their real assets by </a:t>
+            </a:r>
+            <a:r>
+              <a:rPr lang="en-US" sz="2000" b="1" dirty="0"/>
+              <a:t>selling claims on them </a:t>
+            </a:r>
+            <a:r>
+              <a:rPr lang="en-US" sz="2000" dirty="0"/>
+              <a:t>and the cash flows they will generate. These claims are termed “</a:t>
+            </a:r>
+            <a:r>
+              <a:rPr lang="en-US" sz="2000" b="1" dirty="0"/>
+              <a:t>financial assets</a:t>
+            </a:r>
+            <a:r>
+              <a:rPr lang="en-US" sz="2000" dirty="0"/>
+              <a:t>”.</a:t>
+            </a:r>
+          </a:p>
+          <a:p>
+            <a:pPr lvl="1"/>
+            <a:r>
+              <a:rPr lang="en-US" sz="1800" dirty="0"/>
+              <a:t>E.g., issuance of shares/corporate bonds. Tradeable financial assets are known as </a:t>
+            </a:r>
+            <a:r>
+              <a:rPr lang="en-US" sz="1800" b="1" dirty="0"/>
+              <a:t>securities</a:t>
+            </a:r>
+            <a:r>
+              <a:rPr lang="en-US" sz="1800" dirty="0"/>
+              <a:t>. </a:t>
+            </a:r>
+          </a:p>
+        </p:txBody>
+      </p:sp>
+      <p:sp>
+        <p:nvSpPr>
+          <p:cNvPr id="4" name="Slide Number Placeholder 3">
+            <a:extLst>
+              <a:ext uri="{FF2B5EF4-FFF2-40B4-BE49-F238E27FC236}">
+                <a16:creationId xmlns:a16="http://schemas.microsoft.com/office/drawing/2014/main" id="{6F58721D-52D7-4F8F-84CE-ACA86714A1EC}"/>
+              </a:ext>
+            </a:extLst>
+          </p:cNvPr>
+          <p:cNvSpPr>
+            <a:spLocks noGrp="1"/>
+          </p:cNvSpPr>
+          <p:nvPr>
+            <p:ph type="sldNum" sz="quarter" idx="12"/>
+          </p:nvPr>
+        </p:nvSpPr>
+        <p:spPr>
+          <a:xfrm>
+            <a:off x="7264399" y="5956137"/>
+            <a:ext cx="544875" cy="365125"/>
+          </a:xfrm>
+        </p:spPr>
+        <p:txBody>
+          <a:bodyPr vert="horz" lIns="91440" tIns="45720" rIns="91440" bIns="45720" rtlCol="0" anchor="ctr">
+            <a:normAutofit/>
+          </a:bodyPr>
+          <a:lstStyle/>
+          <a:p>
+            <a:pPr>
+              <a:spcAft>
+                <a:spcPts val="600"/>
+              </a:spcAft>
+            </a:pPr>
+            <a:fld id="{7128DA7F-F6FE-453F-B8BB-1900E7257DA6}" type="slidenum">
+              <a:rPr lang="en-US" smtClean="0"/>
+              <a:pPr>
+                <a:spcAft>
+                  <a:spcPts val="600"/>
+                </a:spcAft>
+              </a:pPr>
+              <a:t>4</a:t>
+            </a:fld>
+            <a:endParaRPr lang="en-US"/>
+          </a:p>
+        </p:txBody>
+      </p:sp>
+      <p:pic>
+        <p:nvPicPr>
+          <p:cNvPr id="7" name="Content Placeholder 6">
+            <a:extLst>
+              <a:ext uri="{FF2B5EF4-FFF2-40B4-BE49-F238E27FC236}">
+                <a16:creationId xmlns:a16="http://schemas.microsoft.com/office/drawing/2014/main" id="{F26DE1D4-5FCD-D7C6-F28D-E8620109A68B}"/>
+              </a:ext>
+            </a:extLst>
+          </p:cNvPr>
+          <p:cNvPicPr>
+            <a:picLocks noGrp="1" noChangeAspect="1"/>
+          </p:cNvPicPr>
+          <p:nvPr>
+            <p:ph sz="half" idx="2"/>
+          </p:nvPr>
+        </p:nvPicPr>
+        <p:blipFill>
+          <a:blip r:embed="rId3">
+            <a:extLst>
+              <a:ext uri="{28A0092B-C50C-407E-A947-70E740481C1C}">
+                <a14:useLocalDpi xmlns:a14="http://schemas.microsoft.com/office/drawing/2010/main" val="0"/>
+              </a:ext>
+              <a:ext uri="{837473B0-CC2E-450A-ABE3-18F120FF3D39}">
+                <a1611:picAttrSrcUrl xmlns:a1611="http://schemas.microsoft.com/office/drawing/2016/11/main" r:id="rId4"/>
+              </a:ext>
+            </a:extLst>
+          </a:blip>
+          <a:srcRect l="22744" r="22744"/>
+          <a:stretch/>
+        </p:blipFill>
+        <p:spPr>
+          <a:xfrm>
+            <a:off x="8051799" y="1871133"/>
+            <a:ext cx="3683001" cy="4504267"/>
+          </a:xfrm>
+          <a:prstGeom prst="rect">
+            <a:avLst/>
+          </a:prstGeom>
+        </p:spPr>
+      </p:pic>
+      <p:sp>
+        <p:nvSpPr>
+          <p:cNvPr id="5" name="TextBox 4">
+            <a:extLst>
+              <a:ext uri="{FF2B5EF4-FFF2-40B4-BE49-F238E27FC236}">
+                <a16:creationId xmlns:a16="http://schemas.microsoft.com/office/drawing/2014/main" id="{BA9A87F7-4427-E85E-46C3-1AAF28A83627}"/>
+              </a:ext>
+            </a:extLst>
+          </p:cNvPr>
+          <p:cNvSpPr txBox="1"/>
+          <p:nvPr/>
+        </p:nvSpPr>
+        <p:spPr>
+          <a:xfrm>
+            <a:off x="8051799" y="6375400"/>
+            <a:ext cx="3683001" cy="230832"/>
+          </a:xfrm>
+          <a:prstGeom prst="rect">
+            <a:avLst/>
+          </a:prstGeom>
+          <a:noFill/>
+        </p:spPr>
+        <p:txBody>
+          <a:bodyPr wrap="square" rtlCol="0">
+            <a:spAutoFit/>
+          </a:bodyPr>
+          <a:lstStyle/>
+          <a:p>
+            <a:r>
+              <a:rPr lang="en-SG" sz="900">
+                <a:hlinkClick r:id="rId4" tooltip="https://www.thebluediamondgallery.com/wooden-tile/a/asset.html"/>
+              </a:rPr>
+              <a:t>This Photo</a:t>
+            </a:r>
+            <a:r>
+              <a:rPr lang="en-SG" sz="900"/>
+              <a:t> by Unknown Author is licensed under </a:t>
+            </a:r>
+            <a:r>
+              <a:rPr lang="en-SG" sz="900">
+                <a:hlinkClick r:id="rId5" tooltip="https://creativecommons.org/licenses/by-sa/3.0/"/>
+              </a:rPr>
+              <a:t>CC BY-SA</a:t>
+            </a:r>
+            <a:endParaRPr lang="en-SG" sz="900"/>
+          </a:p>
+        </p:txBody>
+      </p:sp>
+    </p:spTree>
+    <p:extLst>
+      <p:ext uri="{BB962C8B-B14F-4D97-AF65-F5344CB8AC3E}">
+        <p14:creationId xmlns:p14="http://schemas.microsoft.com/office/powerpoint/2010/main" val="57641549"/>
+      </p:ext>
+    </p:extLst>
+  </p:cSld>
+  <p:clrMapOvr>
+    <a:masterClrMapping/>
+  </p:clrMapOvr>
+</p:sld>
+</file>
+
+<file path=ppt/slides/slide40.xml><?xml version="1.0" encoding="utf-8"?>
 <p:sld xmlns:a="http://schemas.openxmlformats.org/drawingml/2006/main" xmlns:r="http://schemas.openxmlformats.org/officeDocument/2006/relationships" xmlns:p="http://schemas.openxmlformats.org/presentationml/2006/main">
   <p:cSld>
     <p:spTree>
@@ -23371,7 +25129,7 @@
                   <a:spcPts val="600"/>
                 </a:spcAft>
               </a:pPr>
-              <a:t>37</a:t>
+              <a:t>40</a:t>
             </a:fld>
             <a:endParaRPr lang="en-US" dirty="0"/>
           </a:p>
@@ -23420,7 +25178,7 @@
 </p:sld>
 </file>
 
-<file path=ppt/slides/slide38.xml><?xml version="1.0" encoding="utf-8"?>
+<file path=ppt/slides/slide41.xml><?xml version="1.0" encoding="utf-8"?>
 <p:sld xmlns:a="http://schemas.openxmlformats.org/drawingml/2006/main" xmlns:r="http://schemas.openxmlformats.org/officeDocument/2006/relationships" xmlns:p="http://schemas.openxmlformats.org/presentationml/2006/main">
   <p:cSld>
     <p:spTree>
@@ -23523,7 +25281,7 @@
                   <a:spcPts val="600"/>
                 </a:spcAft>
               </a:pPr>
-              <a:t>38</a:t>
+              <a:t>41</a:t>
             </a:fld>
             <a:endParaRPr lang="en-US" dirty="0"/>
           </a:p>
@@ -23579,7 +25337,7 @@
                     <m:sSup>
                       <m:sSupPr>
                         <m:ctrlPr>
-                          <a:rPr lang="en-US" sz="1800" i="1" dirty="0" smtClean="0">
+                          <a:rPr lang="en-US" sz="1800" i="1" dirty="0">
                             <a:latin typeface="Cambria Math" panose="02040503050406030204" pitchFamily="18" charset="0"/>
                           </a:rPr>
                         </m:ctrlPr>
@@ -24126,7 +25884,7 @@
 </p:sld>
 </file>
 
-<file path=ppt/slides/slide39.xml><?xml version="1.0" encoding="utf-8"?>
+<file path=ppt/slides/slide42.xml><?xml version="1.0" encoding="utf-8"?>
 <p:sld xmlns:a="http://schemas.openxmlformats.org/drawingml/2006/main" xmlns:r="http://schemas.openxmlformats.org/officeDocument/2006/relationships" xmlns:p="http://schemas.openxmlformats.org/presentationml/2006/main">
   <p:cSld>
     <p:spTree>
@@ -24229,7 +25987,7 @@
                   <a:spcPts val="600"/>
                 </a:spcAft>
               </a:pPr>
-              <a:t>39</a:t>
+              <a:t>42</a:t>
             </a:fld>
             <a:endParaRPr lang="en-US" dirty="0"/>
           </a:p>
@@ -24324,569 +26082,7 @@
 </p:sld>
 </file>
 
-<file path=ppt/slides/slide4.xml><?xml version="1.0" encoding="utf-8"?>
-<p:sld xmlns:a="http://schemas.openxmlformats.org/drawingml/2006/main" xmlns:r="http://schemas.openxmlformats.org/officeDocument/2006/relationships" xmlns:p="http://schemas.openxmlformats.org/presentationml/2006/main">
-  <p:cSld>
-    <p:bg>
-      <p:bgPr>
-        <a:solidFill>
-          <a:schemeClr val="bg1"/>
-        </a:solidFill>
-        <a:effectLst/>
-      </p:bgPr>
-    </p:bg>
-    <p:spTree>
-      <p:nvGrpSpPr>
-        <p:cNvPr id="1" name=""/>
-        <p:cNvGrpSpPr/>
-        <p:nvPr/>
-      </p:nvGrpSpPr>
-      <p:grpSpPr>
-        <a:xfrm>
-          <a:off x="0" y="0"/>
-          <a:ext cx="0" cy="0"/>
-          <a:chOff x="0" y="0"/>
-          <a:chExt cx="0" cy="0"/>
-        </a:xfrm>
-      </p:grpSpPr>
-      <p:sp>
-        <p:nvSpPr>
-          <p:cNvPr id="23" name="Rectangle 22">
-            <a:extLst>
-              <a:ext uri="{FF2B5EF4-FFF2-40B4-BE49-F238E27FC236}">
-                <a16:creationId xmlns:a16="http://schemas.microsoft.com/office/drawing/2014/main" id="{2928117C-9446-4E7F-AE62-95E0F6DB5B27}"/>
-              </a:ext>
-              <a:ext uri="{C183D7F6-B498-43B3-948B-1728B52AA6E4}">
-                <adec:decorative xmlns:adec="http://schemas.microsoft.com/office/drawing/2017/decorative" val="1"/>
-              </a:ext>
-            </a:extLst>
-          </p:cNvPr>
-          <p:cNvSpPr>
-            <a:spLocks noGrp="1" noRot="1" noChangeAspect="1" noMove="1" noResize="1" noEditPoints="1" noAdjustHandles="1" noChangeArrowheads="1" noChangeShapeType="1" noTextEdit="1"/>
-          </p:cNvSpPr>
-          <p:nvPr>
-            <p:extLst>
-              <p:ext uri="{386F3935-93C4-4BCD-93E2-E3B085C9AB24}">
-                <p16:designElem xmlns:p16="http://schemas.microsoft.com/office/powerpoint/2015/main" val="1"/>
-              </p:ext>
-            </p:extLst>
-          </p:nvPr>
-        </p:nvSpPr>
-        <p:spPr>
-          <a:xfrm>
-            <a:off x="446534" y="457200"/>
-            <a:ext cx="3703320" cy="94997"/>
-          </a:xfrm>
-          <a:prstGeom prst="rect">
-            <a:avLst/>
-          </a:prstGeom>
-          <a:solidFill>
-            <a:schemeClr val="accent1"/>
-          </a:solidFill>
-          <a:ln>
-            <a:noFill/>
-          </a:ln>
-          <a:effectLst/>
-        </p:spPr>
-        <p:style>
-          <a:lnRef idx="1">
-            <a:schemeClr val="accent1"/>
-          </a:lnRef>
-          <a:fillRef idx="3">
-            <a:schemeClr val="accent1"/>
-          </a:fillRef>
-          <a:effectRef idx="2">
-            <a:schemeClr val="accent1"/>
-          </a:effectRef>
-          <a:fontRef idx="minor">
-            <a:schemeClr val="lt1"/>
-          </a:fontRef>
-        </p:style>
-        <p:txBody>
-          <a:bodyPr/>
-          <a:lstStyle/>
-          <a:p>
-            <a:endParaRPr lang="en-SG"/>
-          </a:p>
-        </p:txBody>
-      </p:sp>
-      <p:sp>
-        <p:nvSpPr>
-          <p:cNvPr id="25" name="Rectangle 24">
-            <a:extLst>
-              <a:ext uri="{FF2B5EF4-FFF2-40B4-BE49-F238E27FC236}">
-                <a16:creationId xmlns:a16="http://schemas.microsoft.com/office/drawing/2014/main" id="{84D30AFB-4D71-48B0-AA00-28EE92363A5F}"/>
-              </a:ext>
-              <a:ext uri="{C183D7F6-B498-43B3-948B-1728B52AA6E4}">
-                <adec:decorative xmlns:adec="http://schemas.microsoft.com/office/drawing/2017/decorative" val="1"/>
-              </a:ext>
-            </a:extLst>
-          </p:cNvPr>
-          <p:cNvSpPr>
-            <a:spLocks noGrp="1" noRot="1" noChangeAspect="1" noMove="1" noResize="1" noEditPoints="1" noAdjustHandles="1" noChangeArrowheads="1" noChangeShapeType="1" noTextEdit="1"/>
-          </p:cNvSpPr>
-          <p:nvPr>
-            <p:extLst>
-              <p:ext uri="{386F3935-93C4-4BCD-93E2-E3B085C9AB24}">
-                <p16:designElem xmlns:p16="http://schemas.microsoft.com/office/powerpoint/2015/main" val="1"/>
-              </p:ext>
-            </p:extLst>
-          </p:nvPr>
-        </p:nvSpPr>
-        <p:spPr>
-          <a:xfrm>
-            <a:off x="8042147" y="453643"/>
-            <a:ext cx="3703320" cy="98554"/>
-          </a:xfrm>
-          <a:prstGeom prst="rect">
-            <a:avLst/>
-          </a:prstGeom>
-          <a:solidFill>
-            <a:schemeClr val="accent4"/>
-          </a:solidFill>
-          <a:ln>
-            <a:noFill/>
-          </a:ln>
-          <a:effectLst/>
-        </p:spPr>
-        <p:style>
-          <a:lnRef idx="1">
-            <a:schemeClr val="accent1"/>
-          </a:lnRef>
-          <a:fillRef idx="3">
-            <a:schemeClr val="accent1"/>
-          </a:fillRef>
-          <a:effectRef idx="2">
-            <a:schemeClr val="accent1"/>
-          </a:effectRef>
-          <a:fontRef idx="minor">
-            <a:schemeClr val="lt1"/>
-          </a:fontRef>
-        </p:style>
-        <p:txBody>
-          <a:bodyPr/>
-          <a:lstStyle/>
-          <a:p>
-            <a:endParaRPr lang="en-SG"/>
-          </a:p>
-        </p:txBody>
-      </p:sp>
-      <p:sp>
-        <p:nvSpPr>
-          <p:cNvPr id="27" name="Rectangle 26">
-            <a:extLst>
-              <a:ext uri="{FF2B5EF4-FFF2-40B4-BE49-F238E27FC236}">
-                <a16:creationId xmlns:a16="http://schemas.microsoft.com/office/drawing/2014/main" id="{96A0B76F-8010-4C62-B4B6-C5FC438C059E}"/>
-              </a:ext>
-              <a:ext uri="{C183D7F6-B498-43B3-948B-1728B52AA6E4}">
-                <adec:decorative xmlns:adec="http://schemas.microsoft.com/office/drawing/2017/decorative" val="1"/>
-              </a:ext>
-            </a:extLst>
-          </p:cNvPr>
-          <p:cNvSpPr>
-            <a:spLocks noGrp="1" noRot="1" noChangeAspect="1" noMove="1" noResize="1" noEditPoints="1" noAdjustHandles="1" noChangeArrowheads="1" noChangeShapeType="1" noTextEdit="1"/>
-          </p:cNvSpPr>
-          <p:nvPr>
-            <p:extLst>
-              <p:ext uri="{386F3935-93C4-4BCD-93E2-E3B085C9AB24}">
-                <p16:designElem xmlns:p16="http://schemas.microsoft.com/office/powerpoint/2015/main" val="1"/>
-              </p:ext>
-            </p:extLst>
-          </p:nvPr>
-        </p:nvSpPr>
-        <p:spPr>
-          <a:xfrm>
-            <a:off x="4241830" y="457200"/>
-            <a:ext cx="3703320" cy="91440"/>
-          </a:xfrm>
-          <a:prstGeom prst="rect">
-            <a:avLst/>
-          </a:prstGeom>
-          <a:solidFill>
-            <a:schemeClr val="accent2"/>
-          </a:solidFill>
-          <a:ln>
-            <a:noFill/>
-          </a:ln>
-          <a:effectLst/>
-        </p:spPr>
-        <p:style>
-          <a:lnRef idx="1">
-            <a:schemeClr val="accent1"/>
-          </a:lnRef>
-          <a:fillRef idx="3">
-            <a:schemeClr val="accent1"/>
-          </a:fillRef>
-          <a:effectRef idx="2">
-            <a:schemeClr val="accent1"/>
-          </a:effectRef>
-          <a:fontRef idx="minor">
-            <a:schemeClr val="lt1"/>
-          </a:fontRef>
-        </p:style>
-        <p:txBody>
-          <a:bodyPr/>
-          <a:lstStyle/>
-          <a:p>
-            <a:endParaRPr lang="en-SG"/>
-          </a:p>
-        </p:txBody>
-      </p:sp>
-      <p:sp>
-        <p:nvSpPr>
-          <p:cNvPr id="29" name="Rectangle 28">
-            <a:extLst>
-              <a:ext uri="{FF2B5EF4-FFF2-40B4-BE49-F238E27FC236}">
-                <a16:creationId xmlns:a16="http://schemas.microsoft.com/office/drawing/2014/main" id="{B36BEBD5-A373-4C8C-8C06-CD8007E22F39}"/>
-              </a:ext>
-              <a:ext uri="{C183D7F6-B498-43B3-948B-1728B52AA6E4}">
-                <adec:decorative xmlns:adec="http://schemas.microsoft.com/office/drawing/2017/decorative" val="1"/>
-              </a:ext>
-            </a:extLst>
-          </p:cNvPr>
-          <p:cNvSpPr>
-            <a:spLocks noGrp="1" noRot="1" noChangeAspect="1" noMove="1" noResize="1" noEditPoints="1" noAdjustHandles="1" noChangeArrowheads="1" noChangeShapeType="1" noTextEdit="1"/>
-          </p:cNvSpPr>
-          <p:nvPr>
-            <p:extLst>
-              <p:ext uri="{386F3935-93C4-4BCD-93E2-E3B085C9AB24}">
-                <p16:designElem xmlns:p16="http://schemas.microsoft.com/office/powerpoint/2015/main" val="1"/>
-              </p:ext>
-            </p:extLst>
-          </p:nvPr>
-        </p:nvSpPr>
-        <p:spPr>
-          <a:xfrm>
-            <a:off x="440286" y="614407"/>
-            <a:ext cx="11309338" cy="1189298"/>
-          </a:xfrm>
-          <a:prstGeom prst="rect">
-            <a:avLst/>
-          </a:prstGeom>
-          <a:solidFill>
-            <a:schemeClr val="accent1"/>
-          </a:solidFill>
-          <a:ln>
-            <a:noFill/>
-          </a:ln>
-          <a:effectLst/>
-        </p:spPr>
-        <p:style>
-          <a:lnRef idx="1">
-            <a:schemeClr val="accent1"/>
-          </a:lnRef>
-          <a:fillRef idx="3">
-            <a:schemeClr val="accent1"/>
-          </a:fillRef>
-          <a:effectRef idx="2">
-            <a:schemeClr val="accent1"/>
-          </a:effectRef>
-          <a:fontRef idx="minor">
-            <a:schemeClr val="lt1"/>
-          </a:fontRef>
-        </p:style>
-        <p:txBody>
-          <a:bodyPr/>
-          <a:lstStyle/>
-          <a:p>
-            <a:endParaRPr lang="en-SG"/>
-          </a:p>
-        </p:txBody>
-      </p:sp>
-      <p:sp>
-        <p:nvSpPr>
-          <p:cNvPr id="2" name="Title 1">
-            <a:extLst>
-              <a:ext uri="{FF2B5EF4-FFF2-40B4-BE49-F238E27FC236}">
-                <a16:creationId xmlns:a16="http://schemas.microsoft.com/office/drawing/2014/main" id="{16B4A4C4-A6F4-421D-AD5A-6F0EFEBB9C72}"/>
-              </a:ext>
-            </a:extLst>
-          </p:cNvPr>
-          <p:cNvSpPr>
-            <a:spLocks noGrp="1"/>
-          </p:cNvSpPr>
-          <p:nvPr>
-            <p:ph type="title"/>
-          </p:nvPr>
-        </p:nvSpPr>
-        <p:spPr>
-          <a:xfrm>
-            <a:off x="581192" y="702156"/>
-            <a:ext cx="11029616" cy="1013800"/>
-          </a:xfrm>
-        </p:spPr>
-        <p:txBody>
-          <a:bodyPr vert="horz" lIns="91440" tIns="45720" rIns="91440" bIns="45720" rtlCol="0" anchor="b">
-            <a:normAutofit/>
-          </a:bodyPr>
-          <a:lstStyle/>
-          <a:p>
-            <a:r>
-              <a:rPr lang="en-US" dirty="0">
-                <a:solidFill>
-                  <a:srgbClr val="FFFFFF"/>
-                </a:solidFill>
-              </a:rPr>
-              <a:t>Corporate Investment and Financing Decisions</a:t>
-            </a:r>
-          </a:p>
-        </p:txBody>
-      </p:sp>
-      <p:sp>
-        <p:nvSpPr>
-          <p:cNvPr id="3" name="Content Placeholder 2">
-            <a:extLst>
-              <a:ext uri="{FF2B5EF4-FFF2-40B4-BE49-F238E27FC236}">
-                <a16:creationId xmlns:a16="http://schemas.microsoft.com/office/drawing/2014/main" id="{D3D1AD1C-49A8-41B1-9189-3179F1DD1BE4}"/>
-              </a:ext>
-            </a:extLst>
-          </p:cNvPr>
-          <p:cNvSpPr>
-            <a:spLocks noGrp="1"/>
-          </p:cNvSpPr>
-          <p:nvPr>
-            <p:ph sz="half" idx="1"/>
-          </p:nvPr>
-        </p:nvSpPr>
-        <p:spPr>
-          <a:xfrm>
-            <a:off x="295820" y="2041795"/>
-            <a:ext cx="7513454" cy="4574762"/>
-          </a:xfrm>
-        </p:spPr>
-        <p:txBody>
-          <a:bodyPr vert="horz" lIns="91440" tIns="45720" rIns="91440" bIns="45720" rtlCol="0" anchor="ctr">
-            <a:normAutofit lnSpcReduction="10000"/>
-          </a:bodyPr>
-          <a:lstStyle/>
-          <a:p>
-            <a:r>
-              <a:rPr lang="en-US" sz="2000" dirty="0"/>
-              <a:t>To do business, a company requires inputs which are then used to produce goods and services. These inputs are known by financiers as “</a:t>
-            </a:r>
-            <a:r>
-              <a:rPr lang="en-US" sz="2000" b="1" dirty="0"/>
-              <a:t>real assets</a:t>
-            </a:r>
-            <a:r>
-              <a:rPr lang="en-US" sz="2000" dirty="0"/>
-              <a:t>”, as they have intrinsic value in and of themselves, rather than having value only from what they can buy. Two categories of real assets:</a:t>
-            </a:r>
-          </a:p>
-          <a:p>
-            <a:pPr lvl="1"/>
-            <a:r>
-              <a:rPr lang="en-US" sz="1800" b="1" dirty="0"/>
-              <a:t>Tangible Assets</a:t>
-            </a:r>
-            <a:r>
-              <a:rPr lang="en-US" sz="1800" dirty="0"/>
-              <a:t>: Physical assets such as oil fields, factories, and machines (things you can touch).</a:t>
-            </a:r>
-          </a:p>
-          <a:p>
-            <a:pPr lvl="1"/>
-            <a:r>
-              <a:rPr lang="en-US" sz="1800" b="1" dirty="0"/>
-              <a:t>Intangible Assets</a:t>
-            </a:r>
-            <a:r>
-              <a:rPr lang="en-US" sz="1800" dirty="0"/>
-              <a:t>: No physical substance, such as patents, brands, and corporate culture</a:t>
-            </a:r>
-            <a:r>
-              <a:rPr lang="en-US" sz="1800"/>
-              <a:t>. </a:t>
-            </a:r>
-            <a:endParaRPr lang="en-US" sz="1800" dirty="0"/>
-          </a:p>
-          <a:p>
-            <a:r>
-              <a:rPr lang="en-US" sz="2000" dirty="0"/>
-              <a:t>Real assets must be bought externally or developed internally; either way, they cost money. Companies pay for their real assets by </a:t>
-            </a:r>
-            <a:r>
-              <a:rPr lang="en-US" sz="2000" b="1" dirty="0"/>
-              <a:t>selling claims on them </a:t>
-            </a:r>
-            <a:r>
-              <a:rPr lang="en-US" sz="2000" dirty="0"/>
-              <a:t>and the cash flows they will generate. These claims are termed “</a:t>
-            </a:r>
-            <a:r>
-              <a:rPr lang="en-US" sz="2000" b="1" dirty="0"/>
-              <a:t>financial assets</a:t>
-            </a:r>
-            <a:r>
-              <a:rPr lang="en-US" sz="2000" dirty="0"/>
-              <a:t>”.</a:t>
-            </a:r>
-          </a:p>
-          <a:p>
-            <a:pPr lvl="1"/>
-            <a:r>
-              <a:rPr lang="en-US" sz="1800" dirty="0"/>
-              <a:t>E.g., issuance of shares/corporate bonds. Tradeable financial assets are known as </a:t>
-            </a:r>
-            <a:r>
-              <a:rPr lang="en-US" sz="1800" b="1" dirty="0"/>
-              <a:t>securities</a:t>
-            </a:r>
-            <a:r>
-              <a:rPr lang="en-US" sz="1800" dirty="0"/>
-              <a:t>. </a:t>
-            </a:r>
-          </a:p>
-        </p:txBody>
-      </p:sp>
-      <p:sp>
-        <p:nvSpPr>
-          <p:cNvPr id="4" name="Slide Number Placeholder 3">
-            <a:extLst>
-              <a:ext uri="{FF2B5EF4-FFF2-40B4-BE49-F238E27FC236}">
-                <a16:creationId xmlns:a16="http://schemas.microsoft.com/office/drawing/2014/main" id="{6F58721D-52D7-4F8F-84CE-ACA86714A1EC}"/>
-              </a:ext>
-            </a:extLst>
-          </p:cNvPr>
-          <p:cNvSpPr>
-            <a:spLocks noGrp="1"/>
-          </p:cNvSpPr>
-          <p:nvPr>
-            <p:ph type="sldNum" sz="quarter" idx="12"/>
-          </p:nvPr>
-        </p:nvSpPr>
-        <p:spPr>
-          <a:xfrm>
-            <a:off x="7264399" y="5956137"/>
-            <a:ext cx="544875" cy="365125"/>
-          </a:xfrm>
-        </p:spPr>
-        <p:txBody>
-          <a:bodyPr vert="horz" lIns="91440" tIns="45720" rIns="91440" bIns="45720" rtlCol="0" anchor="ctr">
-            <a:normAutofit/>
-          </a:bodyPr>
-          <a:lstStyle/>
-          <a:p>
-            <a:pPr>
-              <a:spcAft>
-                <a:spcPts val="600"/>
-              </a:spcAft>
-            </a:pPr>
-            <a:fld id="{7128DA7F-F6FE-453F-B8BB-1900E7257DA6}" type="slidenum">
-              <a:rPr lang="en-US" smtClean="0"/>
-              <a:pPr>
-                <a:spcAft>
-                  <a:spcPts val="600"/>
-                </a:spcAft>
-              </a:pPr>
-              <a:t>4</a:t>
-            </a:fld>
-            <a:endParaRPr lang="en-US"/>
-          </a:p>
-        </p:txBody>
-      </p:sp>
-      <p:pic>
-        <p:nvPicPr>
-          <p:cNvPr id="7" name="Content Placeholder 6">
-            <a:extLst>
-              <a:ext uri="{FF2B5EF4-FFF2-40B4-BE49-F238E27FC236}">
-                <a16:creationId xmlns:a16="http://schemas.microsoft.com/office/drawing/2014/main" id="{F26DE1D4-5FCD-D7C6-F28D-E8620109A68B}"/>
-              </a:ext>
-            </a:extLst>
-          </p:cNvPr>
-          <p:cNvPicPr>
-            <a:picLocks noGrp="1" noChangeAspect="1"/>
-          </p:cNvPicPr>
-          <p:nvPr>
-            <p:ph sz="half" idx="2"/>
-          </p:nvPr>
-        </p:nvPicPr>
-        <p:blipFill>
-          <a:blip r:embed="rId3">
-            <a:extLst>
-              <a:ext uri="{28A0092B-C50C-407E-A947-70E740481C1C}">
-                <a14:useLocalDpi xmlns:a14="http://schemas.microsoft.com/office/drawing/2010/main" val="0"/>
-              </a:ext>
-              <a:ext uri="{837473B0-CC2E-450A-ABE3-18F120FF3D39}">
-                <a1611:picAttrSrcUrl xmlns:a1611="http://schemas.microsoft.com/office/drawing/2016/11/main" r:id="rId4"/>
-              </a:ext>
-            </a:extLst>
-          </a:blip>
-          <a:srcRect l="22744" r="22744"/>
-          <a:stretch/>
-        </p:blipFill>
-        <p:spPr>
-          <a:xfrm>
-            <a:off x="8051799" y="1871133"/>
-            <a:ext cx="3683001" cy="4504267"/>
-          </a:xfrm>
-          <a:prstGeom prst="rect">
-            <a:avLst/>
-          </a:prstGeom>
-        </p:spPr>
-      </p:pic>
-      <p:sp>
-        <p:nvSpPr>
-          <p:cNvPr id="5" name="TextBox 4">
-            <a:extLst>
-              <a:ext uri="{FF2B5EF4-FFF2-40B4-BE49-F238E27FC236}">
-                <a16:creationId xmlns:a16="http://schemas.microsoft.com/office/drawing/2014/main" id="{BA9A87F7-4427-E85E-46C3-1AAF28A83627}"/>
-              </a:ext>
-            </a:extLst>
-          </p:cNvPr>
-          <p:cNvSpPr txBox="1"/>
-          <p:nvPr/>
-        </p:nvSpPr>
-        <p:spPr>
-          <a:xfrm>
-            <a:off x="8051799" y="6375400"/>
-            <a:ext cx="3683001" cy="230832"/>
-          </a:xfrm>
-          <a:prstGeom prst="rect">
-            <a:avLst/>
-          </a:prstGeom>
-          <a:noFill/>
-        </p:spPr>
-        <p:txBody>
-          <a:bodyPr wrap="square" rtlCol="0">
-            <a:spAutoFit/>
-          </a:bodyPr>
-          <a:lstStyle/>
-          <a:p>
-            <a:r>
-              <a:rPr lang="en-SG" sz="900">
-                <a:hlinkClick r:id="rId4" tooltip="https://www.thebluediamondgallery.com/wooden-tile/a/asset.html"/>
-              </a:rPr>
-              <a:t>This Photo</a:t>
-            </a:r>
-            <a:r>
-              <a:rPr lang="en-SG" sz="900"/>
-              <a:t> by Unknown Author is licensed under </a:t>
-            </a:r>
-            <a:r>
-              <a:rPr lang="en-SG" sz="900">
-                <a:hlinkClick r:id="rId5" tooltip="https://creativecommons.org/licenses/by-sa/3.0/"/>
-              </a:rPr>
-              <a:t>CC BY-SA</a:t>
-            </a:r>
-            <a:endParaRPr lang="en-SG" sz="900"/>
-          </a:p>
-        </p:txBody>
-      </p:sp>
-    </p:spTree>
-    <p:extLst>
-      <p:ext uri="{BB962C8B-B14F-4D97-AF65-F5344CB8AC3E}">
-        <p14:creationId xmlns:p14="http://schemas.microsoft.com/office/powerpoint/2010/main" val="57641549"/>
-      </p:ext>
-    </p:extLst>
-  </p:cSld>
-  <p:clrMapOvr>
-    <a:masterClrMapping/>
-  </p:clrMapOvr>
-</p:sld>
-</file>
-
-<file path=ppt/slides/slide40.xml><?xml version="1.0" encoding="utf-8"?>
+<file path=ppt/slides/slide43.xml><?xml version="1.0" encoding="utf-8"?>
 <p:sld xmlns:a="http://schemas.openxmlformats.org/drawingml/2006/main" xmlns:r="http://schemas.openxmlformats.org/officeDocument/2006/relationships" xmlns:p="http://schemas.openxmlformats.org/presentationml/2006/main">
   <p:cSld>
     <p:spTree>
@@ -24989,7 +26185,7 @@
                   <a:spcPts val="600"/>
                 </a:spcAft>
               </a:pPr>
-              <a:t>40</a:t>
+              <a:t>43</a:t>
             </a:fld>
             <a:endParaRPr lang="en-US" dirty="0"/>
           </a:p>
@@ -25467,7 +26663,7 @@
                     <m:sSup>
                       <m:sSupPr>
                         <m:ctrlPr>
-                          <a:rPr lang="en-US" sz="2000" i="1" dirty="0" smtClean="0">
+                          <a:rPr lang="en-US" sz="2000" b="0" i="1" dirty="0" smtClean="0">
                             <a:latin typeface="Cambria Math" panose="02040503050406030204" pitchFamily="18" charset="0"/>
                           </a:rPr>
                         </m:ctrlPr>
@@ -25662,7 +26858,7 @@
 </p:sld>
 </file>
 
-<file path=ppt/slides/slide41.xml><?xml version="1.0" encoding="utf-8"?>
+<file path=ppt/slides/slide44.xml><?xml version="1.0" encoding="utf-8"?>
 <p:sld xmlns:a="http://schemas.openxmlformats.org/drawingml/2006/main" xmlns:r="http://schemas.openxmlformats.org/officeDocument/2006/relationships" xmlns:p="http://schemas.openxmlformats.org/presentationml/2006/main">
   <p:cSld>
     <p:spTree>
@@ -25772,7 +26968,7 @@
           <a:p>
             <a:fld id="{7128DA7F-F6FE-453F-B8BB-1900E7257DA6}" type="slidenum">
               <a:rPr lang="en-US" smtClean="0"/>
-              <a:t>41</a:t>
+              <a:t>44</a:t>
             </a:fld>
             <a:endParaRPr lang="en-US" dirty="0"/>
           </a:p>
@@ -26824,7 +28020,7 @@
         <p:cNvPr id="1" name="">
           <a:extLst>
             <a:ext uri="{FF2B5EF4-FFF2-40B4-BE49-F238E27FC236}">
-              <a16:creationId xmlns:a16="http://schemas.microsoft.com/office/drawing/2014/main" id="{AAFEB2BE-7BD5-CC6B-6FC4-B04A575D15C9}"/>
+              <a16:creationId xmlns:a16="http://schemas.microsoft.com/office/drawing/2014/main" id="{435C6641-1482-D4C0-99F2-1B2931ABF436}"/>
             </a:ext>
           </a:extLst>
         </p:cNvPr>
@@ -26844,7 +28040,7 @@
           <p:cNvPr id="2" name="Title 1">
             <a:extLst>
               <a:ext uri="{FF2B5EF4-FFF2-40B4-BE49-F238E27FC236}">
-                <a16:creationId xmlns:a16="http://schemas.microsoft.com/office/drawing/2014/main" id="{61EB8550-4BBA-C5C1-B77A-A00A5417DA7B}"/>
+                <a16:creationId xmlns:a16="http://schemas.microsoft.com/office/drawing/2014/main" id="{EB7723A0-E6B0-C902-E6BC-9165ECDB544D}"/>
               </a:ext>
             </a:extLst>
           </p:cNvPr>
@@ -26875,7 +28071,6 @@
               </a:rPr>
               <a:t>Corporate Investment and Financing Decisions</a:t>
             </a:r>
-            <a:endParaRPr lang="en-US" dirty="0"/>
           </a:p>
         </p:txBody>
       </p:sp>
@@ -26884,7 +28079,7 @@
           <p:cNvPr id="4" name="Slide Number Placeholder 3">
             <a:extLst>
               <a:ext uri="{FF2B5EF4-FFF2-40B4-BE49-F238E27FC236}">
-                <a16:creationId xmlns:a16="http://schemas.microsoft.com/office/drawing/2014/main" id="{6BF5E4D0-4F99-3048-D027-998BC90A3CAA}"/>
+                <a16:creationId xmlns:a16="http://schemas.microsoft.com/office/drawing/2014/main" id="{73CFEE19-D43F-CB9E-B4F2-A237BDED98C8}"/>
               </a:ext>
             </a:extLst>
           </p:cNvPr>
@@ -26897,8 +28092,8 @@
         </p:nvSpPr>
         <p:spPr>
           <a:xfrm>
-            <a:off x="10558300" y="6400800"/>
-            <a:ext cx="1052508" cy="365125"/>
+            <a:off x="11338370" y="6290048"/>
+            <a:ext cx="544875" cy="365125"/>
           </a:xfrm>
         </p:spPr>
         <p:txBody>
@@ -26925,88 +28120,46 @@
           </a:p>
         </p:txBody>
       </p:sp>
-      <p:sp>
-        <p:nvSpPr>
-          <p:cNvPr id="10" name="Content Placeholder 2">
-            <a:extLst>
-              <a:ext uri="{FF2B5EF4-FFF2-40B4-BE49-F238E27FC236}">
-                <a16:creationId xmlns:a16="http://schemas.microsoft.com/office/drawing/2014/main" id="{92D8BF62-94A9-13D5-7B2A-1B7BC6BF8702}"/>
-              </a:ext>
-            </a:extLst>
-          </p:cNvPr>
-          <p:cNvSpPr>
-            <a:spLocks noGrp="1"/>
-          </p:cNvSpPr>
-          <p:nvPr>
-            <p:ph sz="half" idx="1"/>
-          </p:nvPr>
-        </p:nvSpPr>
+      <p:pic>
+        <p:nvPicPr>
+          <p:cNvPr id="8" name="Picture 7">
+            <a:extLst>
+              <a:ext uri="{FF2B5EF4-FFF2-40B4-BE49-F238E27FC236}">
+                <a16:creationId xmlns:a16="http://schemas.microsoft.com/office/drawing/2014/main" id="{1E552D12-C471-285B-7A06-D3C669A84E63}"/>
+              </a:ext>
+            </a:extLst>
+          </p:cNvPr>
+          <p:cNvPicPr>
+            <a:picLocks noChangeAspect="1"/>
+          </p:cNvPicPr>
+          <p:nvPr/>
+        </p:nvPicPr>
+        <p:blipFill>
+          <a:blip r:embed="rId3">
+            <a:extLst>
+              <a:ext uri="{28A0092B-C50C-407E-A947-70E740481C1C}">
+                <a14:useLocalDpi xmlns:a14="http://schemas.microsoft.com/office/drawing/2010/main" val="0"/>
+              </a:ext>
+            </a:extLst>
+          </a:blip>
+          <a:stretch>
+            <a:fillRect/>
+          </a:stretch>
+        </p:blipFill>
         <p:spPr>
           <a:xfrm>
-            <a:off x="344184" y="2039592"/>
-            <a:ext cx="11362010" cy="4607788"/>
+            <a:off x="2594851" y="2086668"/>
+            <a:ext cx="6395037" cy="4612081"/>
           </a:xfrm>
+          <a:prstGeom prst="rect">
+            <a:avLst/>
+          </a:prstGeom>
         </p:spPr>
-        <p:txBody>
-          <a:bodyPr vert="horz" lIns="91440" tIns="45720" rIns="91440" bIns="45720" rtlCol="0" anchor="ctr">
-            <a:normAutofit/>
-          </a:bodyPr>
-          <a:lstStyle/>
-          <a:p>
-            <a:r>
-              <a:rPr lang="en-US" sz="2000" dirty="0"/>
-              <a:t>The financing decision largely involves decisions as to whether to raise funding via debt or equity. The choice between debt and equity financing is called </a:t>
-            </a:r>
-            <a:r>
-              <a:rPr lang="en-US" sz="2000" b="1" dirty="0"/>
-              <a:t>the capital structure decision</a:t>
-            </a:r>
-            <a:r>
-              <a:rPr lang="en-US" sz="2000" dirty="0"/>
-              <a:t>:</a:t>
-            </a:r>
-          </a:p>
-          <a:p>
-            <a:pPr lvl="1"/>
-            <a:r>
-              <a:rPr lang="en-US" sz="1800" dirty="0"/>
-              <a:t>Debt: Lenders provide debt. In return, they receive an agreed rate of interest and are repaid the debt at maturity, the end of the loan. </a:t>
-            </a:r>
-          </a:p>
-          <a:p>
-            <a:pPr lvl="1"/>
-            <a:r>
-              <a:rPr lang="en-US" sz="1800" dirty="0"/>
-              <a:t>Equity: Shareholders provide equity. In return, they [may] receive a fraction of any future dividends the company chooses to pay out. </a:t>
-            </a:r>
-          </a:p>
-          <a:p>
-            <a:r>
-              <a:rPr lang="en-US" sz="2000" dirty="0"/>
-              <a:t>The financing choices available to large companies seem almost endless. Suppose the firm chooses debt. Should it borrow from a bank or issue tradeable bonds? Should it borrow for 1 year or 20 years? If it borrows for 20 years, should it reserve the right to pay off the debt early? Suppose the firm chooses equity. Should it issue dividends to the shareholders, or should it reinvest profits into real assets via retained earnings?</a:t>
-            </a:r>
-          </a:p>
-          <a:p>
-            <a:pPr lvl="1"/>
-            <a:r>
-              <a:rPr lang="en-US" sz="1800" dirty="0"/>
-              <a:t>C.f. focus in law (e.g., Luh Luh’s course), where we are concerned about the </a:t>
-            </a:r>
-            <a:r>
-              <a:rPr lang="en-US" sz="1800" b="1" dirty="0"/>
-              <a:t>legal regime that constrains financing decisions</a:t>
-            </a:r>
-            <a:r>
-              <a:rPr lang="en-US" sz="1800" dirty="0"/>
-              <a:t>.</a:t>
-            </a:r>
-          </a:p>
-        </p:txBody>
-      </p:sp>
+      </p:pic>
     </p:spTree>
     <p:extLst>
       <p:ext uri="{BB962C8B-B14F-4D97-AF65-F5344CB8AC3E}">
-        <p14:creationId xmlns:p14="http://schemas.microsoft.com/office/powerpoint/2010/main" val="3328346651"/>
+        <p14:creationId xmlns:p14="http://schemas.microsoft.com/office/powerpoint/2010/main" val="2542151734"/>
       </p:ext>
     </p:extLst>
   </p:cSld>
@@ -27019,12 +28172,20 @@
 <file path=ppt/slides/slide8.xml><?xml version="1.0" encoding="utf-8"?>
 <p:sld xmlns:a="http://schemas.openxmlformats.org/drawingml/2006/main" xmlns:r="http://schemas.openxmlformats.org/officeDocument/2006/relationships" xmlns:p="http://schemas.openxmlformats.org/presentationml/2006/main">
   <p:cSld>
+    <p:bg>
+      <p:bgPr>
+        <a:solidFill>
+          <a:schemeClr val="bg1"/>
+        </a:solidFill>
+        <a:effectLst/>
+      </p:bgPr>
+    </p:bg>
     <p:spTree>
       <p:nvGrpSpPr>
         <p:cNvPr id="1" name="">
           <a:extLst>
             <a:ext uri="{FF2B5EF4-FFF2-40B4-BE49-F238E27FC236}">
-              <a16:creationId xmlns:a16="http://schemas.microsoft.com/office/drawing/2014/main" id="{90F50D76-6D8C-8C14-667D-E0B938200247}"/>
+              <a16:creationId xmlns:a16="http://schemas.microsoft.com/office/drawing/2014/main" id="{69D9DC68-9C5F-D852-4BEB-D75BC2E3D564}"/>
             </a:ext>
           </a:extLst>
         </p:cNvPr>
@@ -27041,24 +28202,425 @@
       </p:grpSpPr>
       <p:sp>
         <p:nvSpPr>
-          <p:cNvPr id="2" name="Title 1">
-            <a:extLst>
-              <a:ext uri="{FF2B5EF4-FFF2-40B4-BE49-F238E27FC236}">
-                <a16:creationId xmlns:a16="http://schemas.microsoft.com/office/drawing/2014/main" id="{5CF28523-82B1-6FB7-8175-56508158B015}"/>
-              </a:ext>
-            </a:extLst>
-          </p:cNvPr>
-          <p:cNvSpPr>
-            <a:spLocks noGrp="1"/>
-          </p:cNvSpPr>
-          <p:nvPr>
-            <p:ph type="title"/>
+          <p:cNvPr id="10" name="Rectangle 9">
+            <a:extLst>
+              <a:ext uri="{FF2B5EF4-FFF2-40B4-BE49-F238E27FC236}">
+                <a16:creationId xmlns:a16="http://schemas.microsoft.com/office/drawing/2014/main" id="{DB691D59-8F51-4DD8-AD41-D568D29B08F8}"/>
+              </a:ext>
+              <a:ext uri="{C183D7F6-B498-43B3-948B-1728B52AA6E4}">
+                <adec:decorative xmlns:adec="http://schemas.microsoft.com/office/drawing/2017/decorative" val="1"/>
+              </a:ext>
+            </a:extLst>
+          </p:cNvPr>
+          <p:cNvSpPr>
+            <a:spLocks noGrp="1" noRot="1" noChangeAspect="1" noMove="1" noResize="1" noEditPoints="1" noAdjustHandles="1" noChangeArrowheads="1" noChangeShapeType="1" noTextEdit="1"/>
+          </p:cNvSpPr>
+          <p:nvPr>
+            <p:extLst>
+              <p:ext uri="{386F3935-93C4-4BCD-93E2-E3B085C9AB24}">
+                <p16:designElem xmlns:p16="http://schemas.microsoft.com/office/powerpoint/2015/main" val="1"/>
+              </p:ext>
+            </p:extLst>
           </p:nvPr>
         </p:nvSpPr>
         <p:spPr>
           <a:xfrm>
-            <a:off x="581192" y="702156"/>
-            <a:ext cx="11029616" cy="1013800"/>
+            <a:off x="446534" y="457200"/>
+            <a:ext cx="3703320" cy="94997"/>
+          </a:xfrm>
+          <a:prstGeom prst="rect">
+            <a:avLst/>
+          </a:prstGeom>
+          <a:solidFill>
+            <a:schemeClr val="accent1"/>
+          </a:solidFill>
+          <a:ln>
+            <a:noFill/>
+          </a:ln>
+          <a:effectLst/>
+        </p:spPr>
+        <p:style>
+          <a:lnRef idx="1">
+            <a:schemeClr val="accent1"/>
+          </a:lnRef>
+          <a:fillRef idx="3">
+            <a:schemeClr val="accent1"/>
+          </a:fillRef>
+          <a:effectRef idx="2">
+            <a:schemeClr val="accent1"/>
+          </a:effectRef>
+          <a:fontRef idx="minor">
+            <a:schemeClr val="lt1"/>
+          </a:fontRef>
+        </p:style>
+        <p:txBody>
+          <a:bodyPr/>
+          <a:lstStyle/>
+          <a:p>
+            <a:endParaRPr lang="en-SG"/>
+          </a:p>
+        </p:txBody>
+      </p:sp>
+      <p:sp>
+        <p:nvSpPr>
+          <p:cNvPr id="12" name="Rectangle 11">
+            <a:extLst>
+              <a:ext uri="{FF2B5EF4-FFF2-40B4-BE49-F238E27FC236}">
+                <a16:creationId xmlns:a16="http://schemas.microsoft.com/office/drawing/2014/main" id="{204AEF18-0627-48F3-9B3D-F7E8F050B1D4}"/>
+              </a:ext>
+              <a:ext uri="{C183D7F6-B498-43B3-948B-1728B52AA6E4}">
+                <adec:decorative xmlns:adec="http://schemas.microsoft.com/office/drawing/2017/decorative" val="1"/>
+              </a:ext>
+            </a:extLst>
+          </p:cNvPr>
+          <p:cNvSpPr>
+            <a:spLocks noGrp="1" noRot="1" noChangeAspect="1" noMove="1" noResize="1" noEditPoints="1" noAdjustHandles="1" noChangeArrowheads="1" noChangeShapeType="1" noTextEdit="1"/>
+          </p:cNvSpPr>
+          <p:nvPr>
+            <p:extLst>
+              <p:ext uri="{386F3935-93C4-4BCD-93E2-E3B085C9AB24}">
+                <p16:designElem xmlns:p16="http://schemas.microsoft.com/office/powerpoint/2015/main" val="1"/>
+              </p:ext>
+            </p:extLst>
+          </p:nvPr>
+        </p:nvSpPr>
+        <p:spPr>
+          <a:xfrm>
+            <a:off x="8042147" y="453643"/>
+            <a:ext cx="3703320" cy="98554"/>
+          </a:xfrm>
+          <a:prstGeom prst="rect">
+            <a:avLst/>
+          </a:prstGeom>
+          <a:solidFill>
+            <a:schemeClr val="accent4"/>
+          </a:solidFill>
+          <a:ln>
+            <a:noFill/>
+          </a:ln>
+          <a:effectLst/>
+        </p:spPr>
+        <p:style>
+          <a:lnRef idx="1">
+            <a:schemeClr val="accent1"/>
+          </a:lnRef>
+          <a:fillRef idx="3">
+            <a:schemeClr val="accent1"/>
+          </a:fillRef>
+          <a:effectRef idx="2">
+            <a:schemeClr val="accent1"/>
+          </a:effectRef>
+          <a:fontRef idx="minor">
+            <a:schemeClr val="lt1"/>
+          </a:fontRef>
+        </p:style>
+        <p:txBody>
+          <a:bodyPr/>
+          <a:lstStyle/>
+          <a:p>
+            <a:endParaRPr lang="en-SG"/>
+          </a:p>
+        </p:txBody>
+      </p:sp>
+      <p:sp>
+        <p:nvSpPr>
+          <p:cNvPr id="14" name="Rectangle 13">
+            <a:extLst>
+              <a:ext uri="{FF2B5EF4-FFF2-40B4-BE49-F238E27FC236}">
+                <a16:creationId xmlns:a16="http://schemas.microsoft.com/office/drawing/2014/main" id="{CEAEE08A-C572-438F-9753-B0D527A515A7}"/>
+              </a:ext>
+              <a:ext uri="{C183D7F6-B498-43B3-948B-1728B52AA6E4}">
+                <adec:decorative xmlns:adec="http://schemas.microsoft.com/office/drawing/2017/decorative" val="1"/>
+              </a:ext>
+            </a:extLst>
+          </p:cNvPr>
+          <p:cNvSpPr>
+            <a:spLocks noGrp="1" noRot="1" noChangeAspect="1" noMove="1" noResize="1" noEditPoints="1" noAdjustHandles="1" noChangeArrowheads="1" noChangeShapeType="1" noTextEdit="1"/>
+          </p:cNvSpPr>
+          <p:nvPr>
+            <p:extLst>
+              <p:ext uri="{386F3935-93C4-4BCD-93E2-E3B085C9AB24}">
+                <p16:designElem xmlns:p16="http://schemas.microsoft.com/office/powerpoint/2015/main" val="1"/>
+              </p:ext>
+            </p:extLst>
+          </p:nvPr>
+        </p:nvSpPr>
+        <p:spPr>
+          <a:xfrm>
+            <a:off x="4241830" y="457200"/>
+            <a:ext cx="3703320" cy="91440"/>
+          </a:xfrm>
+          <a:prstGeom prst="rect">
+            <a:avLst/>
+          </a:prstGeom>
+          <a:solidFill>
+            <a:schemeClr val="accent2"/>
+          </a:solidFill>
+          <a:ln>
+            <a:noFill/>
+          </a:ln>
+          <a:effectLst/>
+        </p:spPr>
+        <p:style>
+          <a:lnRef idx="1">
+            <a:schemeClr val="accent1"/>
+          </a:lnRef>
+          <a:fillRef idx="3">
+            <a:schemeClr val="accent1"/>
+          </a:fillRef>
+          <a:effectRef idx="2">
+            <a:schemeClr val="accent1"/>
+          </a:effectRef>
+          <a:fontRef idx="minor">
+            <a:schemeClr val="lt1"/>
+          </a:fontRef>
+        </p:style>
+        <p:txBody>
+          <a:bodyPr/>
+          <a:lstStyle/>
+          <a:p>
+            <a:endParaRPr lang="en-SG"/>
+          </a:p>
+        </p:txBody>
+      </p:sp>
+      <p:sp>
+        <p:nvSpPr>
+          <p:cNvPr id="16" name="Rectangle 15">
+            <a:extLst>
+              <a:ext uri="{FF2B5EF4-FFF2-40B4-BE49-F238E27FC236}">
+                <a16:creationId xmlns:a16="http://schemas.microsoft.com/office/drawing/2014/main" id="{DB93146F-62ED-4C59-844C-0935D0FB5031}"/>
+              </a:ext>
+              <a:ext uri="{C183D7F6-B498-43B3-948B-1728B52AA6E4}">
+                <adec:decorative xmlns:adec="http://schemas.microsoft.com/office/drawing/2017/decorative" val="1"/>
+              </a:ext>
+            </a:extLst>
+          </p:cNvPr>
+          <p:cNvSpPr>
+            <a:spLocks noGrp="1" noRot="1" noChangeAspect="1" noMove="1" noResize="1" noEditPoints="1" noAdjustHandles="1" noChangeArrowheads="1" noChangeShapeType="1" noTextEdit="1"/>
+          </p:cNvSpPr>
+          <p:nvPr>
+            <p:extLst>
+              <p:ext uri="{386F3935-93C4-4BCD-93E2-E3B085C9AB24}">
+                <p16:designElem xmlns:p16="http://schemas.microsoft.com/office/powerpoint/2015/main" val="1"/>
+              </p:ext>
+            </p:extLst>
+          </p:nvPr>
+        </p:nvSpPr>
+        <p:spPr>
+          <a:xfrm>
+            <a:off x="446534" y="3085765"/>
+            <a:ext cx="11262866" cy="3304800"/>
+          </a:xfrm>
+          <a:prstGeom prst="rect">
+            <a:avLst/>
+          </a:prstGeom>
+          <a:solidFill>
+            <a:schemeClr val="accent1"/>
+          </a:solidFill>
+          <a:ln>
+            <a:noFill/>
+          </a:ln>
+          <a:effectLst/>
+        </p:spPr>
+        <p:style>
+          <a:lnRef idx="1">
+            <a:schemeClr val="accent1"/>
+          </a:lnRef>
+          <a:fillRef idx="3">
+            <a:schemeClr val="accent1"/>
+          </a:fillRef>
+          <a:effectRef idx="2">
+            <a:schemeClr val="accent1"/>
+          </a:effectRef>
+          <a:fontRef idx="minor">
+            <a:schemeClr val="lt1"/>
+          </a:fontRef>
+        </p:style>
+        <p:txBody>
+          <a:bodyPr/>
+          <a:lstStyle/>
+          <a:p>
+            <a:endParaRPr lang="en-SG"/>
+          </a:p>
+        </p:txBody>
+      </p:sp>
+      <p:sp useBgFill="1">
+        <p:nvSpPr>
+          <p:cNvPr id="18" name="Rectangle 17">
+            <a:extLst>
+              <a:ext uri="{FF2B5EF4-FFF2-40B4-BE49-F238E27FC236}">
+                <a16:creationId xmlns:a16="http://schemas.microsoft.com/office/drawing/2014/main" id="{BF3D65BA-1C65-40FB-92EF-83951BDC1D7C}"/>
+              </a:ext>
+              <a:ext uri="{C183D7F6-B498-43B3-948B-1728B52AA6E4}">
+                <adec:decorative xmlns:adec="http://schemas.microsoft.com/office/drawing/2017/decorative" val="1"/>
+              </a:ext>
+            </a:extLst>
+          </p:cNvPr>
+          <p:cNvSpPr>
+            <a:spLocks noGrp="1" noRot="1" noChangeAspect="1" noMove="1" noResize="1" noEditPoints="1" noAdjustHandles="1" noChangeArrowheads="1" noChangeShapeType="1" noTextEdit="1"/>
+          </p:cNvSpPr>
+          <p:nvPr>
+            <p:extLst>
+              <p:ext uri="{386F3935-93C4-4BCD-93E2-E3B085C9AB24}">
+                <p16:designElem xmlns:p16="http://schemas.microsoft.com/office/powerpoint/2015/main" val="1"/>
+              </p:ext>
+            </p:extLst>
+          </p:nvPr>
+        </p:nvSpPr>
+        <p:spPr>
+          <a:xfrm>
+            <a:off x="0" y="638175"/>
+            <a:ext cx="12191999" cy="6219825"/>
+          </a:xfrm>
+          <a:prstGeom prst="rect">
+            <a:avLst/>
+          </a:prstGeom>
+          <a:ln>
+            <a:noFill/>
+          </a:ln>
+        </p:spPr>
+        <p:style>
+          <a:lnRef idx="2">
+            <a:schemeClr val="accent1">
+              <a:shade val="50000"/>
+            </a:schemeClr>
+          </a:lnRef>
+          <a:fillRef idx="1">
+            <a:schemeClr val="accent1"/>
+          </a:fillRef>
+          <a:effectRef idx="0">
+            <a:schemeClr val="accent1"/>
+          </a:effectRef>
+          <a:fontRef idx="minor">
+            <a:schemeClr val="lt1"/>
+          </a:fontRef>
+        </p:style>
+        <p:txBody>
+          <a:bodyPr rtlCol="0" anchor="ctr"/>
+          <a:lstStyle/>
+          <a:p>
+            <a:pPr algn="ctr"/>
+            <a:endParaRPr lang="en-US"/>
+          </a:p>
+        </p:txBody>
+      </p:sp>
+      <p:pic>
+        <p:nvPicPr>
+          <p:cNvPr id="5" name="Picture 4">
+            <a:extLst>
+              <a:ext uri="{FF2B5EF4-FFF2-40B4-BE49-F238E27FC236}">
+                <a16:creationId xmlns:a16="http://schemas.microsoft.com/office/drawing/2014/main" id="{DA9323B9-9877-56B6-80FE-E4EE828F8FF3}"/>
+              </a:ext>
+            </a:extLst>
+          </p:cNvPr>
+          <p:cNvPicPr>
+            <a:picLocks noChangeAspect="1"/>
+          </p:cNvPicPr>
+          <p:nvPr/>
+        </p:nvPicPr>
+        <p:blipFill>
+          <a:blip r:embed="rId3">
+            <a:extLst>
+              <a:ext uri="{28A0092B-C50C-407E-A947-70E740481C1C}">
+                <a14:useLocalDpi xmlns:a14="http://schemas.microsoft.com/office/drawing/2010/main" val="0"/>
+              </a:ext>
+            </a:extLst>
+          </a:blip>
+          <a:stretch>
+            <a:fillRect/>
+          </a:stretch>
+        </p:blipFill>
+        <p:spPr>
+          <a:xfrm>
+            <a:off x="1673502" y="1047665"/>
+            <a:ext cx="5030386" cy="5030386"/>
+          </a:xfrm>
+          <a:prstGeom prst="rect">
+            <a:avLst/>
+          </a:prstGeom>
+        </p:spPr>
+      </p:pic>
+      <p:sp>
+        <p:nvSpPr>
+          <p:cNvPr id="20" name="Rectangle 19">
+            <a:extLst>
+              <a:ext uri="{FF2B5EF4-FFF2-40B4-BE49-F238E27FC236}">
+                <a16:creationId xmlns:a16="http://schemas.microsoft.com/office/drawing/2014/main" id="{ADF52CCA-FCDD-49A0-BFFC-3BD41F1B827A}"/>
+              </a:ext>
+              <a:ext uri="{C183D7F6-B498-43B3-948B-1728B52AA6E4}">
+                <adec:decorative xmlns:adec="http://schemas.microsoft.com/office/drawing/2017/decorative" val="1"/>
+              </a:ext>
+            </a:extLst>
+          </p:cNvPr>
+          <p:cNvSpPr>
+            <a:spLocks noGrp="1" noRot="1" noChangeAspect="1" noMove="1" noResize="1" noEditPoints="1" noAdjustHandles="1" noChangeArrowheads="1" noChangeShapeType="1" noTextEdit="1"/>
+          </p:cNvSpPr>
+          <p:nvPr>
+            <p:extLst>
+              <p:ext uri="{386F3935-93C4-4BCD-93E2-E3B085C9AB24}">
+                <p16:designElem xmlns:p16="http://schemas.microsoft.com/office/powerpoint/2015/main" val="1"/>
+              </p:ext>
+            </p:extLst>
+          </p:nvPr>
+        </p:nvSpPr>
+        <p:spPr>
+          <a:xfrm>
+            <a:off x="8042147" y="723899"/>
+            <a:ext cx="3703320" cy="5666666"/>
+          </a:xfrm>
+          <a:prstGeom prst="rect">
+            <a:avLst/>
+          </a:prstGeom>
+          <a:solidFill>
+            <a:schemeClr val="accent1"/>
+          </a:solidFill>
+          <a:ln>
+            <a:noFill/>
+          </a:ln>
+          <a:effectLst/>
+        </p:spPr>
+        <p:style>
+          <a:lnRef idx="1">
+            <a:schemeClr val="accent1"/>
+          </a:lnRef>
+          <a:fillRef idx="3">
+            <a:schemeClr val="accent1"/>
+          </a:fillRef>
+          <a:effectRef idx="2">
+            <a:schemeClr val="accent1"/>
+          </a:effectRef>
+          <a:fontRef idx="minor">
+            <a:schemeClr val="lt1"/>
+          </a:fontRef>
+        </p:style>
+        <p:txBody>
+          <a:bodyPr/>
+          <a:lstStyle/>
+          <a:p>
+            <a:endParaRPr lang="en-SG"/>
+          </a:p>
+        </p:txBody>
+      </p:sp>
+      <p:sp>
+        <p:nvSpPr>
+          <p:cNvPr id="2" name="Title 1">
+            <a:extLst>
+              <a:ext uri="{FF2B5EF4-FFF2-40B4-BE49-F238E27FC236}">
+                <a16:creationId xmlns:a16="http://schemas.microsoft.com/office/drawing/2014/main" id="{77D3E96E-0CD3-9746-D5CA-BDCAACCF6E01}"/>
+              </a:ext>
+            </a:extLst>
+          </p:cNvPr>
+          <p:cNvSpPr>
+            <a:spLocks noGrp="1"/>
+          </p:cNvSpPr>
+          <p:nvPr>
+            <p:ph type="title"/>
+          </p:nvPr>
+        </p:nvSpPr>
+        <p:spPr>
+          <a:xfrm>
+            <a:off x="8296275" y="1419225"/>
+            <a:ext cx="3081576" cy="2085869"/>
           </a:xfrm>
         </p:spPr>
         <p:txBody>
@@ -27067,6 +28629,11 @@
           </a:bodyPr>
           <a:lstStyle/>
           <a:p>
+            <a:pPr>
+              <a:lnSpc>
+                <a:spcPct val="90000"/>
+              </a:lnSpc>
+            </a:pPr>
             <a:r>
               <a:rPr lang="en-US" dirty="0">
                 <a:solidFill>
@@ -27075,7 +28642,11 @@
               </a:rPr>
               <a:t>Corporate Investment and Financing Decisions</a:t>
             </a:r>
-            <a:endParaRPr lang="en-US" dirty="0"/>
+            <a:endParaRPr lang="en-US">
+              <a:solidFill>
+                <a:srgbClr val="FFFFFF"/>
+              </a:solidFill>
+            </a:endParaRPr>
           </a:p>
         </p:txBody>
       </p:sp>
@@ -27084,7 +28655,7 @@
           <p:cNvPr id="4" name="Slide Number Placeholder 3">
             <a:extLst>
               <a:ext uri="{FF2B5EF4-FFF2-40B4-BE49-F238E27FC236}">
-                <a16:creationId xmlns:a16="http://schemas.microsoft.com/office/drawing/2014/main" id="{4827AE37-C88B-33BB-860E-8309E8E29B73}"/>
+                <a16:creationId xmlns:a16="http://schemas.microsoft.com/office/drawing/2014/main" id="{C5FB7F38-FCA5-1312-3530-D1908A73F61C}"/>
               </a:ext>
             </a:extLst>
           </p:cNvPr>
@@ -27098,7 +28669,7 @@
         <p:spPr>
           <a:xfrm>
             <a:off x="10558300" y="6400800"/>
-            <a:ext cx="1052508" cy="365125"/>
+            <a:ext cx="1016440" cy="365125"/>
           </a:xfrm>
         </p:spPr>
         <p:txBody>
@@ -27107,390 +28678,42 @@
           </a:bodyPr>
           <a:lstStyle/>
           <a:p>
-            <a:pPr>
+            <a:pPr defTabSz="914400">
               <a:spcAft>
                 <a:spcPts val="600"/>
               </a:spcAft>
             </a:pPr>
             <a:fld id="{7128DA7F-F6FE-453F-B8BB-1900E7257DA6}" type="slidenum">
-              <a:rPr lang="en-US" smtClean="0"/>
-              <a:pPr>
+              <a:rPr lang="en-US" smtClean="0">
+                <a:solidFill>
+                  <a:schemeClr val="accent1">
+                    <a:lumMod val="75000"/>
+                    <a:lumOff val="25000"/>
+                  </a:schemeClr>
+                </a:solidFill>
+              </a:rPr>
+              <a:pPr defTabSz="914400">
                 <a:spcAft>
                   <a:spcPts val="600"/>
                 </a:spcAft>
               </a:pPr>
               <a:t>8</a:t>
             </a:fld>
-            <a:endParaRPr lang="en-US" dirty="0"/>
-          </a:p>
-        </p:txBody>
-      </p:sp>
-      <p:graphicFrame>
-        <p:nvGraphicFramePr>
-          <p:cNvPr id="6" name="Table 9">
-            <a:extLst>
-              <a:ext uri="{FF2B5EF4-FFF2-40B4-BE49-F238E27FC236}">
-                <a16:creationId xmlns:a16="http://schemas.microsoft.com/office/drawing/2014/main" id="{CADBE7B9-E5A2-0624-E3D3-17E06AF55BD9}"/>
-              </a:ext>
-            </a:extLst>
-          </p:cNvPr>
-          <p:cNvGraphicFramePr>
-            <a:graphicFrameLocks noGrp="1"/>
-          </p:cNvGraphicFramePr>
-          <p:nvPr>
-            <p:extLst>
-              <p:ext uri="{D42A27DB-BD31-4B8C-83A1-F6EECF244321}">
-                <p14:modId xmlns:p14="http://schemas.microsoft.com/office/powerpoint/2010/main" val="1368630320"/>
-              </p:ext>
-            </p:extLst>
-          </p:nvPr>
-        </p:nvGraphicFramePr>
-        <p:xfrm>
-          <a:off x="2152728" y="2029146"/>
-          <a:ext cx="7886544" cy="4593721"/>
-        </p:xfrm>
-        <a:graphic>
-          <a:graphicData uri="http://schemas.openxmlformats.org/drawingml/2006/table">
-            <a:tbl>
-              <a:tblPr firstRow="1" bandRow="1">
-                <a:tableStyleId>{5C22544A-7EE6-4342-B048-85BDC9FD1C3A}</a:tableStyleId>
-              </a:tblPr>
-              <a:tblGrid>
-                <a:gridCol w="1865743">
-                  <a:extLst>
-                    <a:ext uri="{9D8B030D-6E8A-4147-A177-3AD203B41FA5}">
-                      <a16:colId xmlns:a16="http://schemas.microsoft.com/office/drawing/2014/main" val="1994840649"/>
-                    </a:ext>
-                  </a:extLst>
-                </a:gridCol>
-                <a:gridCol w="3156634">
-                  <a:extLst>
-                    <a:ext uri="{9D8B030D-6E8A-4147-A177-3AD203B41FA5}">
-                      <a16:colId xmlns:a16="http://schemas.microsoft.com/office/drawing/2014/main" val="1213569130"/>
-                    </a:ext>
-                  </a:extLst>
-                </a:gridCol>
-                <a:gridCol w="2864167">
-                  <a:extLst>
-                    <a:ext uri="{9D8B030D-6E8A-4147-A177-3AD203B41FA5}">
-                      <a16:colId xmlns:a16="http://schemas.microsoft.com/office/drawing/2014/main" val="2659718133"/>
-                    </a:ext>
-                  </a:extLst>
-                </a:gridCol>
-              </a:tblGrid>
-              <a:tr h="613097">
-                <a:tc>
-                  <a:txBody>
-                    <a:bodyPr/>
-                    <a:lstStyle/>
-                    <a:p>
-                      <a:r>
-                        <a:rPr lang="en-US" sz="1600" dirty="0"/>
-                        <a:t>Company</a:t>
-                      </a:r>
-                    </a:p>
-                  </a:txBody>
-                  <a:tcPr/>
-                </a:tc>
-                <a:tc>
-                  <a:txBody>
-                    <a:bodyPr/>
-                    <a:lstStyle/>
-                    <a:p>
-                      <a:r>
-                        <a:rPr lang="en-US" sz="1600" dirty="0"/>
-                        <a:t>Recent Investment Decisions</a:t>
-                      </a:r>
-                    </a:p>
-                  </a:txBody>
-                  <a:tcPr/>
-                </a:tc>
-                <a:tc>
-                  <a:txBody>
-                    <a:bodyPr/>
-                    <a:lstStyle/>
-                    <a:p>
-                      <a:r>
-                        <a:rPr lang="en-US" sz="1600" dirty="0"/>
-                        <a:t>Recent Financing Decisions</a:t>
-                      </a:r>
-                    </a:p>
-                  </a:txBody>
-                  <a:tcPr/>
-                </a:tc>
-                <a:extLst>
-                  <a:ext uri="{0D108BD9-81ED-4DB2-BD59-A6C34878D82A}">
-                    <a16:rowId xmlns:a16="http://schemas.microsoft.com/office/drawing/2014/main" val="3524318364"/>
-                  </a:ext>
-                </a:extLst>
-              </a:tr>
-              <a:tr h="792444">
-                <a:tc>
-                  <a:txBody>
-                    <a:bodyPr/>
-                    <a:lstStyle/>
-                    <a:p>
-                      <a:r>
-                        <a:rPr lang="en-US" sz="1600" dirty="0"/>
-                        <a:t>Intel (US)</a:t>
-                      </a:r>
-                    </a:p>
-                  </a:txBody>
-                  <a:tcPr/>
-                </a:tc>
-                <a:tc>
-                  <a:txBody>
-                    <a:bodyPr/>
-                    <a:lstStyle/>
-                    <a:p>
-                      <a:r>
-                        <a:rPr lang="en-US" sz="1600" dirty="0"/>
-                        <a:t>Invests $7 billion in expanding semiconductor plant in Chandler, Arizona.</a:t>
-                      </a:r>
-                    </a:p>
-                  </a:txBody>
-                  <a:tcPr/>
-                </a:tc>
-                <a:tc>
-                  <a:txBody>
-                    <a:bodyPr/>
-                    <a:lstStyle/>
-                    <a:p>
-                      <a:r>
-                        <a:rPr lang="en-US" sz="1600" dirty="0"/>
-                        <a:t>Borrows $600 million from Chandler Industrial Development Authority.</a:t>
-                      </a:r>
-                    </a:p>
-                  </a:txBody>
-                  <a:tcPr/>
-                </a:tc>
-                <a:extLst>
-                  <a:ext uri="{0D108BD9-81ED-4DB2-BD59-A6C34878D82A}">
-                    <a16:rowId xmlns:a16="http://schemas.microsoft.com/office/drawing/2014/main" val="3605431750"/>
-                  </a:ext>
-                </a:extLst>
-              </a:tr>
-              <a:tr h="755872">
-                <a:tc>
-                  <a:txBody>
-                    <a:bodyPr/>
-                    <a:lstStyle/>
-                    <a:p>
-                      <a:r>
-                        <a:rPr lang="en-US" sz="1600" dirty="0"/>
-                        <a:t>Amazon (US)</a:t>
-                      </a:r>
-                    </a:p>
-                  </a:txBody>
-                  <a:tcPr/>
-                </a:tc>
-                <a:tc>
-                  <a:txBody>
-                    <a:bodyPr/>
-                    <a:lstStyle/>
-                    <a:p>
-                      <a:r>
-                        <a:rPr lang="en-US" sz="1600" dirty="0"/>
-                        <a:t>Acquires self-driving start-up, </a:t>
-                      </a:r>
-                      <a:r>
-                        <a:rPr lang="en-US" sz="1600" dirty="0" err="1"/>
-                        <a:t>Zoox</a:t>
-                      </a:r>
-                      <a:r>
-                        <a:rPr lang="en-US" sz="1600" dirty="0"/>
-                        <a:t>, for over $1.2 billion</a:t>
-                      </a:r>
-                    </a:p>
-                  </a:txBody>
-                  <a:tcPr/>
-                </a:tc>
-                <a:tc>
-                  <a:txBody>
-                    <a:bodyPr/>
-                    <a:lstStyle/>
-                    <a:p>
-                      <a:r>
-                        <a:rPr lang="en-US" sz="1600" dirty="0"/>
-                        <a:t>Reinvests $33 billion that it generates from operations</a:t>
-                      </a:r>
-                    </a:p>
-                  </a:txBody>
-                  <a:tcPr/>
-                </a:tc>
-                <a:extLst>
-                  <a:ext uri="{0D108BD9-81ED-4DB2-BD59-A6C34878D82A}">
-                    <a16:rowId xmlns:a16="http://schemas.microsoft.com/office/drawing/2014/main" val="3916050718"/>
-                  </a:ext>
-                </a:extLst>
-              </a:tr>
-              <a:tr h="792444">
-                <a:tc>
-                  <a:txBody>
-                    <a:bodyPr/>
-                    <a:lstStyle/>
-                    <a:p>
-                      <a:r>
-                        <a:rPr lang="en-US" sz="1600" dirty="0"/>
-                        <a:t>Tesla (US)</a:t>
-                      </a:r>
-                    </a:p>
-                  </a:txBody>
-                  <a:tcPr/>
-                </a:tc>
-                <a:tc>
-                  <a:txBody>
-                    <a:bodyPr/>
-                    <a:lstStyle/>
-                    <a:p>
-                      <a:r>
-                        <a:rPr lang="en-US" sz="1600" dirty="0"/>
-                        <a:t>Announces construction of new plant to build the electric </a:t>
-                      </a:r>
-                      <a:r>
-                        <a:rPr lang="en-US" sz="1600" dirty="0" err="1"/>
-                        <a:t>Cybertruck</a:t>
-                      </a:r>
-                      <a:endParaRPr lang="en-US" sz="1600" dirty="0"/>
-                    </a:p>
-                  </a:txBody>
-                  <a:tcPr/>
-                </a:tc>
-                <a:tc>
-                  <a:txBody>
-                    <a:bodyPr/>
-                    <a:lstStyle/>
-                    <a:p>
-                      <a:r>
-                        <a:rPr lang="en-US" sz="1600" dirty="0"/>
-                        <a:t>Announces plans to sell $2 billion of shares</a:t>
-                      </a:r>
-                    </a:p>
-                  </a:txBody>
-                  <a:tcPr/>
-                </a:tc>
-                <a:extLst>
-                  <a:ext uri="{0D108BD9-81ED-4DB2-BD59-A6C34878D82A}">
-                    <a16:rowId xmlns:a16="http://schemas.microsoft.com/office/drawing/2014/main" val="2539725806"/>
-                  </a:ext>
-                </a:extLst>
-              </a:tr>
-              <a:tr h="755872">
-                <a:tc>
-                  <a:txBody>
-                    <a:bodyPr/>
-                    <a:lstStyle/>
-                    <a:p>
-                      <a:r>
-                        <a:rPr lang="en-US" sz="1600" dirty="0"/>
-                        <a:t>Shell (UK)</a:t>
-                      </a:r>
-                    </a:p>
-                  </a:txBody>
-                  <a:tcPr/>
-                </a:tc>
-                <a:tc>
-                  <a:txBody>
-                    <a:bodyPr/>
-                    <a:lstStyle/>
-                    <a:p>
-                      <a:r>
-                        <a:rPr lang="en-US" sz="1600" dirty="0"/>
-                        <a:t>Starts production at a deep water development in the Gulf of Mexico</a:t>
-                      </a:r>
-                    </a:p>
-                  </a:txBody>
-                  <a:tcPr/>
-                </a:tc>
-                <a:tc>
-                  <a:txBody>
-                    <a:bodyPr/>
-                    <a:lstStyle/>
-                    <a:p>
-                      <a:r>
-                        <a:rPr lang="en-US" sz="1600" dirty="0"/>
-                        <a:t>Cuts dividend to preserve cash</a:t>
-                      </a:r>
-                    </a:p>
-                  </a:txBody>
-                  <a:tcPr/>
-                </a:tc>
-                <a:extLst>
-                  <a:ext uri="{0D108BD9-81ED-4DB2-BD59-A6C34878D82A}">
-                    <a16:rowId xmlns:a16="http://schemas.microsoft.com/office/drawing/2014/main" val="2090028308"/>
-                  </a:ext>
-                </a:extLst>
-              </a:tr>
-              <a:tr h="792444">
-                <a:tc>
-                  <a:txBody>
-                    <a:bodyPr/>
-                    <a:lstStyle/>
-                    <a:p>
-                      <a:r>
-                        <a:rPr lang="en-US" sz="1600" dirty="0"/>
-                        <a:t>B</a:t>
-                      </a:r>
-                      <a:r>
-                        <a:rPr lang="en-US" sz="100" dirty="0"/>
-                        <a:t> </a:t>
-                      </a:r>
-                      <a:r>
-                        <a:rPr lang="en-US" sz="1600" dirty="0"/>
-                        <a:t>Y</a:t>
-                      </a:r>
-                      <a:r>
-                        <a:rPr lang="en-US" sz="100" dirty="0"/>
-                        <a:t> </a:t>
-                      </a:r>
-                      <a:r>
-                        <a:rPr lang="en-US" sz="1600" dirty="0"/>
-                        <a:t>D (China)</a:t>
-                      </a:r>
-                    </a:p>
-                  </a:txBody>
-                  <a:tcPr/>
-                </a:tc>
-                <a:tc>
-                  <a:txBody>
-                    <a:bodyPr/>
-                    <a:lstStyle/>
-                    <a:p>
-                      <a:r>
-                        <a:rPr lang="en-US" sz="1600" dirty="0"/>
-                        <a:t>Increases production capacity to meet fast-growing demand for its electric cars</a:t>
-                      </a:r>
-                    </a:p>
-                  </a:txBody>
-                  <a:tcPr/>
-                </a:tc>
-                <a:tc>
-                  <a:txBody>
-                    <a:bodyPr/>
-                    <a:lstStyle/>
-                    <a:p>
-                      <a:r>
-                        <a:rPr lang="en-US" sz="1600" dirty="0"/>
-                        <a:t>Reduces total debt from RMB 33.7 billion to RMB 18.5 billion</a:t>
-                      </a:r>
-                    </a:p>
-                  </a:txBody>
-                  <a:tcPr/>
-                </a:tc>
-                <a:extLst>
-                  <a:ext uri="{0D108BD9-81ED-4DB2-BD59-A6C34878D82A}">
-                    <a16:rowId xmlns:a16="http://schemas.microsoft.com/office/drawing/2014/main" val="10005"/>
-                  </a:ext>
-                </a:extLst>
-              </a:tr>
-            </a:tbl>
-          </a:graphicData>
-        </a:graphic>
-      </p:graphicFrame>
+            <a:endParaRPr lang="en-US">
+              <a:solidFill>
+                <a:schemeClr val="accent1">
+                  <a:lumMod val="75000"/>
+                  <a:lumOff val="25000"/>
+                </a:schemeClr>
+              </a:solidFill>
+            </a:endParaRPr>
+          </a:p>
+        </p:txBody>
+      </p:sp>
     </p:spTree>
     <p:extLst>
       <p:ext uri="{BB962C8B-B14F-4D97-AF65-F5344CB8AC3E}">
-        <p14:creationId xmlns:p14="http://schemas.microsoft.com/office/powerpoint/2010/main" val="4123574077"/>
+        <p14:creationId xmlns:p14="http://schemas.microsoft.com/office/powerpoint/2010/main" val="307497639"/>
       </p:ext>
     </p:extLst>
   </p:cSld>
@@ -27508,7 +28731,7 @@
         <p:cNvPr id="1" name="">
           <a:extLst>
             <a:ext uri="{FF2B5EF4-FFF2-40B4-BE49-F238E27FC236}">
-              <a16:creationId xmlns:a16="http://schemas.microsoft.com/office/drawing/2014/main" id="{10F9DE5D-A6E2-E17F-25B5-BFA9D8E94729}"/>
+              <a16:creationId xmlns:a16="http://schemas.microsoft.com/office/drawing/2014/main" id="{AAFEB2BE-7BD5-CC6B-6FC4-B04A575D15C9}"/>
             </a:ext>
           </a:extLst>
         </p:cNvPr>
@@ -27528,7 +28751,7 @@
           <p:cNvPr id="2" name="Title 1">
             <a:extLst>
               <a:ext uri="{FF2B5EF4-FFF2-40B4-BE49-F238E27FC236}">
-                <a16:creationId xmlns:a16="http://schemas.microsoft.com/office/drawing/2014/main" id="{0FC63237-590D-D213-0A52-D887700E9C83}"/>
+                <a16:creationId xmlns:a16="http://schemas.microsoft.com/office/drawing/2014/main" id="{61EB8550-4BBA-C5C1-B77A-A00A5417DA7B}"/>
               </a:ext>
             </a:extLst>
           </p:cNvPr>
@@ -27568,7 +28791,7 @@
           <p:cNvPr id="4" name="Slide Number Placeholder 3">
             <a:extLst>
               <a:ext uri="{FF2B5EF4-FFF2-40B4-BE49-F238E27FC236}">
-                <a16:creationId xmlns:a16="http://schemas.microsoft.com/office/drawing/2014/main" id="{62127590-A699-239F-80CB-4765DFB0EEBA}"/>
+                <a16:creationId xmlns:a16="http://schemas.microsoft.com/office/drawing/2014/main" id="{6BF5E4D0-4F99-3048-D027-998BC90A3CAA}"/>
               </a:ext>
             </a:extLst>
           </p:cNvPr>
@@ -27609,56 +28832,26 @@
           </a:p>
         </p:txBody>
       </p:sp>
-      <p:pic>
-        <p:nvPicPr>
-          <p:cNvPr id="3" name="Picture 2" descr="A diagram of cash flow cycle. 1, firm raises funds, 2, invests in operations, 3, generates cash,4, reinvests/pays investors.">
-            <a:extLst>
-              <a:ext uri="{FF2B5EF4-FFF2-40B4-BE49-F238E27FC236}">
-                <a16:creationId xmlns:a16="http://schemas.microsoft.com/office/drawing/2014/main" id="{8FE77140-4D0E-7AB8-A63D-7F17662FF6BA}"/>
-              </a:ext>
-            </a:extLst>
-          </p:cNvPr>
-          <p:cNvPicPr>
-            <a:picLocks noChangeAspect="1"/>
-          </p:cNvPicPr>
-          <p:nvPr/>
-        </p:nvPicPr>
-        <p:blipFill>
-          <a:blip r:embed="rId3"/>
-          <a:stretch>
-            <a:fillRect/>
-          </a:stretch>
-        </p:blipFill>
+      <p:sp>
+        <p:nvSpPr>
+          <p:cNvPr id="10" name="Content Placeholder 2">
+            <a:extLst>
+              <a:ext uri="{FF2B5EF4-FFF2-40B4-BE49-F238E27FC236}">
+                <a16:creationId xmlns:a16="http://schemas.microsoft.com/office/drawing/2014/main" id="{92D8BF62-94A9-13D5-7B2A-1B7BC6BF8702}"/>
+              </a:ext>
+            </a:extLst>
+          </p:cNvPr>
+          <p:cNvSpPr>
+            <a:spLocks noGrp="1"/>
+          </p:cNvSpPr>
+          <p:nvPr>
+            <p:ph sz="half" idx="1"/>
+          </p:nvPr>
+        </p:nvSpPr>
         <p:spPr>
           <a:xfrm>
-            <a:off x="2836284" y="2036399"/>
-            <a:ext cx="6519429" cy="2363855"/>
-          </a:xfrm>
-          <a:prstGeom prst="rect">
-            <a:avLst/>
-          </a:prstGeom>
-        </p:spPr>
-      </p:pic>
-      <p:sp>
-        <p:nvSpPr>
-          <p:cNvPr id="7" name="Content Placeholder 2">
-            <a:extLst>
-              <a:ext uri="{FF2B5EF4-FFF2-40B4-BE49-F238E27FC236}">
-                <a16:creationId xmlns:a16="http://schemas.microsoft.com/office/drawing/2014/main" id="{CAF8365A-B86A-692F-8B00-E407180A8ED7}"/>
-              </a:ext>
-            </a:extLst>
-          </p:cNvPr>
-          <p:cNvSpPr>
-            <a:spLocks noGrp="1"/>
-          </p:cNvSpPr>
-          <p:nvPr>
-            <p:ph sz="half" idx="1"/>
-          </p:nvPr>
-        </p:nvSpPr>
-        <p:spPr>
-          <a:xfrm>
-            <a:off x="2114131" y="4564640"/>
-            <a:ext cx="7963734" cy="2136874"/>
+            <a:off x="344184" y="2039592"/>
+            <a:ext cx="11362010" cy="4607788"/>
           </a:xfrm>
         </p:spPr>
         <p:txBody>
@@ -27667,52 +28860,52 @@
           </a:bodyPr>
           <a:lstStyle/>
           <a:p>
-            <a:pPr marL="342900" indent="-342900">
-              <a:buFont typeface="+mj-lt"/>
-              <a:buAutoNum type="arabicPeriod"/>
-            </a:pPr>
-            <a:r>
-              <a:rPr lang="en-US" dirty="0"/>
-              <a:t>Cash raised by selling financial assets to investors.</a:t>
-            </a:r>
-          </a:p>
-          <a:p>
-            <a:pPr marL="342900" indent="-342900">
-              <a:buFont typeface="+mj-lt"/>
-              <a:buAutoNum type="arabicPeriod"/>
-            </a:pPr>
-            <a:r>
-              <a:rPr lang="en-US" dirty="0"/>
-              <a:t>Cash invested in the firm’s operations and used to purchase real assets.</a:t>
-            </a:r>
-          </a:p>
-          <a:p>
-            <a:pPr marL="342900" indent="-342900">
-              <a:buFont typeface="+mj-lt"/>
-              <a:buAutoNum type="arabicPeriod"/>
-            </a:pPr>
-            <a:r>
-              <a:rPr lang="en-US" dirty="0"/>
-              <a:t>Cash generated by the firm’s operations.</a:t>
-            </a:r>
-          </a:p>
-          <a:p>
-            <a:pPr marL="342900" indent="-342900">
-              <a:buFont typeface="+mj-lt"/>
-              <a:buAutoNum type="arabicPeriod"/>
-            </a:pPr>
-            <a:r>
-              <a:rPr lang="en-US" dirty="0"/>
-              <a:t>(a) Cash reinvested (b) Cash returned to investors.</a:t>
-            </a:r>
-          </a:p>
-          <a:p>
-            <a:pPr marL="0" indent="0">
-              <a:buNone/>
-            </a:pPr>
-            <a:r>
-              <a:rPr lang="en-US" dirty="0"/>
-              <a:t>Q: Who is the “financial manager” here?</a:t>
+            <a:r>
+              <a:rPr lang="en-US" sz="2000" dirty="0"/>
+              <a:t>The financing decision largely involves decisions as to whether to raise funding via debt or equity. The choice between debt and equity financing is called </a:t>
+            </a:r>
+            <a:r>
+              <a:rPr lang="en-US" sz="2000" b="1" dirty="0"/>
+              <a:t>the capital structure decision</a:t>
+            </a:r>
+            <a:r>
+              <a:rPr lang="en-US" sz="2000" dirty="0"/>
+              <a:t>:</a:t>
+            </a:r>
+          </a:p>
+          <a:p>
+            <a:pPr lvl="1"/>
+            <a:r>
+              <a:rPr lang="en-US" sz="1800" dirty="0"/>
+              <a:t>Debt: Lenders provide debt. In return, they receive an agreed rate of interest and are repaid the debt at maturity, the end of the loan. </a:t>
+            </a:r>
+          </a:p>
+          <a:p>
+            <a:pPr lvl="1"/>
+            <a:r>
+              <a:rPr lang="en-US" sz="1800" dirty="0"/>
+              <a:t>Equity: Shareholders provide equity. In return, they [may] receive a fraction of any future dividends the company chooses to pay out. </a:t>
+            </a:r>
+          </a:p>
+          <a:p>
+            <a:r>
+              <a:rPr lang="en-US" sz="2000" dirty="0"/>
+              <a:t>The financing choices available to large companies seem almost endless. Suppose the firm chooses debt. Should it borrow from a bank or issue tradeable bonds? Should it borrow for 1 year or 20 years? If it borrows for 20 years, should it reserve the right to pay off the debt early? Suppose the firm chooses equity. Should it issue dividends to the shareholders, or should it reinvest profits into real assets via retained earnings?</a:t>
+            </a:r>
+          </a:p>
+          <a:p>
+            <a:pPr lvl="1"/>
+            <a:r>
+              <a:rPr lang="en-US" sz="1800" dirty="0"/>
+              <a:t>C.f. focus in law (e.g., Luh Luh’s course), where we are concerned about the </a:t>
+            </a:r>
+            <a:r>
+              <a:rPr lang="en-US" sz="1800" b="1" dirty="0"/>
+              <a:t>legal regime that constrains financing decisions</a:t>
+            </a:r>
+            <a:r>
+              <a:rPr lang="en-US" sz="1800" dirty="0"/>
+              <a:t>.</a:t>
             </a:r>
           </a:p>
         </p:txBody>
@@ -27720,7 +28913,7 @@
     </p:spTree>
     <p:extLst>
       <p:ext uri="{BB962C8B-B14F-4D97-AF65-F5344CB8AC3E}">
-        <p14:creationId xmlns:p14="http://schemas.microsoft.com/office/powerpoint/2010/main" val="93092744"/>
+        <p14:creationId xmlns:p14="http://schemas.microsoft.com/office/powerpoint/2010/main" val="3328346651"/>
       </p:ext>
     </p:extLst>
   </p:cSld>
